--- a/CacheMeIfYouCan_PS3_Final.pptx
+++ b/CacheMeIfYouCan_PS3_Final.pptx
@@ -4,6 +4,9 @@
   <p:sldMasterIdLst>
     <p:sldMasterId id="2147483648" r:id="rId1"/>
   </p:sldMasterIdLst>
+  <p:notesMasterIdLst>
+    <p:notesMasterId r:id="rId20"/>
+  </p:notesMasterIdLst>
   <p:sldIdLst>
     <p:sldId id="256" r:id="rId2"/>
     <p:sldId id="257" r:id="rId3"/>
@@ -24,9 +27,6 @@
     <p:sldId id="272" r:id="rId18"/>
     <p:sldId id="273" r:id="rId19"/>
   </p:sldIdLst>
-  <p:notesMasterIdLst>
-    <p:notesMasterId r:id="rId20"/>
-  </p:notesMasterIdLst>
   <p:sldSz cx="12192000" cy="6858000"/>
   <p:notesSz cx="6858000" cy="12192000"/>
   <p:defaultTextStyle>
@@ -124,19 +124,19 @@
   <p:extLst>
     <p:ext uri="{521415D9-36F7-43E2-AB2F-B90AF26B5E84}">
       <p14:sectionLst xmlns:p14="http://schemas.microsoft.com/office/powerpoint/2010/main">
-        <p14:section name="Opening" id="{88669a28-b334-d53a-6a72-4dc28e5ce1f6}">
+        <p14:section name="Opening" id="{88669A28-B334-D53A-6A72-4DC28E5CE1F6}">
           <p14:sldIdLst>
             <p14:sldId id="256"/>
             <p14:sldId id="257"/>
             <p14:sldId id="258"/>
           </p14:sldIdLst>
         </p14:section>
-        <p14:section name="Solution" id="{fc68ba5f-80dc-e110-9c8b-9cb4fc79953a}">
+        <p14:section name="Solution" id="{FC68BA5F-80DC-E110-9C8B-9CB4FC79953A}">
           <p14:sldIdLst>
             <p14:sldId id="259"/>
           </p14:sldIdLst>
         </p14:section>
-        <p14:section name="Design (HLD / LLD)" id="{509e8d32-0506-bd90-a9ae-c836453c7b3e}">
+        <p14:section name="Design (HLD / LLD)" id="{509E8D32-0506-BD90-A9AE-C836453C7B3E}">
           <p14:sldIdLst>
             <p14:sldId id="260"/>
             <p14:sldId id="261"/>
@@ -146,7 +146,7 @@
             <p14:sldId id="265"/>
           </p14:sldIdLst>
         </p14:section>
-        <p14:section name="Results" id="{0af4b317-fcc6-c4af-a282-deb11ebbb31e}">
+        <p14:section name="Results" id="{0AF4B317-FCC6-C4AF-A282-DEB11EBBB31E}">
           <p14:sldIdLst>
             <p14:sldId id="266"/>
             <p14:sldId id="267"/>
@@ -154,12 +154,12 @@
             <p14:sldId id="269"/>
           </p14:sldIdLst>
         </p14:section>
-        <p14:section name="Live demo" id="{8aace659-f469-299a-c8db-64cc739f4629}">
+        <p14:section name="Live demo" id="{8AACE659-F469-299A-C8DB-64CC739F4629}">
           <p14:sldIdLst>
             <p14:sldId id="270"/>
           </p14:sldIdLst>
         </p14:section>
-        <p14:section name="Close" id="{5fb07f7e-6486-cb08-f822-dad0328ec7e0}">
+        <p14:section name="Close" id="{5FB07F7E-6486-CB08-F822-DAD0328EC7E0}">
           <p14:sldIdLst>
             <p14:sldId id="271"/>
             <p14:sldId id="272"/>
@@ -176,9 +176,11 @@
 </file>
 
 <file path=ppt/charts/chart1.xml><?xml version="1.0" encoding="utf-8"?>
-<c:chartSpace xmlns:c="http://schemas.openxmlformats.org/drawingml/2006/chart" xmlns:a="http://schemas.openxmlformats.org/drawingml/2006/main" xmlns:r="http://schemas.openxmlformats.org/officeDocument/2006/relationships">
+<c:chartSpace xmlns:c="http://schemas.openxmlformats.org/drawingml/2006/chart" xmlns:a="http://schemas.openxmlformats.org/drawingml/2006/main" xmlns:r="http://schemas.openxmlformats.org/officeDocument/2006/relationships" xmlns:c16r2="http://schemas.microsoft.com/office/drawing/2015/06/chart">
   <c:date1904 val="0"/>
+  <c:lang val="en-US"/>
   <c:roundedCorners val="1"/>
+  <c:style val="2"/>
   <c:chart>
     <c:title>
       <c:tx>
@@ -195,7 +197,7 @@
               </a:defRPr>
             </a:pPr>
             <a:r>
-              <a:rPr sz="1300" b="0" i="0" u="none" strike="noStrike">
+              <a:rPr lang="en-US" sz="1300" b="0" i="0" u="none" strike="noStrike">
                 <a:solidFill>
                   <a:srgbClr val="14213D"/>
                 </a:solidFill>
@@ -206,7 +208,6 @@
           </a:p>
         </c:rich>
       </c:tx>
-      <c:layout/>
       <c:overlay val="0"/>
     </c:title>
     <c:autoTitleDeleted val="0"/>
@@ -239,18 +240,26 @@
           <c:invertIfNegative val="0"/>
           <c:dLbls>
             <c:numFmt formatCode="0&quot;%&quot;" sourceLinked="0"/>
+            <c:spPr>
+              <a:noFill/>
+              <a:ln>
+                <a:noFill/>
+              </a:ln>
+              <a:effectLst/>
+            </c:spPr>
             <c:txPr>
               <a:bodyPr/>
               <a:lstStyle/>
               <a:p>
                 <a:pPr>
-                  <a:defRPr b="0" i="0" strike="noStrike" sz="1100" u="none">
+                  <a:defRPr sz="1100" b="0" i="0" u="none" strike="noStrike">
                     <a:solidFill>
                       <a:srgbClr val="3D4757"/>
                     </a:solidFill>
                     <a:latin typeface="+mn-lt"/>
                   </a:defRPr>
                 </a:pPr>
+                <a:endParaRPr lang="en-US"/>
               </a:p>
             </c:txPr>
             <c:showLegendKey val="0"/>
@@ -260,28 +269,31 @@
             <c:showPercent val="0"/>
             <c:showBubbleSize val="0"/>
             <c:showLeaderLines val="0"/>
+            <c:extLst>
+              <c:ext xmlns:c15="http://schemas.microsoft.com/office/drawing/2012/chart" uri="{CE6537A1-D6FC-4f65-9D91-7224C49458BB}">
+                <c15:showLeaderLines val="0"/>
+              </c:ext>
+            </c:extLst>
           </c:dLbls>
           <c:cat>
-            <c:multiLvlStrRef>
+            <c:strRef>
               <c:f>Sheet1!$A$2:$A$5</c:f>
-              <c:multiLvlStrCache>
+              <c:strCache>
                 <c:ptCount val="4"/>
-                <c:lvl>
-                  <c:pt idx="0">
-                    <c:v>Mapping accuracy (20%)</c:v>
-                  </c:pt>
-                  <c:pt idx="1">
-                    <c:v>Anomaly recall (15%)</c:v>
-                  </c:pt>
-                  <c:pt idx="2">
-                    <c:v>Transformation correctness (15%)</c:v>
-                  </c:pt>
-                  <c:pt idx="3">
-                    <c:v>Explainability (15%)</c:v>
-                  </c:pt>
-                </c:lvl>
-              </c:multiLvlStrCache>
-            </c:multiLvlStrRef>
+                <c:pt idx="0">
+                  <c:v>Mapping accuracy (20%)</c:v>
+                </c:pt>
+                <c:pt idx="1">
+                  <c:v>Anomaly recall (15%)</c:v>
+                </c:pt>
+                <c:pt idx="2">
+                  <c:v>Transformation correctness (15%)</c:v>
+                </c:pt>
+                <c:pt idx="3">
+                  <c:v>Explainability (15%)</c:v>
+                </c:pt>
+              </c:strCache>
+            </c:strRef>
           </c:cat>
           <c:val>
             <c:numRef>
@@ -304,6 +316,11 @@
               </c:numCache>
             </c:numRef>
           </c:val>
+          <c:extLst>
+            <c:ext xmlns:c16="http://schemas.microsoft.com/office/drawing/2014/chart" uri="{C3380CC4-5D6E-409C-BE32-E72D297353CC}">
+              <c16:uniqueId val="{00000000-2128-4401-BF76-98B7D714152C}"/>
+            </c:ext>
+          </c:extLst>
         </c:ser>
         <c:ser>
           <c:idx val="1"/>
@@ -328,18 +345,26 @@
           <c:invertIfNegative val="0"/>
           <c:dLbls>
             <c:numFmt formatCode="0&quot;%&quot;" sourceLinked="0"/>
+            <c:spPr>
+              <a:noFill/>
+              <a:ln>
+                <a:noFill/>
+              </a:ln>
+              <a:effectLst/>
+            </c:spPr>
             <c:txPr>
               <a:bodyPr/>
               <a:lstStyle/>
               <a:p>
                 <a:pPr>
-                  <a:defRPr b="0" i="0" strike="noStrike" sz="1100" u="none">
+                  <a:defRPr sz="1100" b="0" i="0" u="none" strike="noStrike">
                     <a:solidFill>
                       <a:srgbClr val="3D4757"/>
                     </a:solidFill>
                     <a:latin typeface="+mn-lt"/>
                   </a:defRPr>
                 </a:pPr>
+                <a:endParaRPr lang="en-US"/>
               </a:p>
             </c:txPr>
             <c:showLegendKey val="0"/>
@@ -349,28 +374,31 @@
             <c:showPercent val="0"/>
             <c:showBubbleSize val="0"/>
             <c:showLeaderLines val="0"/>
+            <c:extLst>
+              <c:ext xmlns:c15="http://schemas.microsoft.com/office/drawing/2012/chart" uri="{CE6537A1-D6FC-4f65-9D91-7224C49458BB}">
+                <c15:showLeaderLines val="0"/>
+              </c:ext>
+            </c:extLst>
           </c:dLbls>
           <c:cat>
-            <c:multiLvlStrRef>
+            <c:strRef>
               <c:f>Sheet1!$A$2:$A$5</c:f>
-              <c:multiLvlStrCache>
+              <c:strCache>
                 <c:ptCount val="4"/>
-                <c:lvl>
-                  <c:pt idx="0">
-                    <c:v>Mapping accuracy (20%)</c:v>
-                  </c:pt>
-                  <c:pt idx="1">
-                    <c:v>Anomaly recall (15%)</c:v>
-                  </c:pt>
-                  <c:pt idx="2">
-                    <c:v>Transformation correctness (15%)</c:v>
-                  </c:pt>
-                  <c:pt idx="3">
-                    <c:v>Explainability (15%)</c:v>
-                  </c:pt>
-                </c:lvl>
-              </c:multiLvlStrCache>
-            </c:multiLvlStrRef>
+                <c:pt idx="0">
+                  <c:v>Mapping accuracy (20%)</c:v>
+                </c:pt>
+                <c:pt idx="1">
+                  <c:v>Anomaly recall (15%)</c:v>
+                </c:pt>
+                <c:pt idx="2">
+                  <c:v>Transformation correctness (15%)</c:v>
+                </c:pt>
+                <c:pt idx="3">
+                  <c:v>Explainability (15%)</c:v>
+                </c:pt>
+              </c:strCache>
+            </c:strRef>
           </c:cat>
           <c:val>
             <c:numRef>
@@ -393,36 +421,23 @@
               </c:numCache>
             </c:numRef>
           </c:val>
+          <c:extLst>
+            <c:ext xmlns:c16="http://schemas.microsoft.com/office/drawing/2014/chart" uri="{C3380CC4-5D6E-409C-BE32-E72D297353CC}">
+              <c16:uniqueId val="{00000001-2128-4401-BF76-98B7D714152C}"/>
+            </c:ext>
+          </c:extLst>
         </c:ser>
         <c:dLbls>
-          <c:numFmt formatCode="0&quot;%&quot;" sourceLinked="0"/>
-          <c:txPr>
-            <a:bodyPr/>
-            <a:lstStyle/>
-            <a:p>
-              <a:pPr>
-                <a:defRPr b="0" i="0" strike="noStrike" sz="1100" u="none">
-                  <a:solidFill>
-                    <a:srgbClr val="3D4757"/>
-                  </a:solidFill>
-                  <a:latin typeface="+mn-lt"/>
-                </a:defRPr>
-              </a:pPr>
-            </a:p>
-          </c:txPr>
           <c:showLegendKey val="0"/>
           <c:showVal val="1"/>
           <c:showCatName val="0"/>
           <c:showSerName val="0"/>
           <c:showPercent val="0"/>
           <c:showBubbleSize val="0"/>
-          <c:showLeaderLines val="0"/>
         </c:dLbls>
         <c:gapWidth val="60"/>
-        <c:overlap val="0"/>
         <c:axId val="2094734554"/>
         <c:axId val="2094734552"/>
-        <c:axId val="2094734556"/>
       </c:barChart>
       <c:catAx>
         <c:axId val="2094734554"/>
@@ -463,6 +478,7 @@
         <c:crosses val="autoZero"/>
         <c:auto val="1"/>
         <c:lblAlgn val="ctr"/>
+        <c:lblOffset val="100"/>
         <c:noMultiLvlLbl val="1"/>
       </c:catAx>
       <c:valAx>
@@ -473,35 +489,11 @@
           <c:min val="0"/>
         </c:scaling>
         <c:delete val="1"/>
-        <c:axPos val="b"/>
+        <c:axPos val="t"/>
         <c:numFmt formatCode="General" sourceLinked="0"/>
         <c:majorTickMark val="out"/>
         <c:minorTickMark val="none"/>
         <c:tickLblPos val="low"/>
-        <c:spPr>
-          <a:ln w="12700" cap="flat">
-            <a:solidFill>
-              <a:srgbClr val="888888"/>
-            </a:solidFill>
-            <a:prstDash val="solid"/>
-            <a:round/>
-          </a:ln>
-        </c:spPr>
-        <c:txPr>
-          <a:bodyPr/>
-          <a:lstStyle/>
-          <a:p>
-            <a:pPr>
-              <a:defRPr sz="1200" b="0" i="0" u="none" strike="noStrike">
-                <a:solidFill>
-                  <a:srgbClr val="000000"/>
-                </a:solidFill>
-                <a:latin typeface="Arial"/>
-              </a:defRPr>
-            </a:pPr>
-            <a:endParaRPr lang="en-US"/>
-          </a:p>
-        </c:txPr>
         <c:crossAx val="2094734554"/>
         <c:crosses val="autoZero"/>
         <c:crossBetween val="between"/>
@@ -536,6 +528,7 @@
     </c:legend>
     <c:plotVisOnly val="1"/>
     <c:dispBlanksAs val="span"/>
+    <c:showDLblsOverMax val="1"/>
   </c:chart>
   <c:spPr>
     <a:noFill/>
@@ -572,234 +565,10 @@
           <a:chExt cx="0" cy="0"/>
         </a:xfrm>
       </p:grpSpPr>
-      <p:sp>
-        <p:nvSpPr>
-          <p:cNvPr id="2" name="Header Placeholder 1"/>
-          <p:cNvSpPr>
-            <a:spLocks noGrp="1"/>
-          </p:cNvSpPr>
-          <p:nvPr>
-            <p:ph type="hdr" sz="quarter"/>
-          </p:nvPr>
-        </p:nvSpPr>
-        <p:spPr>
-          <a:xfrm>
-            <a:off x="0" y="0"/>
-            <a:ext cx="2971800" cy="458788"/>
-          </a:xfrm>
-          <a:prstGeom prst="rect">
-            <a:avLst/>
-          </a:prstGeom>
-        </p:spPr>
-        <p:txBody>
-          <a:bodyPr vert="horz" lIns="91440" tIns="45720" rIns="91440" bIns="45720" rtlCol="0"/>
-          <a:lstStyle>
-            <a:lvl1pPr algn="l">
-              <a:defRPr sz="1200"/>
-            </a:lvl1pPr>
-          </a:lstStyle>
-          <a:p>
-            <a:endParaRPr lang="en-US"/>
-          </a:p>
-        </p:txBody>
-      </p:sp>
-      <p:sp>
-        <p:nvSpPr>
-          <p:cNvPr id="3" name="Date Placeholder 2"/>
-          <p:cNvSpPr>
-            <a:spLocks noGrp="1"/>
-          </p:cNvSpPr>
-          <p:nvPr>
-            <p:ph type="dt" idx="1"/>
-          </p:nvPr>
-        </p:nvSpPr>
-        <p:spPr>
-          <a:xfrm>
-            <a:off x="3884613" y="0"/>
-            <a:ext cx="2971800" cy="458788"/>
-          </a:xfrm>
-          <a:prstGeom prst="rect">
-            <a:avLst/>
-          </a:prstGeom>
-        </p:spPr>
-        <p:txBody>
-          <a:bodyPr vert="horz" lIns="91440" tIns="45720" rIns="91440" bIns="45720" rtlCol="0"/>
-          <a:lstStyle>
-            <a:lvl1pPr algn="r">
-              <a:defRPr sz="1200"/>
-            </a:lvl1pPr>
-          </a:lstStyle>
-          <a:p>
-            <a:fld id="{5282F153-3F37-0F45-9E97-73ACFA13230C}" type="datetimeFigureOut">
-              <a:rPr lang="en-US"/>
-              <a:t>7/23/19</a:t>
-            </a:fld>
-            <a:endParaRPr lang="en-US"/>
-          </a:p>
-        </p:txBody>
-      </p:sp>
-      <p:sp>
-        <p:nvSpPr>
-          <p:cNvPr id="4" name="Slide Image Placeholder 3"/>
-          <p:cNvSpPr>
-            <a:spLocks noGrp="1" noRot="1" noChangeAspect="1"/>
-          </p:cNvSpPr>
-          <p:nvPr>
-            <p:ph type="sldImg" idx="2"/>
-          </p:nvPr>
-        </p:nvSpPr>
-        <p:spPr>
-          <a:xfrm>
-            <a:off x="685800" y="1143000"/>
-            <a:ext cx="5486400" cy="3086100"/>
-          </a:xfrm>
-          <a:prstGeom prst="rect">
-            <a:avLst/>
-          </a:prstGeom>
-          <a:noFill/>
-          <a:ln w="12700">
-            <a:solidFill>
-              <a:prstClr val="black"/>
-            </a:solidFill>
-          </a:ln>
-        </p:spPr>
-        <p:txBody>
-          <a:bodyPr vert="horz" lIns="91440" tIns="45720" rIns="91440" bIns="45720" rtlCol="0" anchor="ctr"/>
-          <a:lstStyle/>
-          <a:p>
-            <a:endParaRPr lang="en-US"/>
-          </a:p>
-        </p:txBody>
-      </p:sp>
-      <p:sp>
-        <p:nvSpPr>
-          <p:cNvPr id="5" name="Notes Placeholder 4"/>
-          <p:cNvSpPr>
-            <a:spLocks noGrp="1"/>
-          </p:cNvSpPr>
-          <p:nvPr>
-            <p:ph type="body" sz="quarter" idx="3"/>
-          </p:nvPr>
-        </p:nvSpPr>
-        <p:spPr>
-          <a:xfrm>
-            <a:off x="685800" y="4400550"/>
-            <a:ext cx="5486400" cy="3600450"/>
-          </a:xfrm>
-          <a:prstGeom prst="rect">
-            <a:avLst/>
-          </a:prstGeom>
-        </p:spPr>
-        <p:txBody>
-          <a:bodyPr vert="horz" lIns="91440" tIns="45720" rIns="91440" bIns="45720" rtlCol="0"/>
-          <a:lstStyle/>
-          <a:p>
-            <a:pPr lvl="0"/>
-            <a:r>
-              <a:rPr lang="en-US"/>
-              <a:t>Click to edit Master text styles</a:t>
-            </a:r>
-          </a:p>
-          <a:p>
-            <a:pPr lvl="1"/>
-            <a:r>
-              <a:rPr lang="en-US"/>
-              <a:t>Second level</a:t>
-            </a:r>
-          </a:p>
-          <a:p>
-            <a:pPr lvl="2"/>
-            <a:r>
-              <a:rPr lang="en-US"/>
-              <a:t>Third level</a:t>
-            </a:r>
-          </a:p>
-          <a:p>
-            <a:pPr lvl="3"/>
-            <a:r>
-              <a:rPr lang="en-US"/>
-              <a:t>Fourth level</a:t>
-            </a:r>
-          </a:p>
-          <a:p>
-            <a:pPr lvl="4"/>
-            <a:r>
-              <a:rPr lang="en-US"/>
-              <a:t>Fifth level</a:t>
-            </a:r>
-          </a:p>
-        </p:txBody>
-      </p:sp>
-      <p:sp>
-        <p:nvSpPr>
-          <p:cNvPr id="6" name="Footer Placeholder 5"/>
-          <p:cNvSpPr>
-            <a:spLocks noGrp="1"/>
-          </p:cNvSpPr>
-          <p:nvPr>
-            <p:ph type="ftr" sz="quarter" idx="4"/>
-          </p:nvPr>
-        </p:nvSpPr>
-        <p:spPr>
-          <a:xfrm>
-            <a:off x="0" y="8685213"/>
-            <a:ext cx="2971800" cy="458787"/>
-          </a:xfrm>
-          <a:prstGeom prst="rect">
-            <a:avLst/>
-          </a:prstGeom>
-        </p:spPr>
-        <p:txBody>
-          <a:bodyPr vert="horz" lIns="91440" tIns="45720" rIns="91440" bIns="45720" rtlCol="0" anchor="b"/>
-          <a:lstStyle>
-            <a:lvl1pPr algn="l">
-              <a:defRPr sz="1200"/>
-            </a:lvl1pPr>
-          </a:lstStyle>
-          <a:p>
-            <a:endParaRPr lang="en-US"/>
-          </a:p>
-        </p:txBody>
-      </p:sp>
-      <p:sp>
-        <p:nvSpPr>
-          <p:cNvPr id="7" name="Slide Number Placeholder 6"/>
-          <p:cNvSpPr>
-            <a:spLocks noGrp="1"/>
-          </p:cNvSpPr>
-          <p:nvPr>
-            <p:ph type="sldNum" sz="quarter" idx="5"/>
-          </p:nvPr>
-        </p:nvSpPr>
-        <p:spPr>
-          <a:xfrm>
-            <a:off x="3884613" y="8685213"/>
-            <a:ext cx="2971800" cy="458787"/>
-          </a:xfrm>
-          <a:prstGeom prst="rect">
-            <a:avLst/>
-          </a:prstGeom>
-        </p:spPr>
-        <p:txBody>
-          <a:bodyPr vert="horz" lIns="91440" tIns="45720" rIns="91440" bIns="45720" rtlCol="0" anchor="b"/>
-          <a:lstStyle>
-            <a:lvl1pPr algn="r">
-              <a:defRPr sz="1200"/>
-            </a:lvl1pPr>
-          </a:lstStyle>
-          <a:p>
-            <a:fld id="{CE5E9CC1-C706-0F49-92D6-E571CC5EEA8F}" type="slidenum">
-              <a:rPr lang="en-US"/>
-              <a:t>‹#›</a:t>
-            </a:fld>
-            <a:endParaRPr lang="en-US"/>
-          </a:p>
-        </p:txBody>
-      </p:sp>
     </p:spTree>
     <p:extLst>
       <p:ext uri="{BB962C8B-B14F-4D97-AF65-F5344CB8AC3E}">
-        <p14:creationId xmlns:p14="http://schemas.microsoft.com/office/powerpoint/2010/main" val="1024086991"/>
+        <p14:creationId xmlns:p14="http://schemas.microsoft.com/office/powerpoint/2010/main" val="3329190531"/>
       </p:ext>
     </p:extLst>
   </p:cSld>
@@ -947,7 +716,6 @@
               <a:rPr lang="en-US" dirty="0"/>
               <a:t>Open with the one-line pitch: messy client SOVs in, a clean 17-field file and an audit log out, four agents in between, and a human approves every change. This is the final round: everything shown is running code, verified on the four provided broker SOVs.</a:t>
             </a:r>
-            <a:endParaRPr lang="en-US" dirty="0"/>
           </a:p>
         </p:txBody>
       </p:sp>
@@ -1035,7 +803,6 @@
               <a:rPr lang="en-US" dirty="0"/>
               <a:t>Both cards are from the live app on SOV_Q8B3. Left: the sprinkler standardisation, Yes becomes Y, 95% confidence, with Approve, Reject and Change Target. Right: the TOTAL mapping after the reviewer rejected it with a note; the agent looked for another target, found none that fits the values, and escalated it instead of guessing.</a:t>
             </a:r>
-            <a:endParaRPr lang="en-US" dirty="0"/>
           </a:p>
         </p:txBody>
       </p:sp>
@@ -1123,7 +890,6 @@
               <a:rPr lang="en-US" dirty="0"/>
               <a:t>Brief section 9, page 13. Each guarantee is structural, not a convention: for C-01, transformation code is simply not reachable until review is complete; for C-03, the output is rebuilt from the 17-field template every time.</a:t>
             </a:r>
-            <a:endParaRPr lang="en-US" dirty="0"/>
           </a:p>
         </p:txBody>
       </p:sp>
@@ -1211,7 +977,6 @@
               <a:rPr lang="en-US" dirty="0"/>
               <a:t>Left: the four measurable criteria from page 14, measured with benchmark.py on the labelled samples. Right: the three judged criteria and what we offer for each. On the four real files we hand-labelled 55 columns; all are mapped correctly.</a:t>
             </a:r>
-            <a:endParaRPr lang="en-US" dirty="0"/>
           </a:p>
         </p:txBody>
       </p:sp>
@@ -1299,7 +1064,6 @@
               <a:rPr lang="en-US" dirty="0"/>
               <a:t>Times are measured from a cold start with the LLM off, including loading the embedding model; once warm a run takes about 5 to 10 seconds. The two validation flags are deliberate: the system reports what the source actually contains rather than inventing a number.</a:t>
             </a:r>
-            <a:endParaRPr lang="en-US" dirty="0"/>
           </a:p>
         </p:txBody>
       </p:sp>
@@ -1387,7 +1151,6 @@
               <a:rPr lang="en-US" dirty="0"/>
               <a:t>The six benefits are the ones the brief lists on page 16; each line on the right is backed by something in the running system. The 7 of 30 figure is from SOV_Q8B3: 23 recommendations are high-confidence and can be approved in one click.</a:t>
             </a:r>
-            <a:endParaRPr lang="en-US" dirty="0"/>
           </a:p>
         </p:txBody>
       </p:sp>
@@ -1475,7 +1238,6 @@
               <a:rPr lang="en-US" dirty="0"/>
               <a:t>Part A on SOV_K4T9 covers stages 1 and 2 in about two minutes, including the semantic match. Part B on SOV_Q8B3 covers stages 1 and 3 to 7. Every value on this slide was recorded in a rehearsal; DEMO.md has the click path and script.</a:t>
             </a:r>
-            <a:endParaRPr lang="en-US" dirty="0"/>
           </a:p>
         </p:txBody>
       </p:sp>
@@ -1563,7 +1325,6 @@
               <a:rPr lang="en-US" dirty="0"/>
               <a:t>The brief asks evaluators to note data handling. The short version: it can run entirely offline, it can run with no LLM at all, and when an LLM is used it never sees real figures or identifiers.</a:t>
             </a:r>
-            <a:endParaRPr lang="en-US" dirty="0"/>
           </a:p>
         </p:txBody>
       </p:sp>
@@ -1651,7 +1412,6 @@
               <a:rPr lang="en-US" dirty="0"/>
               <a:t>We would rather name the limits than have evaluators find them. None of them affects the seven constraints; they are the roadmap from hackathon to production.</a:t>
             </a:r>
-            <a:endParaRPr lang="en-US" dirty="0"/>
           </a:p>
         </p:txBody>
       </p:sp>
@@ -1739,7 +1499,6 @@
               <a:rPr lang="en-US" dirty="0"/>
               <a:t>Close on the principle and the evidence. Point evaluators to DEMO.md to rerun everything they just saw, then take questions.</a:t>
             </a:r>
-            <a:endParaRPr lang="en-US" dirty="0"/>
           </a:p>
         </p:txBody>
       </p:sp>
@@ -1827,7 +1586,6 @@
               <a:rPr lang="en-US" dirty="0"/>
               <a:t>Figures are from the problem statement: 53% baseline mapping accuracy, hours per SOV, 17 target fields, no standard procedure. The right-hand list is what we found in the four real files: these are the traps the system has to handle without inventing data.</a:t>
             </a:r>
-            <a:endParaRPr lang="en-US" dirty="0"/>
           </a:p>
         </p:txBody>
       </p:sp>
@@ -1915,7 +1673,6 @@
               <a:rPr lang="en-US" dirty="0"/>
               <a:t>This principle drives every design decision that follows. The three numbers on the right are measured, not projected: zero silent changes by construction, 55 of 55 hand-labelled columns on the provided files, 15 to 22 seconds per file.</a:t>
             </a:r>
-            <a:endParaRPr lang="en-US" dirty="0"/>
           </a:p>
         </p:txBody>
       </p:sp>
@@ -2003,7 +1760,6 @@
               <a:rPr lang="en-US" dirty="0"/>
               <a:t>Walk the top row left to right, down into human review, then right to left to the outputs. Gold dashed line: a rejection with feedback sends the item back to Agent 3, which re-reasons or escalates. Teal dashed line: approved mappings are remembered for the next file.</a:t>
             </a:r>
-            <a:endParaRPr lang="en-US" dirty="0"/>
           </a:p>
         </p:txBody>
       </p:sp>
@@ -2091,7 +1847,6 @@
               <a:rPr lang="en-US" dirty="0"/>
               <a:t>Each layer can be swapped without touching the others: the UI could become an API, ChromaDB could become pgvector, the LLM provider is one environment variable and can be switched off entirely. The four agents in the gold row are separate LangGraph nodes sharing one typed state.</a:t>
             </a:r>
-            <a:endParaRPr lang="en-US" dirty="0"/>
           </a:p>
         </p:txBody>
       </p:sp>
@@ -2179,7 +1934,6 @@
               <a:rPr lang="en-US" dirty="0"/>
               <a:t>The fill-down rule matters: copying a footnote merged across the sheet once turned the text 'updates in 2018 to 2019' into a ZIP of 20182 and a Year Built of 2018. Now only vertical merges, like one Loc # spanning several building rows, are filled.</a:t>
             </a:r>
-            <a:endParaRPr lang="en-US" dirty="0"/>
           </a:p>
         </p:txBody>
       </p:sp>
@@ -2267,7 +2021,6 @@
               <a:rPr lang="en-US" dirty="0"/>
               <a:t>Each column stops at the first stage that resolves it confidently, so the LLM only sees the genuinely ambiguous ones. Two design choices made the difference on real data: the value-profile veto, and assigning targets in confidence order instead of left to right, which had let 'Account Name' steal Reference from 'Location ID'.</a:t>
             </a:r>
-            <a:endParaRPr lang="en-US" dirty="0"/>
           </a:p>
         </p:txBody>
       </p:sp>
@@ -2355,7 +2108,6 @@
               <a:rPr lang="en-US" dirty="0"/>
               <a:t>Detection is deterministic; the LLM adds explanation. Stage 5 of the demo shows the right-hand flow live: rejecting TOTAL → Number of Buildings with a note makes the agent look for another target; none fits, so it escalates instead of guessing.</a:t>
             </a:r>
-            <a:endParaRPr lang="en-US" dirty="0"/>
           </a:p>
         </p:txBody>
       </p:sp>
@@ -2443,7 +2195,6 @@
               <a:rPr lang="en-US" dirty="0"/>
               <a:t>Left: the actual LangGraph. It runs Agents 1 to 3, pauses before human_review with the state checkpointed in SQLite, and the UI resumes it into transform_export. Rejection notes route through re_reason. Right: Agent 4 never evaluates anything dynamic; an operation outside the whitelist is refused and logged.</a:t>
             </a:r>
-            <a:endParaRPr lang="en-US" dirty="0"/>
           </a:p>
         </p:txBody>
       </p:sp>
@@ -2521,6 +2272,7 @@
         <a:solidFill>
           <a:srgbClr val="EFEDE6"/>
         </a:solidFill>
+        <a:effectLst/>
       </p:bgPr>
     </p:bg>
     <p:spTree>
@@ -2540,9 +2292,11 @@
       <p:sp>
         <p:nvSpPr>
           <p:cNvPr id="2" name="Text 0"/>
-          <p:cNvSpPr/>
+          <p:cNvSpPr>
+            <a:spLocks noGrp="1"/>
+          </p:cNvSpPr>
           <p:nvPr>
-            <p:ph idx="100" type="body" hasCustomPrompt="1"/>
+            <p:ph type="body" idx="100" hasCustomPrompt="1"/>
           </p:nvPr>
         </p:nvSpPr>
         <p:spPr>
@@ -2559,9 +2313,9 @@
         <p:txBody>
           <a:bodyPr wrap="square" rtlCol="0"/>
           <a:lstStyle>
-            <a:lvl1pPr indent="0" marL="0">
+            <a:lvl1pPr marL="0" indent="0">
               <a:buNone/>
-              <a:defRPr lang="en-US" sz="1200" b="1" spc="200" kern="0" dirty="0">
+              <a:defRPr lang="en-US" sz="1200" b="1" kern="0" spc="200" dirty="0">
                 <a:solidFill>
                   <a:srgbClr val="8A5A0B"/>
                 </a:solidFill>
@@ -2569,7 +2323,7 @@
             </a:lvl1pPr>
           </a:lstStyle>
           <a:p>
-            <a:pPr indent="0" marL="0">
+            <a:pPr marL="0" indent="0">
               <a:buNone/>
             </a:pPr>
             <a:endParaRPr lang="en-US" sz="1200" dirty="0"/>
@@ -2579,9 +2333,11 @@
       <p:sp>
         <p:nvSpPr>
           <p:cNvPr id="3" name="Text 0"/>
-          <p:cNvSpPr/>
+          <p:cNvSpPr>
+            <a:spLocks noGrp="1"/>
+          </p:cNvSpPr>
           <p:nvPr>
-            <p:ph idx="101" type="title" hasCustomPrompt="1"/>
+            <p:ph type="title" idx="101" hasCustomPrompt="1"/>
           </p:nvPr>
         </p:nvSpPr>
         <p:spPr>
@@ -2598,7 +2354,7 @@
         <p:txBody>
           <a:bodyPr wrap="square" rtlCol="0"/>
           <a:lstStyle>
-            <a:lvl1pPr algn="l" indent="0" marL="0">
+            <a:lvl1pPr marL="0" indent="0" algn="l">
               <a:buNone/>
               <a:defRPr lang="en-US" sz="3000" b="1" dirty="0">
                 <a:solidFill>
@@ -2608,7 +2364,7 @@
             </a:lvl1pPr>
           </a:lstStyle>
           <a:p>
-            <a:pPr algn="l" indent="0" marL="0">
+            <a:pPr marL="0" indent="0" algn="l">
               <a:buNone/>
             </a:pPr>
             <a:endParaRPr lang="en-US" sz="3000" dirty="0"/>
@@ -2636,7 +2392,7 @@
           <a:bodyPr wrap="square" lIns="0" tIns="0" rIns="0" bIns="0" rtlCol="0" anchor="ctr"/>
           <a:lstStyle/>
           <a:p>
-            <a:pPr indent="0" marL="0">
+            <a:pPr marL="0" indent="0">
               <a:buNone/>
             </a:pPr>
             <a:r>
@@ -2671,7 +2427,7 @@
           </a:prstGeom>
           <a:extLst>
             <a:ext uri="{C572A759-6A51-4108-AA02-DFA0A04FC94B}">
-              <ma14:wrappingTextBoxFlag xmlns:ma14="http://schemas.microsoft.com/office/mac/drawingml/2011/main" val="0"/>
+              <ma14:wrappingTextBoxFlag xmlns:ma14="http://schemas.microsoft.com/office/mac/drawingml/2011/main" xmlns="" val="0"/>
             </a:ext>
           </a:extLst>
         </p:spPr>
@@ -2689,8 +2445,8 @@
           <a:p>
             <a:pPr algn="r"/>
             <a:fld id="{F7021451-1387-4CA6-816F-3879F97B5CBC}" type="slidenum">
-              <a:rPr b="0" lang="en-US"/>
-              <a:t>1002</a:t>
+              <a:rPr lang="en-US" b="0"/>
+              <a:t>‹#›</a:t>
             </a:fld>
             <a:endParaRPr lang="en-US"/>
           </a:p>
@@ -2712,6 +2468,7 @@
         <a:solidFill>
           <a:srgbClr val="14213D"/>
         </a:solidFill>
+        <a:effectLst/>
       </p:bgPr>
     </p:bg>
     <p:spTree>
@@ -2731,9 +2488,11 @@
       <p:sp>
         <p:nvSpPr>
           <p:cNvPr id="2" name="Text 0"/>
-          <p:cNvSpPr/>
+          <p:cNvSpPr>
+            <a:spLocks noGrp="1"/>
+          </p:cNvSpPr>
           <p:nvPr>
-            <p:ph idx="100" type="body" hasCustomPrompt="1"/>
+            <p:ph type="body" idx="100" hasCustomPrompt="1"/>
           </p:nvPr>
         </p:nvSpPr>
         <p:spPr>
@@ -2750,9 +2509,9 @@
         <p:txBody>
           <a:bodyPr wrap="square" rtlCol="0"/>
           <a:lstStyle>
-            <a:lvl1pPr indent="0" marL="0">
+            <a:lvl1pPr marL="0" indent="0">
               <a:buNone/>
-              <a:defRPr lang="en-US" sz="1200" b="1" spc="200" kern="0" dirty="0">
+              <a:defRPr lang="en-US" sz="1200" b="1" kern="0" spc="200" dirty="0">
                 <a:solidFill>
                   <a:srgbClr val="D9A441"/>
                 </a:solidFill>
@@ -2760,7 +2519,7 @@
             </a:lvl1pPr>
           </a:lstStyle>
           <a:p>
-            <a:pPr indent="0" marL="0">
+            <a:pPr marL="0" indent="0">
               <a:buNone/>
             </a:pPr>
             <a:endParaRPr lang="en-US" sz="1200" dirty="0"/>
@@ -2770,9 +2529,11 @@
       <p:sp>
         <p:nvSpPr>
           <p:cNvPr id="3" name="Text 0"/>
-          <p:cNvSpPr/>
+          <p:cNvSpPr>
+            <a:spLocks noGrp="1"/>
+          </p:cNvSpPr>
           <p:nvPr>
-            <p:ph idx="101" type="title" hasCustomPrompt="1"/>
+            <p:ph type="title" idx="101" hasCustomPrompt="1"/>
           </p:nvPr>
         </p:nvSpPr>
         <p:spPr>
@@ -2789,7 +2550,7 @@
         <p:txBody>
           <a:bodyPr wrap="square" rtlCol="0"/>
           <a:lstStyle>
-            <a:lvl1pPr algn="l" indent="0" marL="0">
+            <a:lvl1pPr marL="0" indent="0" algn="l">
               <a:buNone/>
               <a:defRPr lang="en-US" sz="4400" b="1" dirty="0">
                 <a:solidFill>
@@ -2799,7 +2560,7 @@
             </a:lvl1pPr>
           </a:lstStyle>
           <a:p>
-            <a:pPr algn="l" indent="0" marL="0">
+            <a:pPr marL="0" indent="0" algn="l">
               <a:buNone/>
             </a:pPr>
             <a:endParaRPr lang="en-US" sz="4400" dirty="0"/>
@@ -2817,6 +2578,11 @@
 <file path=ppt/slideMasters/slideMaster1.xml><?xml version="1.0" encoding="utf-8"?>
 <p:sldMaster xmlns:a="http://schemas.openxmlformats.org/drawingml/2006/main" xmlns:r="http://schemas.openxmlformats.org/officeDocument/2006/relationships" xmlns:p="http://schemas.openxmlformats.org/presentationml/2006/main">
   <p:cSld>
+    <p:bg>
+      <p:bgRef idx="1001">
+        <a:schemeClr val="bg1"/>
+      </p:bgRef>
+    </p:bg>
     <p:spTree>
       <p:nvGrpSpPr>
         <p:cNvPr id="1" name=""/>
@@ -2851,7 +2617,7 @@
           </a:prstGeom>
           <a:extLst>
             <a:ext uri="{C572A759-6A51-4108-AA02-DFA0A04FC94B}">
-              <ma14:wrappingTextBoxFlag xmlns:ma14="http://schemas.microsoft.com/office/mac/drawingml/2011/main" val="0"/>
+              <ma14:wrappingTextBoxFlag xmlns:ma14="http://schemas.microsoft.com/office/mac/drawingml/2011/main" xmlns="" val="0"/>
             </a:ext>
           </a:extLst>
         </p:spPr>
@@ -2869,8 +2635,8 @@
           <a:p>
             <a:pPr algn="r"/>
             <a:fld id="{F7021451-1387-4CA6-816F-3879F97B5CBC}" type="slidenum">
-              <a:rPr b="0" lang="en-US"/>
-              <a:t>null</a:t>
+              <a:rPr lang="en-US" b="0"/>
+              <a:t>‹#›</a:t>
             </a:fld>
             <a:endParaRPr lang="en-US"/>
           </a:p>
@@ -3158,9 +2924,11 @@
       <p:sp>
         <p:nvSpPr>
           <p:cNvPr id="2" name="Text 0"/>
-          <p:cNvSpPr/>
+          <p:cNvSpPr>
+            <a:spLocks noGrp="1"/>
+          </p:cNvSpPr>
           <p:nvPr>
-            <p:ph idx="100" type="body" hasCustomPrompt="1"/>
+            <p:ph type="body" idx="100" hasCustomPrompt="1"/>
           </p:nvPr>
         </p:nvSpPr>
         <p:spPr>
@@ -3178,11 +2946,11 @@
           <a:bodyPr wrap="square" lIns="0" tIns="0" rIns="0" bIns="0" rtlCol="0" anchor="ctr"/>
           <a:lstStyle/>
           <a:p>
-            <a:pPr indent="0" marL="0">
+            <a:pPr marL="0" indent="0">
               <a:buNone/>
             </a:pPr>
             <a:r>
-              <a:rPr lang="en-US" sz="1200" b="1" spc="200" kern="0" dirty="0">
+              <a:rPr lang="en-US" sz="1200" b="1" kern="0" spc="200" dirty="0">
                 <a:solidFill>
                   <a:srgbClr val="D9A441"/>
                 </a:solidFill>
@@ -3196,9 +2964,11 @@
       <p:sp>
         <p:nvSpPr>
           <p:cNvPr id="3" name="Text 0"/>
-          <p:cNvSpPr/>
+          <p:cNvSpPr>
+            <a:spLocks noGrp="1"/>
+          </p:cNvSpPr>
           <p:nvPr>
-            <p:ph idx="101" type="title" hasCustomPrompt="1"/>
+            <p:ph type="title" idx="101" hasCustomPrompt="1"/>
           </p:nvPr>
         </p:nvSpPr>
         <p:spPr>
@@ -3216,7 +2986,7 @@
           <a:bodyPr wrap="square" lIns="0" tIns="0" rIns="0" bIns="0" rtlCol="0" anchor="t"/>
           <a:lstStyle/>
           <a:p>
-            <a:pPr algn="l" indent="0" marL="0">
+            <a:pPr marL="0" indent="0" algn="l">
               <a:buNone/>
             </a:pPr>
             <a:r>
@@ -3252,18 +3022,19 @@
           <a:bodyPr wrap="square" lIns="0" tIns="0" rIns="0" bIns="0" rtlCol="0" anchor="t"/>
           <a:lstStyle/>
           <a:p>
-            <a:pPr indent="0" marL="0">
-              <a:buNone/>
-            </a:pPr>
-            <a:r>
-              <a:rPr lang="en-US" sz="1800" dirty="0">
-                <a:solidFill>
-                  <a:srgbClr val="C9D3E0"/>
-                </a:solidFill>
-              </a:rPr>
-              <a:t>Four collaborating agents turn chaotic Statements of Values into a schema-perfect Cleaned_SOV.xlsx with a full audit log, and a human approves every change.</a:t>
-            </a:r>
-            <a:endParaRPr lang="en-US" sz="1800" dirty="0"/>
+            <a:r>
+              <a:rPr lang="en-IN" dirty="0">
+                <a:solidFill>
+                  <a:schemeClr val="bg1"/>
+                </a:solidFill>
+              </a:rPr>
+              <a:t>Four collaborating agents turn chaotic Statements of Values into schema-perfect cleaned SOV files with full audit logs, while a human approves every change.</a:t>
+            </a:r>
+            <a:endParaRPr lang="en-US" sz="1800" dirty="0">
+              <a:solidFill>
+                <a:schemeClr val="bg1"/>
+              </a:solidFill>
+            </a:endParaRPr>
           </a:p>
         </p:txBody>
       </p:sp>
@@ -3288,11 +3059,11 @@
           <a:bodyPr wrap="square" lIns="0" tIns="0" rIns="0" bIns="0" rtlCol="0" anchor="t"/>
           <a:lstStyle/>
           <a:p>
-            <a:pPr indent="0" marL="0">
+            <a:pPr marL="0" indent="0">
               <a:buNone/>
             </a:pPr>
             <a:r>
-              <a:rPr lang="en-US" sz="1100" b="1" spc="100" kern="0" dirty="0">
+              <a:rPr lang="en-US" sz="1100" b="1" kern="0" spc="100" dirty="0">
                 <a:solidFill>
                   <a:srgbClr val="D9A441"/>
                 </a:solidFill>
@@ -3324,7 +3095,7 @@
           <a:bodyPr wrap="square" lIns="0" tIns="0" rIns="0" bIns="0" rtlCol="0" anchor="t"/>
           <a:lstStyle/>
           <a:p>
-            <a:pPr indent="0" marL="0">
+            <a:pPr marL="0" indent="0">
               <a:buNone/>
             </a:pPr>
             <a:r>
@@ -3360,7 +3131,7 @@
           <a:bodyPr wrap="square" lIns="0" tIns="0" rIns="0" bIns="0" rtlCol="0" anchor="t"/>
           <a:lstStyle/>
           <a:p>
-            <a:pPr indent="0" marL="0">
+            <a:pPr marL="0" indent="0">
               <a:buNone/>
             </a:pPr>
             <a:r>
@@ -3396,11 +3167,11 @@
           <a:bodyPr wrap="square" lIns="0" tIns="0" rIns="0" bIns="0" rtlCol="0" anchor="t"/>
           <a:lstStyle/>
           <a:p>
-            <a:pPr indent="0" marL="0">
+            <a:pPr marL="0" indent="0">
               <a:buNone/>
             </a:pPr>
             <a:r>
-              <a:rPr lang="en-US" sz="1100" b="1" spc="100" kern="0" dirty="0">
+              <a:rPr lang="en-US" sz="1100" b="1" kern="0" spc="100" dirty="0">
                 <a:solidFill>
                   <a:srgbClr val="D9A441"/>
                 </a:solidFill>
@@ -3432,7 +3203,7 @@
           <a:bodyPr wrap="square" lIns="0" tIns="0" rIns="0" bIns="0" rtlCol="0" anchor="t"/>
           <a:lstStyle/>
           <a:p>
-            <a:pPr indent="0" marL="0">
+            <a:pPr marL="0" indent="0">
               <a:buNone/>
             </a:pPr>
             <a:r>
@@ -3468,7 +3239,7 @@
           <a:bodyPr wrap="square" lIns="0" tIns="0" rIns="0" bIns="0" rtlCol="0" anchor="t"/>
           <a:lstStyle/>
           <a:p>
-            <a:pPr indent="0" marL="0">
+            <a:pPr marL="0" indent="0">
               <a:buNone/>
             </a:pPr>
             <a:r>
@@ -3504,11 +3275,11 @@
           <a:bodyPr wrap="square" lIns="0" tIns="0" rIns="0" bIns="0" rtlCol="0" anchor="t"/>
           <a:lstStyle/>
           <a:p>
-            <a:pPr indent="0" marL="0">
+            <a:pPr marL="0" indent="0">
               <a:buNone/>
             </a:pPr>
             <a:r>
-              <a:rPr lang="en-US" sz="1100" b="1" spc="100" kern="0" dirty="0">
+              <a:rPr lang="en-US" sz="1100" b="1" kern="0" spc="100" dirty="0">
                 <a:solidFill>
                   <a:srgbClr val="D9A441"/>
                 </a:solidFill>
@@ -3540,7 +3311,7 @@
           <a:bodyPr wrap="square" lIns="0" tIns="0" rIns="0" bIns="0" rtlCol="0" anchor="t"/>
           <a:lstStyle/>
           <a:p>
-            <a:pPr indent="0" marL="0">
+            <a:pPr marL="0" indent="0">
               <a:buNone/>
             </a:pPr>
             <a:r>
@@ -3576,7 +3347,7 @@
           <a:bodyPr wrap="square" lIns="0" tIns="0" rIns="0" bIns="0" rtlCol="0" anchor="t"/>
           <a:lstStyle/>
           <a:p>
-            <a:pPr indent="0" marL="0">
+            <a:pPr marL="0" indent="0">
               <a:buNone/>
             </a:pPr>
             <a:r>
@@ -4591,9 +4362,11 @@
       <p:sp>
         <p:nvSpPr>
           <p:cNvPr id="2" name="Text 0"/>
-          <p:cNvSpPr/>
+          <p:cNvSpPr>
+            <a:spLocks noGrp="1"/>
+          </p:cNvSpPr>
           <p:nvPr>
-            <p:ph idx="100" type="body" hasCustomPrompt="1"/>
+            <p:ph type="body" idx="100" hasCustomPrompt="1"/>
           </p:nvPr>
         </p:nvSpPr>
         <p:spPr>
@@ -4611,11 +4384,11 @@
           <a:bodyPr wrap="square" lIns="0" tIns="0" rIns="0" bIns="0" rtlCol="0" anchor="ctr"/>
           <a:lstStyle/>
           <a:p>
-            <a:pPr indent="0" marL="0">
+            <a:pPr marL="0" indent="0">
               <a:buNone/>
             </a:pPr>
             <a:r>
-              <a:rPr lang="en-US" sz="1200" b="1" spc="200" kern="0" dirty="0">
+              <a:rPr lang="en-US" sz="1200" b="1" kern="0" spc="200" dirty="0">
                 <a:solidFill>
                   <a:srgbClr val="8A5A0B"/>
                 </a:solidFill>
@@ -4629,9 +4402,11 @@
       <p:sp>
         <p:nvSpPr>
           <p:cNvPr id="3" name="Text 0"/>
-          <p:cNvSpPr/>
+          <p:cNvSpPr>
+            <a:spLocks noGrp="1"/>
+          </p:cNvSpPr>
           <p:nvPr>
-            <p:ph idx="101" type="title" hasCustomPrompt="1"/>
+            <p:ph type="title" idx="101" hasCustomPrompt="1"/>
           </p:nvPr>
         </p:nvSpPr>
         <p:spPr>
@@ -4649,7 +4424,7 @@
           <a:bodyPr wrap="square" lIns="0" tIns="0" rIns="0" bIns="0" rtlCol="0" anchor="t"/>
           <a:lstStyle/>
           <a:p>
-            <a:pPr algn="l" indent="0" marL="0">
+            <a:pPr marL="0" indent="0" algn="l">
               <a:buNone/>
             </a:pPr>
             <a:r>
@@ -4685,7 +4460,7 @@
           <a:bodyPr wrap="square" lIns="0" tIns="0" rIns="0" bIns="0" rtlCol="0" anchor="t"/>
           <a:lstStyle/>
           <a:p>
-            <a:pPr indent="0" marL="0">
+            <a:pPr marL="0" indent="0">
               <a:buNone/>
             </a:pPr>
             <a:r>
@@ -4724,7 +4499,7 @@
             <a:prstDash val="solid"/>
           </a:ln>
           <a:effectLst>
-            <a:outerShdw sx="100000" sy="100000" kx="0" ky="0" algn="bl" rotWithShape="0" blurRad="76200" dist="25400" dir="5400000">
+            <a:outerShdw blurRad="76200" dist="25400" dir="5400000" algn="bl" rotWithShape="0">
               <a:srgbClr val="000000">
                 <a:alpha val="12000"/>
               </a:srgbClr>
@@ -4734,14 +4509,14 @@
       </p:sp>
       <p:pic>
         <p:nvPicPr>
-          <p:cNvPr id="6" name="Image 0" descr="Standardisation on SOV_Q8B3: why, impact, before → after, confidence">    </p:cNvPr>
+          <p:cNvPr id="6" name="Image 0" descr="Standardisation on SOV_Q8B3: why, impact, before → after, confidence"/>
           <p:cNvPicPr>
             <a:picLocks noChangeAspect="1"/>
           </p:cNvPicPr>
           <p:nvPr/>
         </p:nvPicPr>
         <p:blipFill>
-          <a:blip r:embed="rId1"/>
+          <a:blip r:embed="rId3"/>
           <a:stretch>
             <a:fillRect/>
           </a:stretch>
@@ -4777,7 +4552,7 @@
           <a:bodyPr wrap="square" lIns="0" tIns="0" rIns="0" bIns="0" rtlCol="0" anchor="t"/>
           <a:lstStyle/>
           <a:p>
-            <a:pPr indent="0" marL="0">
+            <a:pPr marL="0" indent="0">
               <a:buNone/>
             </a:pPr>
             <a:r>
@@ -4813,7 +4588,7 @@
           <a:bodyPr wrap="square" lIns="0" tIns="0" rIns="0" bIns="0" rtlCol="0" anchor="t"/>
           <a:lstStyle/>
           <a:p>
-            <a:pPr indent="0" marL="0">
+            <a:pPr marL="0" indent="0">
               <a:buNone/>
             </a:pPr>
             <a:r>
@@ -4852,7 +4627,7 @@
             <a:prstDash val="solid"/>
           </a:ln>
           <a:effectLst>
-            <a:outerShdw sx="100000" sy="100000" kx="0" ky="0" algn="bl" rotWithShape="0" blurRad="76200" dist="25400" dir="5400000">
+            <a:outerShdw blurRad="76200" dist="25400" dir="5400000" algn="bl" rotWithShape="0">
               <a:srgbClr val="000000">
                 <a:alpha val="12000"/>
               </a:srgbClr>
@@ -4862,14 +4637,14 @@
       </p:sp>
       <p:pic>
         <p:nvPicPr>
-          <p:cNvPr id="10" name="Image 1" descr="No alternative target fits, so the item is escalated to a human">    </p:cNvPr>
+          <p:cNvPr id="10" name="Image 1" descr="No alternative target fits, so the item is escalated to a human"/>
           <p:cNvPicPr>
             <a:picLocks noChangeAspect="1"/>
           </p:cNvPicPr>
           <p:nvPr/>
         </p:nvPicPr>
         <p:blipFill>
-          <a:blip r:embed="rId2"/>
+          <a:blip r:embed="rId4"/>
           <a:stretch>
             <a:fillRect/>
           </a:stretch>
@@ -4905,7 +4680,7 @@
           <a:bodyPr wrap="square" lIns="0" tIns="0" rIns="0" bIns="0" rtlCol="0" anchor="t"/>
           <a:lstStyle/>
           <a:p>
-            <a:pPr indent="0" marL="0">
+            <a:pPr marL="0" indent="0">
               <a:buNone/>
             </a:pPr>
             <a:r>
@@ -4947,14 +4722,14 @@
       </p:sp>
       <p:pic>
         <p:nvPicPr>
-          <p:cNvPr id="13" name="Image 2" descr="preencoded.png">    </p:cNvPr>
+          <p:cNvPr id="13" name="Image 2" descr="preencoded.png"/>
           <p:cNvPicPr>
             <a:picLocks noChangeAspect="1"/>
           </p:cNvPicPr>
           <p:nvPr/>
         </p:nvPicPr>
         <p:blipFill>
-          <a:blip r:embed="rId3"/>
+          <a:blip r:embed="rId5"/>
           <a:stretch>
             <a:fillRect/>
           </a:stretch>
@@ -4990,7 +4765,7 @@
           <a:bodyPr wrap="square" lIns="0" tIns="0" rIns="0" bIns="0" rtlCol="0" anchor="ctr"/>
           <a:lstStyle/>
           <a:p>
-            <a:pPr indent="0" marL="0">
+            <a:pPr marL="0" indent="0">
               <a:buNone/>
             </a:pPr>
             <a:r>
@@ -5032,14 +4807,14 @@
       </p:sp>
       <p:pic>
         <p:nvPicPr>
-          <p:cNvPr id="16" name="Image 3" descr="preencoded.png">    </p:cNvPr>
+          <p:cNvPr id="16" name="Image 3" descr="preencoded.png"/>
           <p:cNvPicPr>
             <a:picLocks noChangeAspect="1"/>
           </p:cNvPicPr>
           <p:nvPr/>
         </p:nvPicPr>
         <p:blipFill>
-          <a:blip r:embed="rId4"/>
+          <a:blip r:embed="rId6"/>
           <a:stretch>
             <a:fillRect/>
           </a:stretch>
@@ -5075,7 +4850,7 @@
           <a:bodyPr wrap="square" lIns="0" tIns="0" rIns="0" bIns="0" rtlCol="0" anchor="ctr"/>
           <a:lstStyle/>
           <a:p>
-            <a:pPr indent="0" marL="0">
+            <a:pPr marL="0" indent="0">
               <a:buNone/>
             </a:pPr>
             <a:r>
@@ -5117,14 +4892,14 @@
       </p:sp>
       <p:pic>
         <p:nvPicPr>
-          <p:cNvPr id="19" name="Image 4" descr="preencoded.png">    </p:cNvPr>
+          <p:cNvPr id="19" name="Image 4" descr="preencoded.png"/>
           <p:cNvPicPr>
             <a:picLocks noChangeAspect="1"/>
           </p:cNvPicPr>
           <p:nvPr/>
         </p:nvPicPr>
         <p:blipFill>
-          <a:blip r:embed="rId5"/>
+          <a:blip r:embed="rId7"/>
           <a:stretch>
             <a:fillRect/>
           </a:stretch>
@@ -5160,7 +4935,7 @@
           <a:bodyPr wrap="square" lIns="0" tIns="0" rIns="0" bIns="0" rtlCol="0" anchor="ctr"/>
           <a:lstStyle/>
           <a:p>
-            <a:pPr indent="0" marL="0">
+            <a:pPr marL="0" indent="0">
               <a:buNone/>
             </a:pPr>
             <a:r>
@@ -5195,7 +4970,7 @@
           </a:prstGeom>
           <a:extLst>
             <a:ext uri="{C572A759-6A51-4108-AA02-DFA0A04FC94B}">
-              <ma14:wrappingTextBoxFlag xmlns:ma14="http://schemas.microsoft.com/office/mac/drawingml/2011/main" val="0"/>
+              <ma14:wrappingTextBoxFlag xmlns:ma14="http://schemas.microsoft.com/office/mac/drawingml/2011/main" xmlns="" val="0"/>
             </a:ext>
           </a:extLst>
         </p:spPr>
@@ -5213,7 +4988,7 @@
           <a:p>
             <a:pPr algn="r"/>
             <a:fld id="{F7021451-1387-4CA6-816F-3879F97B5CBC}" type="slidenum">
-              <a:rPr b="0" lang="en-US"/>
+              <a:rPr lang="en-US" b="0"/>
               <a:t>10</a:t>
             </a:fld>
             <a:endParaRPr lang="en-US"/>
@@ -5248,9 +5023,11 @@
       <p:sp>
         <p:nvSpPr>
           <p:cNvPr id="2" name="Text 0"/>
-          <p:cNvSpPr/>
+          <p:cNvSpPr>
+            <a:spLocks noGrp="1"/>
+          </p:cNvSpPr>
           <p:nvPr>
-            <p:ph idx="100" type="body" hasCustomPrompt="1"/>
+            <p:ph type="body" idx="100" hasCustomPrompt="1"/>
           </p:nvPr>
         </p:nvSpPr>
         <p:spPr>
@@ -5268,11 +5045,11 @@
           <a:bodyPr wrap="square" lIns="0" tIns="0" rIns="0" bIns="0" rtlCol="0" anchor="ctr"/>
           <a:lstStyle/>
           <a:p>
-            <a:pPr indent="0" marL="0">
+            <a:pPr marL="0" indent="0">
               <a:buNone/>
             </a:pPr>
             <a:r>
-              <a:rPr lang="en-US" sz="1200" b="1" spc="200" kern="0" dirty="0">
+              <a:rPr lang="en-US" sz="1200" b="1" kern="0" spc="200" dirty="0">
                 <a:solidFill>
                   <a:srgbClr val="8A5A0B"/>
                 </a:solidFill>
@@ -5286,9 +5063,11 @@
       <p:sp>
         <p:nvSpPr>
           <p:cNvPr id="3" name="Text 0"/>
-          <p:cNvSpPr/>
+          <p:cNvSpPr>
+            <a:spLocks noGrp="1"/>
+          </p:cNvSpPr>
           <p:nvPr>
-            <p:ph idx="101" type="title" hasCustomPrompt="1"/>
+            <p:ph type="title" idx="101" hasCustomPrompt="1"/>
           </p:nvPr>
         </p:nvSpPr>
         <p:spPr>
@@ -5306,7 +5085,7 @@
           <a:bodyPr wrap="square" lIns="0" tIns="0" rIns="0" bIns="0" rtlCol="0" anchor="t"/>
           <a:lstStyle/>
           <a:p>
-            <a:pPr algn="l" indent="0" marL="0">
+            <a:pPr marL="0" indent="0" algn="l">
               <a:buNone/>
             </a:pPr>
             <a:r>
@@ -5330,24 +5109,48 @@
           <p:nvPr>
             <p:extLst>
               <p:ext uri="{D42A27DB-BD31-4B8C-83A1-F6EECF244321}">
-                <p14:modId xmlns:p14="http://schemas.microsoft.com/office/powerpoint/2010/main" val="1579011935"/>
+                <p14:modId xmlns:p14="http://schemas.microsoft.com/office/powerpoint/2010/main" val="2135942825"/>
               </p:ext>
             </p:extLst>
           </p:nvPr>
         </p:nvGraphicFramePr>
         <p:xfrm>
           <a:off x="548640" y="1645920"/>
-          <a:ext cx="11094415" cy="914400"/>
+          <a:ext cx="11091672" cy="4096512"/>
         </p:xfrm>
         <a:graphic>
           <a:graphicData uri="http://schemas.openxmlformats.org/drawingml/2006/table">
             <a:tbl>
               <a:tblPr/>
               <a:tblGrid>
-                <a:gridCol w="731520"/>
-                <a:gridCol w="2514600"/>
-                <a:gridCol w="6949440"/>
-                <a:gridCol w="896112"/>
+                <a:gridCol w="731520">
+                  <a:extLst>
+                    <a:ext uri="{9D8B030D-6E8A-4147-A177-3AD203B41FA5}">
+                      <a16:colId xmlns:a16="http://schemas.microsoft.com/office/drawing/2014/main" val="20000"/>
+                    </a:ext>
+                  </a:extLst>
+                </a:gridCol>
+                <a:gridCol w="2514600">
+                  <a:extLst>
+                    <a:ext uri="{9D8B030D-6E8A-4147-A177-3AD203B41FA5}">
+                      <a16:colId xmlns:a16="http://schemas.microsoft.com/office/drawing/2014/main" val="20001"/>
+                    </a:ext>
+                  </a:extLst>
+                </a:gridCol>
+                <a:gridCol w="6949440">
+                  <a:extLst>
+                    <a:ext uri="{9D8B030D-6E8A-4147-A177-3AD203B41FA5}">
+                      <a16:colId xmlns:a16="http://schemas.microsoft.com/office/drawing/2014/main" val="20002"/>
+                    </a:ext>
+                  </a:extLst>
+                </a:gridCol>
+                <a:gridCol w="896112">
+                  <a:extLst>
+                    <a:ext uri="{9D8B030D-6E8A-4147-A177-3AD203B41FA5}">
+                      <a16:colId xmlns:a16="http://schemas.microsoft.com/office/drawing/2014/main" val="20003"/>
+                    </a:ext>
+                  </a:extLst>
+                </a:gridCol>
               </a:tblGrid>
               <a:tr h="512064">
                 <a:tc>
@@ -5355,7 +5158,7 @@
                     <a:bodyPr/>
                     <a:lstStyle/>
                     <a:p>
-                      <a:pPr indent="0" marL="0">
+                      <a:pPr marL="0" indent="0">
                         <a:buNone/>
                       </a:pPr>
                       <a:r>
@@ -5416,7 +5219,7 @@
                     <a:bodyPr/>
                     <a:lstStyle/>
                     <a:p>
-                      <a:pPr indent="0" marL="0">
+                      <a:pPr marL="0" indent="0">
                         <a:buNone/>
                       </a:pPr>
                       <a:r>
@@ -5477,7 +5280,7 @@
                     <a:bodyPr/>
                     <a:lstStyle/>
                     <a:p>
-                      <a:pPr indent="0" marL="0">
+                      <a:pPr marL="0" indent="0">
                         <a:buNone/>
                       </a:pPr>
                       <a:r>
@@ -5538,7 +5341,7 @@
                     <a:bodyPr/>
                     <a:lstStyle/>
                     <a:p>
-                      <a:pPr indent="0" marL="0">
+                      <a:pPr marL="0" indent="0">
                         <a:buNone/>
                       </a:pPr>
                       <a:r>
@@ -5594,6 +5397,11 @@
                     </a:solidFill>
                   </a:tcPr>
                 </a:tc>
+                <a:extLst>
+                  <a:ext uri="{0D108BD9-81ED-4DB2-BD59-A6C34878D82A}">
+                    <a16:rowId xmlns:a16="http://schemas.microsoft.com/office/drawing/2014/main" val="10000"/>
+                  </a:ext>
+                </a:extLst>
               </a:tr>
               <a:tr h="512064">
                 <a:tc>
@@ -5601,7 +5409,7 @@
                     <a:bodyPr/>
                     <a:lstStyle/>
                     <a:p>
-                      <a:pPr indent="0" marL="0">
+                      <a:pPr marL="0" indent="0">
                         <a:buNone/>
                       </a:pPr>
                       <a:r>
@@ -5662,7 +5470,7 @@
                     <a:bodyPr/>
                     <a:lstStyle/>
                     <a:p>
-                      <a:pPr indent="0" marL="0">
+                      <a:pPr marL="0" indent="0">
                         <a:buNone/>
                       </a:pPr>
                       <a:r>
@@ -5723,7 +5531,7 @@
                     <a:bodyPr/>
                     <a:lstStyle/>
                     <a:p>
-                      <a:pPr indent="0" marL="0">
+                      <a:pPr marL="0" indent="0">
                         <a:buNone/>
                       </a:pPr>
                       <a:r>
@@ -5784,7 +5592,7 @@
                     <a:bodyPr/>
                     <a:lstStyle/>
                     <a:p>
-                      <a:pPr indent="0" marL="0">
+                      <a:pPr marL="0" indent="0">
                         <a:buNone/>
                       </a:pPr>
                       <a:r>
@@ -5840,6 +5648,11 @@
                     </a:solidFill>
                   </a:tcPr>
                 </a:tc>
+                <a:extLst>
+                  <a:ext uri="{0D108BD9-81ED-4DB2-BD59-A6C34878D82A}">
+                    <a16:rowId xmlns:a16="http://schemas.microsoft.com/office/drawing/2014/main" val="10001"/>
+                  </a:ext>
+                </a:extLst>
               </a:tr>
               <a:tr h="512064">
                 <a:tc>
@@ -5847,7 +5660,7 @@
                     <a:bodyPr/>
                     <a:lstStyle/>
                     <a:p>
-                      <a:pPr indent="0" marL="0">
+                      <a:pPr marL="0" indent="0">
                         <a:buNone/>
                       </a:pPr>
                       <a:r>
@@ -5908,7 +5721,7 @@
                     <a:bodyPr/>
                     <a:lstStyle/>
                     <a:p>
-                      <a:pPr indent="0" marL="0">
+                      <a:pPr marL="0" indent="0">
                         <a:buNone/>
                       </a:pPr>
                       <a:r>
@@ -5969,7 +5782,7 @@
                     <a:bodyPr/>
                     <a:lstStyle/>
                     <a:p>
-                      <a:pPr indent="0" marL="0">
+                      <a:pPr marL="0" indent="0">
                         <a:buNone/>
                       </a:pPr>
                       <a:r>
@@ -6030,7 +5843,7 @@
                     <a:bodyPr/>
                     <a:lstStyle/>
                     <a:p>
-                      <a:pPr indent="0" marL="0">
+                      <a:pPr marL="0" indent="0">
                         <a:buNone/>
                       </a:pPr>
                       <a:r>
@@ -6086,6 +5899,11 @@
                     </a:solidFill>
                   </a:tcPr>
                 </a:tc>
+                <a:extLst>
+                  <a:ext uri="{0D108BD9-81ED-4DB2-BD59-A6C34878D82A}">
+                    <a16:rowId xmlns:a16="http://schemas.microsoft.com/office/drawing/2014/main" val="10002"/>
+                  </a:ext>
+                </a:extLst>
               </a:tr>
               <a:tr h="512064">
                 <a:tc>
@@ -6093,7 +5911,7 @@
                     <a:bodyPr/>
                     <a:lstStyle/>
                     <a:p>
-                      <a:pPr indent="0" marL="0">
+                      <a:pPr marL="0" indent="0">
                         <a:buNone/>
                       </a:pPr>
                       <a:r>
@@ -6154,7 +5972,7 @@
                     <a:bodyPr/>
                     <a:lstStyle/>
                     <a:p>
-                      <a:pPr indent="0" marL="0">
+                      <a:pPr marL="0" indent="0">
                         <a:buNone/>
                       </a:pPr>
                       <a:r>
@@ -6215,7 +6033,7 @@
                     <a:bodyPr/>
                     <a:lstStyle/>
                     <a:p>
-                      <a:pPr indent="0" marL="0">
+                      <a:pPr marL="0" indent="0">
                         <a:buNone/>
                       </a:pPr>
                       <a:r>
@@ -6276,7 +6094,7 @@
                     <a:bodyPr/>
                     <a:lstStyle/>
                     <a:p>
-                      <a:pPr indent="0" marL="0">
+                      <a:pPr marL="0" indent="0">
                         <a:buNone/>
                       </a:pPr>
                       <a:r>
@@ -6332,6 +6150,11 @@
                     </a:solidFill>
                   </a:tcPr>
                 </a:tc>
+                <a:extLst>
+                  <a:ext uri="{0D108BD9-81ED-4DB2-BD59-A6C34878D82A}">
+                    <a16:rowId xmlns:a16="http://schemas.microsoft.com/office/drawing/2014/main" val="10003"/>
+                  </a:ext>
+                </a:extLst>
               </a:tr>
               <a:tr h="512064">
                 <a:tc>
@@ -6339,7 +6162,7 @@
                     <a:bodyPr/>
                     <a:lstStyle/>
                     <a:p>
-                      <a:pPr indent="0" marL="0">
+                      <a:pPr marL="0" indent="0">
                         <a:buNone/>
                       </a:pPr>
                       <a:r>
@@ -6400,7 +6223,7 @@
                     <a:bodyPr/>
                     <a:lstStyle/>
                     <a:p>
-                      <a:pPr indent="0" marL="0">
+                      <a:pPr marL="0" indent="0">
                         <a:buNone/>
                       </a:pPr>
                       <a:r>
@@ -6461,16 +6284,28 @@
                     <a:bodyPr/>
                     <a:lstStyle/>
                     <a:p>
-                      <a:pPr indent="0" marL="0">
+                      <a:pPr marL="0" indent="0">
                         <a:buNone/>
                       </a:pPr>
                       <a:r>
-                        <a:rPr lang="en-US" sz="1200" dirty="0">
-                          <a:solidFill>
-                            <a:srgbClr val="3D4757"/>
-                          </a:solidFill>
-                        </a:rPr>
-                        <a:t>Four LangGraph nodes over one typed SOVState, checkpointed</a:t>
+                        <a:rPr lang="en-IN" sz="1200" dirty="0"/>
+                        <a:t>Four </a:t>
+                      </a:r>
+                      <a:r>
+                        <a:rPr lang="en-IN" sz="1200" dirty="0" err="1"/>
+                        <a:t>LangGraph</a:t>
+                      </a:r>
+                      <a:r>
+                        <a:rPr lang="en-IN" sz="1200" dirty="0"/>
+                        <a:t> nodes over a typed </a:t>
+                      </a:r>
+                      <a:r>
+                        <a:rPr lang="en-IN" sz="1200" dirty="0" err="1"/>
+                        <a:t>SOVState</a:t>
+                      </a:r>
+                      <a:r>
+                        <a:rPr lang="en-IN" sz="1200" dirty="0"/>
+                        <a:t>, with isolated per-sheet state for multi-PRIMARY workbooks.</a:t>
                       </a:r>
                       <a:endParaRPr lang="en-US" sz="1200" dirty="0"/>
                     </a:p>
@@ -6522,7 +6357,7 @@
                     <a:bodyPr/>
                     <a:lstStyle/>
                     <a:p>
-                      <a:pPr indent="0" marL="0">
+                      <a:pPr marL="0" indent="0">
                         <a:buNone/>
                       </a:pPr>
                       <a:r>
@@ -6578,6 +6413,11 @@
                     </a:solidFill>
                   </a:tcPr>
                 </a:tc>
+                <a:extLst>
+                  <a:ext uri="{0D108BD9-81ED-4DB2-BD59-A6C34878D82A}">
+                    <a16:rowId xmlns:a16="http://schemas.microsoft.com/office/drawing/2014/main" val="10004"/>
+                  </a:ext>
+                </a:extLst>
               </a:tr>
               <a:tr h="512064">
                 <a:tc>
@@ -6585,7 +6425,7 @@
                     <a:bodyPr/>
                     <a:lstStyle/>
                     <a:p>
-                      <a:pPr indent="0" marL="0">
+                      <a:pPr marL="0" indent="0">
                         <a:buNone/>
                       </a:pPr>
                       <a:r>
@@ -6646,7 +6486,7 @@
                     <a:bodyPr/>
                     <a:lstStyle/>
                     <a:p>
-                      <a:pPr indent="0" marL="0">
+                      <a:pPr marL="0" indent="0">
                         <a:buNone/>
                       </a:pPr>
                       <a:r>
@@ -6707,7 +6547,7 @@
                     <a:bodyPr/>
                     <a:lstStyle/>
                     <a:p>
-                      <a:pPr indent="0" marL="0">
+                      <a:pPr marL="0" indent="0">
                         <a:buNone/>
                       </a:pPr>
                       <a:r>
@@ -6768,7 +6608,7 @@
                     <a:bodyPr/>
                     <a:lstStyle/>
                     <a:p>
-                      <a:pPr indent="0" marL="0">
+                      <a:pPr marL="0" indent="0">
                         <a:buNone/>
                       </a:pPr>
                       <a:r>
@@ -6824,6 +6664,11 @@
                     </a:solidFill>
                   </a:tcPr>
                 </a:tc>
+                <a:extLst>
+                  <a:ext uri="{0D108BD9-81ED-4DB2-BD59-A6C34878D82A}">
+                    <a16:rowId xmlns:a16="http://schemas.microsoft.com/office/drawing/2014/main" val="10005"/>
+                  </a:ext>
+                </a:extLst>
               </a:tr>
               <a:tr h="512064">
                 <a:tc>
@@ -6831,7 +6676,7 @@
                     <a:bodyPr/>
                     <a:lstStyle/>
                     <a:p>
-                      <a:pPr indent="0" marL="0">
+                      <a:pPr marL="0" indent="0">
                         <a:buNone/>
                       </a:pPr>
                       <a:r>
@@ -6892,7 +6737,7 @@
                     <a:bodyPr/>
                     <a:lstStyle/>
                     <a:p>
-                      <a:pPr indent="0" marL="0">
+                      <a:pPr marL="0" indent="0">
                         <a:buNone/>
                       </a:pPr>
                       <a:r>
@@ -6953,7 +6798,7 @@
                     <a:bodyPr/>
                     <a:lstStyle/>
                     <a:p>
-                      <a:pPr indent="0" marL="0">
+                      <a:pPr marL="0" indent="0">
                         <a:buNone/>
                       </a:pPr>
                       <a:r>
@@ -7014,7 +6859,7 @@
                     <a:bodyPr/>
                     <a:lstStyle/>
                     <a:p>
-                      <a:pPr indent="0" marL="0">
+                      <a:pPr marL="0" indent="0">
                         <a:buNone/>
                       </a:pPr>
                       <a:r>
@@ -7070,6 +6915,11 @@
                     </a:solidFill>
                   </a:tcPr>
                 </a:tc>
+                <a:extLst>
+                  <a:ext uri="{0D108BD9-81ED-4DB2-BD59-A6C34878D82A}">
+                    <a16:rowId xmlns:a16="http://schemas.microsoft.com/office/drawing/2014/main" val="10006"/>
+                  </a:ext>
+                </a:extLst>
               </a:tr>
               <a:tr h="512064">
                 <a:tc>
@@ -7077,7 +6927,7 @@
                     <a:bodyPr/>
                     <a:lstStyle/>
                     <a:p>
-                      <a:pPr indent="0" marL="0">
+                      <a:pPr marL="0" indent="0">
                         <a:buNone/>
                       </a:pPr>
                       <a:r>
@@ -7138,7 +6988,7 @@
                     <a:bodyPr/>
                     <a:lstStyle/>
                     <a:p>
-                      <a:pPr indent="0" marL="0">
+                      <a:pPr marL="0" indent="0">
                         <a:buNone/>
                       </a:pPr>
                       <a:r>
@@ -7199,7 +7049,7 @@
                     <a:bodyPr/>
                     <a:lstStyle/>
                     <a:p>
-                      <a:pPr indent="0" marL="0">
+                      <a:pPr marL="0" indent="0">
                         <a:buNone/>
                       </a:pPr>
                       <a:r>
@@ -7260,7 +7110,7 @@
                     <a:bodyPr/>
                     <a:lstStyle/>
                     <a:p>
-                      <a:pPr indent="0" marL="0">
+                      <a:pPr marL="0" indent="0">
                         <a:buNone/>
                       </a:pPr>
                       <a:r>
@@ -7316,6 +7166,11 @@
                     </a:solidFill>
                   </a:tcPr>
                 </a:tc>
+                <a:extLst>
+                  <a:ext uri="{0D108BD9-81ED-4DB2-BD59-A6C34878D82A}">
+                    <a16:rowId xmlns:a16="http://schemas.microsoft.com/office/drawing/2014/main" val="10007"/>
+                  </a:ext>
+                </a:extLst>
               </a:tr>
             </a:tbl>
           </a:graphicData>
@@ -7342,7 +7197,7 @@
           <a:bodyPr wrap="square" lIns="0" tIns="0" rIns="0" bIns="0" rtlCol="0" anchor="t"/>
           <a:lstStyle/>
           <a:p>
-            <a:pPr indent="0" marL="0">
+            <a:pPr marL="0" indent="0">
               <a:buNone/>
             </a:pPr>
             <a:r>
@@ -7377,7 +7232,7 @@
           </a:prstGeom>
           <a:extLst>
             <a:ext uri="{C572A759-6A51-4108-AA02-DFA0A04FC94B}">
-              <ma14:wrappingTextBoxFlag xmlns:ma14="http://schemas.microsoft.com/office/mac/drawingml/2011/main" val="0"/>
+              <ma14:wrappingTextBoxFlag xmlns:ma14="http://schemas.microsoft.com/office/mac/drawingml/2011/main" xmlns="" val="0"/>
             </a:ext>
           </a:extLst>
         </p:spPr>
@@ -7395,7 +7250,7 @@
           <a:p>
             <a:pPr algn="r"/>
             <a:fld id="{F7021451-1387-4CA6-816F-3879F97B5CBC}" type="slidenum">
-              <a:rPr b="0" lang="en-US"/>
+              <a:rPr lang="en-US" b="0"/>
               <a:t>11</a:t>
             </a:fld>
             <a:endParaRPr lang="en-US"/>
@@ -7430,9 +7285,11 @@
       <p:sp>
         <p:nvSpPr>
           <p:cNvPr id="2" name="Text 0"/>
-          <p:cNvSpPr/>
+          <p:cNvSpPr>
+            <a:spLocks noGrp="1"/>
+          </p:cNvSpPr>
           <p:nvPr>
-            <p:ph idx="100" type="body" hasCustomPrompt="1"/>
+            <p:ph type="body" idx="100" hasCustomPrompt="1"/>
           </p:nvPr>
         </p:nvSpPr>
         <p:spPr>
@@ -7450,11 +7307,11 @@
           <a:bodyPr wrap="square" lIns="0" tIns="0" rIns="0" bIns="0" rtlCol="0" anchor="ctr"/>
           <a:lstStyle/>
           <a:p>
-            <a:pPr indent="0" marL="0">
+            <a:pPr marL="0" indent="0">
               <a:buNone/>
             </a:pPr>
             <a:r>
-              <a:rPr lang="en-US" sz="1200" b="1" spc="200" kern="0" dirty="0">
+              <a:rPr lang="en-US" sz="1200" b="1" kern="0" spc="200" dirty="0">
                 <a:solidFill>
                   <a:srgbClr val="8A5A0B"/>
                 </a:solidFill>
@@ -7468,9 +7325,11 @@
       <p:sp>
         <p:nvSpPr>
           <p:cNvPr id="3" name="Text 0"/>
-          <p:cNvSpPr/>
+          <p:cNvSpPr>
+            <a:spLocks noGrp="1"/>
+          </p:cNvSpPr>
           <p:nvPr>
-            <p:ph idx="101" type="title" hasCustomPrompt="1"/>
+            <p:ph type="title" idx="101" hasCustomPrompt="1"/>
           </p:nvPr>
         </p:nvSpPr>
         <p:spPr>
@@ -7488,7 +7347,7 @@
           <a:bodyPr wrap="square" lIns="0" tIns="0" rIns="0" bIns="0" rtlCol="0" anchor="t"/>
           <a:lstStyle/>
           <a:p>
-            <a:pPr algn="l" indent="0" marL="0">
+            <a:pPr marL="0" indent="0" algn="l">
               <a:buNone/>
             </a:pPr>
             <a:r>
@@ -7513,9 +7372,9 @@
           <a:off x="548640" y="1645920"/>
           <a:ext cx="6675120" cy="4069080"/>
         </p:xfrm>
-        <a:graphic xmlns:a="http://schemas.openxmlformats.org/drawingml/2006/main">
+        <a:graphic>
           <a:graphicData uri="http://schemas.openxmlformats.org/drawingml/2006/chart">
-            <c:chart xmlns:c="http://schemas.openxmlformats.org/drawingml/2006/chart" r:id="rId1"/>
+            <c:chart xmlns:c="http://schemas.openxmlformats.org/drawingml/2006/chart" xmlns:r="http://schemas.openxmlformats.org/officeDocument/2006/relationships" r:id="rId3"/>
           </a:graphicData>
         </a:graphic>
       </p:graphicFrame>
@@ -7540,7 +7399,7 @@
           <a:bodyPr wrap="square" lIns="0" tIns="0" rIns="0" bIns="0" rtlCol="0" anchor="t"/>
           <a:lstStyle/>
           <a:p>
-            <a:pPr indent="0" marL="0">
+            <a:pPr marL="0" indent="0">
               <a:buNone/>
             </a:pPr>
             <a:r>
@@ -7609,14 +7468,14 @@
       </p:sp>
       <p:pic>
         <p:nvPicPr>
-          <p:cNvPr id="8" name="Image 0" descr="preencoded.png">    </p:cNvPr>
+          <p:cNvPr id="8" name="Image 0" descr="preencoded.png"/>
           <p:cNvPicPr>
             <a:picLocks noChangeAspect="1"/>
           </p:cNvPicPr>
           <p:nvPr/>
         </p:nvPicPr>
         <p:blipFill>
-          <a:blip r:embed="rId2"/>
+          <a:blip r:embed="rId4"/>
           <a:stretch>
             <a:fillRect/>
           </a:stretch>
@@ -7652,7 +7511,7 @@
           <a:bodyPr wrap="square" lIns="0" tIns="0" rIns="0" bIns="0" rtlCol="0" anchor="t"/>
           <a:lstStyle/>
           <a:p>
-            <a:pPr indent="0" marL="0">
+            <a:pPr marL="0" indent="0">
               <a:buNone/>
             </a:pPr>
             <a:r>
@@ -7688,7 +7547,7 @@
           <a:bodyPr wrap="square" lIns="0" tIns="0" rIns="0" bIns="0" rtlCol="0" anchor="t"/>
           <a:lstStyle/>
           <a:p>
-            <a:pPr indent="0" marL="0">
+            <a:pPr marL="0" indent="0">
               <a:buNone/>
             </a:pPr>
             <a:r>
@@ -7757,14 +7616,14 @@
       </p:sp>
       <p:pic>
         <p:nvPicPr>
-          <p:cNvPr id="13" name="Image 1" descr="preencoded.png">    </p:cNvPr>
+          <p:cNvPr id="13" name="Image 1" descr="preencoded.png"/>
           <p:cNvPicPr>
             <a:picLocks noChangeAspect="1"/>
           </p:cNvPicPr>
           <p:nvPr/>
         </p:nvPicPr>
         <p:blipFill>
-          <a:blip r:embed="rId3"/>
+          <a:blip r:embed="rId5"/>
           <a:stretch>
             <a:fillRect/>
           </a:stretch>
@@ -7800,7 +7659,7 @@
           <a:bodyPr wrap="square" lIns="0" tIns="0" rIns="0" bIns="0" rtlCol="0" anchor="t"/>
           <a:lstStyle/>
           <a:p>
-            <a:pPr indent="0" marL="0">
+            <a:pPr marL="0" indent="0">
               <a:buNone/>
             </a:pPr>
             <a:r>
@@ -7836,7 +7695,7 @@
           <a:bodyPr wrap="square" lIns="0" tIns="0" rIns="0" bIns="0" rtlCol="0" anchor="t"/>
           <a:lstStyle/>
           <a:p>
-            <a:pPr indent="0" marL="0">
+            <a:pPr marL="0" indent="0">
               <a:buNone/>
             </a:pPr>
             <a:r>
@@ -7905,14 +7764,14 @@
       </p:sp>
       <p:pic>
         <p:nvPicPr>
-          <p:cNvPr id="18" name="Image 2" descr="preencoded.png">    </p:cNvPr>
+          <p:cNvPr id="18" name="Image 2" descr="preencoded.png"/>
           <p:cNvPicPr>
             <a:picLocks noChangeAspect="1"/>
           </p:cNvPicPr>
           <p:nvPr/>
         </p:nvPicPr>
         <p:blipFill>
-          <a:blip r:embed="rId4"/>
+          <a:blip r:embed="rId6"/>
           <a:stretch>
             <a:fillRect/>
           </a:stretch>
@@ -7948,7 +7807,7 @@
           <a:bodyPr wrap="square" lIns="0" tIns="0" rIns="0" bIns="0" rtlCol="0" anchor="t"/>
           <a:lstStyle/>
           <a:p>
-            <a:pPr indent="0" marL="0">
+            <a:pPr marL="0" indent="0">
               <a:buNone/>
             </a:pPr>
             <a:r>
@@ -7984,7 +7843,7 @@
           <a:bodyPr wrap="square" lIns="0" tIns="0" rIns="0" bIns="0" rtlCol="0" anchor="t"/>
           <a:lstStyle/>
           <a:p>
-            <a:pPr indent="0" marL="0">
+            <a:pPr marL="0" indent="0">
               <a:buNone/>
             </a:pPr>
             <a:r>
@@ -8019,7 +7878,7 @@
           </a:prstGeom>
           <a:extLst>
             <a:ext uri="{C572A759-6A51-4108-AA02-DFA0A04FC94B}">
-              <ma14:wrappingTextBoxFlag xmlns:ma14="http://schemas.microsoft.com/office/mac/drawingml/2011/main" val="0"/>
+              <ma14:wrappingTextBoxFlag xmlns:ma14="http://schemas.microsoft.com/office/mac/drawingml/2011/main" xmlns="" val="0"/>
             </a:ext>
           </a:extLst>
         </p:spPr>
@@ -8037,7 +7896,7 @@
           <a:p>
             <a:pPr algn="r"/>
             <a:fld id="{F7021451-1387-4CA6-816F-3879F97B5CBC}" type="slidenum">
-              <a:rPr b="0" lang="en-US"/>
+              <a:rPr lang="en-US" b="0"/>
               <a:t>12</a:t>
             </a:fld>
             <a:endParaRPr lang="en-US"/>
@@ -8072,9 +7931,11 @@
       <p:sp>
         <p:nvSpPr>
           <p:cNvPr id="2" name="Text 0"/>
-          <p:cNvSpPr/>
+          <p:cNvSpPr>
+            <a:spLocks noGrp="1"/>
+          </p:cNvSpPr>
           <p:nvPr>
-            <p:ph idx="100" type="body" hasCustomPrompt="1"/>
+            <p:ph type="body" idx="100" hasCustomPrompt="1"/>
           </p:nvPr>
         </p:nvSpPr>
         <p:spPr>
@@ -8092,11 +7953,11 @@
           <a:bodyPr wrap="square" lIns="0" tIns="0" rIns="0" bIns="0" rtlCol="0" anchor="ctr"/>
           <a:lstStyle/>
           <a:p>
-            <a:pPr indent="0" marL="0">
+            <a:pPr marL="0" indent="0">
               <a:buNone/>
             </a:pPr>
             <a:r>
-              <a:rPr lang="en-US" sz="1200" b="1" spc="200" kern="0" dirty="0">
+              <a:rPr lang="en-US" sz="1200" b="1" kern="0" spc="200" dirty="0">
                 <a:solidFill>
                   <a:srgbClr val="8A5A0B"/>
                 </a:solidFill>
@@ -8110,9 +7971,11 @@
       <p:sp>
         <p:nvSpPr>
           <p:cNvPr id="3" name="Text 0"/>
-          <p:cNvSpPr/>
+          <p:cNvSpPr>
+            <a:spLocks noGrp="1"/>
+          </p:cNvSpPr>
           <p:nvPr>
-            <p:ph idx="101" type="title" hasCustomPrompt="1"/>
+            <p:ph type="title" idx="101" hasCustomPrompt="1"/>
           </p:nvPr>
         </p:nvSpPr>
         <p:spPr>
@@ -8130,7 +7993,7 @@
           <a:bodyPr wrap="square" lIns="0" tIns="0" rIns="0" bIns="0" rtlCol="0" anchor="t"/>
           <a:lstStyle/>
           <a:p>
-            <a:pPr algn="l" indent="0" marL="0">
+            <a:pPr marL="0" indent="0" algn="l">
               <a:buNone/>
             </a:pPr>
             <a:r>
@@ -8161,19 +8024,55 @@
         </p:nvGraphicFramePr>
         <p:xfrm>
           <a:off x="548640" y="1645920"/>
-          <a:ext cx="11094415" cy="914400"/>
+          <a:ext cx="11091672" cy="2514600"/>
         </p:xfrm>
         <a:graphic>
           <a:graphicData uri="http://schemas.openxmlformats.org/drawingml/2006/table">
             <a:tbl>
               <a:tblPr/>
               <a:tblGrid>
-                <a:gridCol w="1325880"/>
-                <a:gridCol w="3749040"/>
-                <a:gridCol w="1051560"/>
-                <a:gridCol w="1600200"/>
-                <a:gridCol w="868680"/>
-                <a:gridCol w="2496312"/>
+                <a:gridCol w="1325880">
+                  <a:extLst>
+                    <a:ext uri="{9D8B030D-6E8A-4147-A177-3AD203B41FA5}">
+                      <a16:colId xmlns:a16="http://schemas.microsoft.com/office/drawing/2014/main" val="20000"/>
+                    </a:ext>
+                  </a:extLst>
+                </a:gridCol>
+                <a:gridCol w="3749040">
+                  <a:extLst>
+                    <a:ext uri="{9D8B030D-6E8A-4147-A177-3AD203B41FA5}">
+                      <a16:colId xmlns:a16="http://schemas.microsoft.com/office/drawing/2014/main" val="20001"/>
+                    </a:ext>
+                  </a:extLst>
+                </a:gridCol>
+                <a:gridCol w="1051560">
+                  <a:extLst>
+                    <a:ext uri="{9D8B030D-6E8A-4147-A177-3AD203B41FA5}">
+                      <a16:colId xmlns:a16="http://schemas.microsoft.com/office/drawing/2014/main" val="20002"/>
+                    </a:ext>
+                  </a:extLst>
+                </a:gridCol>
+                <a:gridCol w="1600200">
+                  <a:extLst>
+                    <a:ext uri="{9D8B030D-6E8A-4147-A177-3AD203B41FA5}">
+                      <a16:colId xmlns:a16="http://schemas.microsoft.com/office/drawing/2014/main" val="20003"/>
+                    </a:ext>
+                  </a:extLst>
+                </a:gridCol>
+                <a:gridCol w="868680">
+                  <a:extLst>
+                    <a:ext uri="{9D8B030D-6E8A-4147-A177-3AD203B41FA5}">
+                      <a16:colId xmlns:a16="http://schemas.microsoft.com/office/drawing/2014/main" val="20004"/>
+                    </a:ext>
+                  </a:extLst>
+                </a:gridCol>
+                <a:gridCol w="2496312">
+                  <a:extLst>
+                    <a:ext uri="{9D8B030D-6E8A-4147-A177-3AD203B41FA5}">
+                      <a16:colId xmlns:a16="http://schemas.microsoft.com/office/drawing/2014/main" val="20005"/>
+                    </a:ext>
+                  </a:extLst>
+                </a:gridCol>
               </a:tblGrid>
               <a:tr h="502920">
                 <a:tc>
@@ -8181,7 +8080,7 @@
                     <a:bodyPr/>
                     <a:lstStyle/>
                     <a:p>
-                      <a:pPr indent="0" marL="0">
+                      <a:pPr marL="0" indent="0">
                         <a:buNone/>
                       </a:pPr>
                       <a:r>
@@ -8242,7 +8141,7 @@
                     <a:bodyPr/>
                     <a:lstStyle/>
                     <a:p>
-                      <a:pPr indent="0" marL="0">
+                      <a:pPr marL="0" indent="0">
                         <a:buNone/>
                       </a:pPr>
                       <a:r>
@@ -8303,7 +8202,7 @@
                     <a:bodyPr/>
                     <a:lstStyle/>
                     <a:p>
-                      <a:pPr indent="0" marL="0">
+                      <a:pPr marL="0" indent="0">
                         <a:buNone/>
                       </a:pPr>
                       <a:r>
@@ -8364,7 +8263,7 @@
                     <a:bodyPr/>
                     <a:lstStyle/>
                     <a:p>
-                      <a:pPr indent="0" marL="0">
+                      <a:pPr marL="0" indent="0">
                         <a:buNone/>
                       </a:pPr>
                       <a:r>
@@ -8425,7 +8324,7 @@
                     <a:bodyPr/>
                     <a:lstStyle/>
                     <a:p>
-                      <a:pPr indent="0" marL="0">
+                      <a:pPr marL="0" indent="0">
                         <a:buNone/>
                       </a:pPr>
                       <a:r>
@@ -8486,7 +8385,7 @@
                     <a:bodyPr/>
                     <a:lstStyle/>
                     <a:p>
-                      <a:pPr indent="0" marL="0">
+                      <a:pPr marL="0" indent="0">
                         <a:buNone/>
                       </a:pPr>
                       <a:r>
@@ -8542,6 +8441,11 @@
                     </a:solidFill>
                   </a:tcPr>
                 </a:tc>
+                <a:extLst>
+                  <a:ext uri="{0D108BD9-81ED-4DB2-BD59-A6C34878D82A}">
+                    <a16:rowId xmlns:a16="http://schemas.microsoft.com/office/drawing/2014/main" val="10000"/>
+                  </a:ext>
+                </a:extLst>
               </a:tr>
               <a:tr h="502920">
                 <a:tc>
@@ -8549,7 +8453,7 @@
                     <a:bodyPr/>
                     <a:lstStyle/>
                     <a:p>
-                      <a:pPr indent="0" marL="0">
+                      <a:pPr marL="0" indent="0">
                         <a:buNone/>
                       </a:pPr>
                       <a:r>
@@ -8610,7 +8514,7 @@
                     <a:bodyPr/>
                     <a:lstStyle/>
                     <a:p>
-                      <a:pPr indent="0" marL="0">
+                      <a:pPr marL="0" indent="0">
                         <a:buNone/>
                       </a:pPr>
                       <a:r>
@@ -8671,7 +8575,7 @@
                     <a:bodyPr/>
                     <a:lstStyle/>
                     <a:p>
-                      <a:pPr indent="0" marL="0">
+                      <a:pPr marL="0" indent="0">
                         <a:buNone/>
                       </a:pPr>
                       <a:r>
@@ -8732,7 +8636,7 @@
                     <a:bodyPr/>
                     <a:lstStyle/>
                     <a:p>
-                      <a:pPr indent="0" marL="0">
+                      <a:pPr marL="0" indent="0">
                         <a:buNone/>
                       </a:pPr>
                       <a:r>
@@ -8793,7 +8697,7 @@
                     <a:bodyPr/>
                     <a:lstStyle/>
                     <a:p>
-                      <a:pPr indent="0" marL="0">
+                      <a:pPr marL="0" indent="0">
                         <a:buNone/>
                       </a:pPr>
                       <a:r>
@@ -8854,7 +8758,7 @@
                     <a:bodyPr/>
                     <a:lstStyle/>
                     <a:p>
-                      <a:pPr indent="0" marL="0">
+                      <a:pPr marL="0" indent="0">
                         <a:buNone/>
                       </a:pPr>
                       <a:r>
@@ -8910,6 +8814,11 @@
                     </a:solidFill>
                   </a:tcPr>
                 </a:tc>
+                <a:extLst>
+                  <a:ext uri="{0D108BD9-81ED-4DB2-BD59-A6C34878D82A}">
+                    <a16:rowId xmlns:a16="http://schemas.microsoft.com/office/drawing/2014/main" val="10001"/>
+                  </a:ext>
+                </a:extLst>
               </a:tr>
               <a:tr h="502920">
                 <a:tc>
@@ -8917,7 +8826,7 @@
                     <a:bodyPr/>
                     <a:lstStyle/>
                     <a:p>
-                      <a:pPr indent="0" marL="0">
+                      <a:pPr marL="0" indent="0">
                         <a:buNone/>
                       </a:pPr>
                       <a:r>
@@ -8978,7 +8887,7 @@
                     <a:bodyPr/>
                     <a:lstStyle/>
                     <a:p>
-                      <a:pPr indent="0" marL="0">
+                      <a:pPr marL="0" indent="0">
                         <a:buNone/>
                       </a:pPr>
                       <a:r>
@@ -9039,7 +8948,7 @@
                     <a:bodyPr/>
                     <a:lstStyle/>
                     <a:p>
-                      <a:pPr indent="0" marL="0">
+                      <a:pPr marL="0" indent="0">
                         <a:buNone/>
                       </a:pPr>
                       <a:r>
@@ -9100,7 +9009,7 @@
                     <a:bodyPr/>
                     <a:lstStyle/>
                     <a:p>
-                      <a:pPr indent="0" marL="0">
+                      <a:pPr marL="0" indent="0">
                         <a:buNone/>
                       </a:pPr>
                       <a:r>
@@ -9161,7 +9070,7 @@
                     <a:bodyPr/>
                     <a:lstStyle/>
                     <a:p>
-                      <a:pPr indent="0" marL="0">
+                      <a:pPr marL="0" indent="0">
                         <a:buNone/>
                       </a:pPr>
                       <a:r>
@@ -9222,7 +9131,7 @@
                     <a:bodyPr/>
                     <a:lstStyle/>
                     <a:p>
-                      <a:pPr indent="0" marL="0">
+                      <a:pPr marL="0" indent="0">
                         <a:buNone/>
                       </a:pPr>
                       <a:r>
@@ -9278,6 +9187,11 @@
                     </a:solidFill>
                   </a:tcPr>
                 </a:tc>
+                <a:extLst>
+                  <a:ext uri="{0D108BD9-81ED-4DB2-BD59-A6C34878D82A}">
+                    <a16:rowId xmlns:a16="http://schemas.microsoft.com/office/drawing/2014/main" val="10002"/>
+                  </a:ext>
+                </a:extLst>
               </a:tr>
               <a:tr h="502920">
                 <a:tc>
@@ -9285,7 +9199,7 @@
                     <a:bodyPr/>
                     <a:lstStyle/>
                     <a:p>
-                      <a:pPr indent="0" marL="0">
+                      <a:pPr marL="0" indent="0">
                         <a:buNone/>
                       </a:pPr>
                       <a:r>
@@ -9346,7 +9260,7 @@
                     <a:bodyPr/>
                     <a:lstStyle/>
                     <a:p>
-                      <a:pPr indent="0" marL="0">
+                      <a:pPr marL="0" indent="0">
                         <a:buNone/>
                       </a:pPr>
                       <a:r>
@@ -9407,7 +9321,7 @@
                     <a:bodyPr/>
                     <a:lstStyle/>
                     <a:p>
-                      <a:pPr indent="0" marL="0">
+                      <a:pPr marL="0" indent="0">
                         <a:buNone/>
                       </a:pPr>
                       <a:r>
@@ -9468,7 +9382,7 @@
                     <a:bodyPr/>
                     <a:lstStyle/>
                     <a:p>
-                      <a:pPr indent="0" marL="0">
+                      <a:pPr marL="0" indent="0">
                         <a:buNone/>
                       </a:pPr>
                       <a:r>
@@ -9529,7 +9443,7 @@
                     <a:bodyPr/>
                     <a:lstStyle/>
                     <a:p>
-                      <a:pPr indent="0" marL="0">
+                      <a:pPr marL="0" indent="0">
                         <a:buNone/>
                       </a:pPr>
                       <a:r>
@@ -9590,7 +9504,7 @@
                     <a:bodyPr/>
                     <a:lstStyle/>
                     <a:p>
-                      <a:pPr indent="0" marL="0">
+                      <a:pPr marL="0" indent="0">
                         <a:buNone/>
                       </a:pPr>
                       <a:r>
@@ -9646,6 +9560,11 @@
                     </a:solidFill>
                   </a:tcPr>
                 </a:tc>
+                <a:extLst>
+                  <a:ext uri="{0D108BD9-81ED-4DB2-BD59-A6C34878D82A}">
+                    <a16:rowId xmlns:a16="http://schemas.microsoft.com/office/drawing/2014/main" val="10003"/>
+                  </a:ext>
+                </a:extLst>
               </a:tr>
               <a:tr h="502920">
                 <a:tc>
@@ -9653,7 +9572,7 @@
                     <a:bodyPr/>
                     <a:lstStyle/>
                     <a:p>
-                      <a:pPr indent="0" marL="0">
+                      <a:pPr marL="0" indent="0">
                         <a:buNone/>
                       </a:pPr>
                       <a:r>
@@ -9714,7 +9633,7 @@
                     <a:bodyPr/>
                     <a:lstStyle/>
                     <a:p>
-                      <a:pPr indent="0" marL="0">
+                      <a:pPr marL="0" indent="0">
                         <a:buNone/>
                       </a:pPr>
                       <a:r>
@@ -9775,7 +9694,7 @@
                     <a:bodyPr/>
                     <a:lstStyle/>
                     <a:p>
-                      <a:pPr indent="0" marL="0">
+                      <a:pPr marL="0" indent="0">
                         <a:buNone/>
                       </a:pPr>
                       <a:r>
@@ -9836,7 +9755,7 @@
                     <a:bodyPr/>
                     <a:lstStyle/>
                     <a:p>
-                      <a:pPr indent="0" marL="0">
+                      <a:pPr marL="0" indent="0">
                         <a:buNone/>
                       </a:pPr>
                       <a:r>
@@ -9897,7 +9816,7 @@
                     <a:bodyPr/>
                     <a:lstStyle/>
                     <a:p>
-                      <a:pPr indent="0" marL="0">
+                      <a:pPr marL="0" indent="0">
                         <a:buNone/>
                       </a:pPr>
                       <a:r>
@@ -9958,7 +9877,7 @@
                     <a:bodyPr/>
                     <a:lstStyle/>
                     <a:p>
-                      <a:pPr indent="0" marL="0">
+                      <a:pPr marL="0" indent="0">
                         <a:buNone/>
                       </a:pPr>
                       <a:r>
@@ -10014,6 +9933,11 @@
                     </a:solidFill>
                   </a:tcPr>
                 </a:tc>
+                <a:extLst>
+                  <a:ext uri="{0D108BD9-81ED-4DB2-BD59-A6C34878D82A}">
+                    <a16:rowId xmlns:a16="http://schemas.microsoft.com/office/drawing/2014/main" val="10004"/>
+                  </a:ext>
+                </a:extLst>
               </a:tr>
             </a:tbl>
           </a:graphicData>
@@ -10040,7 +9964,7 @@
           <a:bodyPr wrap="square" lIns="0" tIns="0" rIns="0" bIns="0" rtlCol="0" anchor="t"/>
           <a:lstStyle/>
           <a:p>
-            <a:pPr indent="0" marL="0">
+            <a:pPr marL="0" indent="0">
               <a:buNone/>
             </a:pPr>
             <a:r>
@@ -10076,7 +10000,7 @@
           <a:bodyPr wrap="square" lIns="0" tIns="0" rIns="0" bIns="0" rtlCol="0" anchor="t"/>
           <a:lstStyle/>
           <a:p>
-            <a:pPr indent="0" marL="0">
+            <a:pPr marL="0" indent="0">
               <a:buNone/>
             </a:pPr>
             <a:r>
@@ -10112,7 +10036,7 @@
           <a:bodyPr wrap="square" lIns="0" tIns="0" rIns="0" bIns="0" rtlCol="0" anchor="t"/>
           <a:lstStyle/>
           <a:p>
-            <a:pPr indent="0" marL="0">
+            <a:pPr marL="0" indent="0">
               <a:buNone/>
             </a:pPr>
             <a:r>
@@ -10148,7 +10072,7 @@
           <a:bodyPr wrap="square" lIns="0" tIns="0" rIns="0" bIns="0" rtlCol="0" anchor="t"/>
           <a:lstStyle/>
           <a:p>
-            <a:pPr indent="0" marL="0">
+            <a:pPr marL="0" indent="0">
               <a:buNone/>
             </a:pPr>
             <a:r>
@@ -10184,7 +10108,7 @@
           <a:bodyPr wrap="square" lIns="0" tIns="0" rIns="0" bIns="0" rtlCol="0" anchor="t"/>
           <a:lstStyle/>
           <a:p>
-            <a:pPr indent="0" marL="0">
+            <a:pPr marL="0" indent="0">
               <a:buNone/>
             </a:pPr>
             <a:r>
@@ -10220,7 +10144,7 @@
           <a:bodyPr wrap="square" lIns="0" tIns="0" rIns="0" bIns="0" rtlCol="0" anchor="t"/>
           <a:lstStyle/>
           <a:p>
-            <a:pPr indent="0" marL="0">
+            <a:pPr marL="0" indent="0">
               <a:buNone/>
             </a:pPr>
             <a:r>
@@ -10255,7 +10179,7 @@
           </a:prstGeom>
           <a:extLst>
             <a:ext uri="{C572A759-6A51-4108-AA02-DFA0A04FC94B}">
-              <ma14:wrappingTextBoxFlag xmlns:ma14="http://schemas.microsoft.com/office/mac/drawingml/2011/main" val="0"/>
+              <ma14:wrappingTextBoxFlag xmlns:ma14="http://schemas.microsoft.com/office/mac/drawingml/2011/main" xmlns="" val="0"/>
             </a:ext>
           </a:extLst>
         </p:spPr>
@@ -10273,7 +10197,7 @@
           <a:p>
             <a:pPr algn="r"/>
             <a:fld id="{F7021451-1387-4CA6-816F-3879F97B5CBC}" type="slidenum">
-              <a:rPr b="0" lang="en-US"/>
+              <a:rPr lang="en-US" b="0"/>
               <a:t>13</a:t>
             </a:fld>
             <a:endParaRPr lang="en-US"/>
@@ -10308,9 +10232,11 @@
       <p:sp>
         <p:nvSpPr>
           <p:cNvPr id="2" name="Text 0"/>
-          <p:cNvSpPr/>
+          <p:cNvSpPr>
+            <a:spLocks noGrp="1"/>
+          </p:cNvSpPr>
           <p:nvPr>
-            <p:ph idx="100" type="body" hasCustomPrompt="1"/>
+            <p:ph type="body" idx="100" hasCustomPrompt="1"/>
           </p:nvPr>
         </p:nvSpPr>
         <p:spPr>
@@ -10328,11 +10254,11 @@
           <a:bodyPr wrap="square" lIns="0" tIns="0" rIns="0" bIns="0" rtlCol="0" anchor="ctr"/>
           <a:lstStyle/>
           <a:p>
-            <a:pPr indent="0" marL="0">
+            <a:pPr marL="0" indent="0">
               <a:buNone/>
             </a:pPr>
             <a:r>
-              <a:rPr lang="en-US" sz="1200" b="1" spc="200" kern="0" dirty="0">
+              <a:rPr lang="en-US" sz="1200" b="1" kern="0" spc="200" dirty="0">
                 <a:solidFill>
                   <a:srgbClr val="8A5A0B"/>
                 </a:solidFill>
@@ -10346,9 +10272,11 @@
       <p:sp>
         <p:nvSpPr>
           <p:cNvPr id="3" name="Text 0"/>
-          <p:cNvSpPr/>
+          <p:cNvSpPr>
+            <a:spLocks noGrp="1"/>
+          </p:cNvSpPr>
           <p:nvPr>
-            <p:ph idx="101" type="title" hasCustomPrompt="1"/>
+            <p:ph type="title" idx="101" hasCustomPrompt="1"/>
           </p:nvPr>
         </p:nvSpPr>
         <p:spPr>
@@ -10366,7 +10294,7 @@
           <a:bodyPr wrap="square" lIns="0" tIns="0" rIns="0" bIns="0" rtlCol="0" anchor="t"/>
           <a:lstStyle/>
           <a:p>
-            <a:pPr algn="l" indent="0" marL="0">
+            <a:pPr marL="0" indent="0" algn="l">
               <a:buNone/>
             </a:pPr>
             <a:r>
@@ -10429,11 +10357,11 @@
           <a:bodyPr wrap="square" lIns="0" tIns="0" rIns="0" bIns="0" rtlCol="0" anchor="t"/>
           <a:lstStyle/>
           <a:p>
-            <a:pPr indent="0" marL="0">
+            <a:pPr marL="0" indent="0">
               <a:buNone/>
             </a:pPr>
             <a:r>
-              <a:rPr lang="en-US" sz="1100" b="1" spc="100" kern="0" dirty="0">
+              <a:rPr lang="en-US" sz="1100" b="1" kern="0" spc="100" dirty="0">
                 <a:solidFill>
                   <a:srgbClr val="A33A2B"/>
                 </a:solidFill>
@@ -10465,7 +10393,7 @@
           <a:bodyPr wrap="square" lIns="0" tIns="0" rIns="0" bIns="0" rtlCol="0" anchor="t"/>
           <a:lstStyle/>
           <a:p>
-            <a:pPr indent="0" marL="0">
+            <a:pPr marL="0" indent="0">
               <a:buNone/>
             </a:pPr>
             <a:r>
@@ -10501,7 +10429,7 @@
           <a:bodyPr wrap="square" lIns="0" tIns="0" rIns="0" bIns="0" rtlCol="0" anchor="t"/>
           <a:lstStyle/>
           <a:p>
-            <a:pPr indent="0" marL="0">
+            <a:pPr marL="0" indent="0">
               <a:buNone/>
             </a:pPr>
             <a:r>
@@ -10564,11 +10492,11 @@
           <a:bodyPr wrap="square" lIns="0" tIns="0" rIns="0" bIns="0" rtlCol="0" anchor="t"/>
           <a:lstStyle/>
           <a:p>
-            <a:pPr indent="0" marL="0">
+            <a:pPr marL="0" indent="0">
               <a:buNone/>
             </a:pPr>
             <a:r>
-              <a:rPr lang="en-US" sz="1100" b="1" spc="100" kern="0" dirty="0">
+              <a:rPr lang="en-US" sz="1100" b="1" kern="0" spc="100" dirty="0">
                 <a:solidFill>
                   <a:srgbClr val="D9A441"/>
                 </a:solidFill>
@@ -10600,7 +10528,7 @@
           <a:bodyPr wrap="square" lIns="0" tIns="0" rIns="0" bIns="0" rtlCol="0" anchor="t"/>
           <a:lstStyle/>
           <a:p>
-            <a:pPr indent="0" marL="0">
+            <a:pPr marL="0" indent="0">
               <a:buNone/>
             </a:pPr>
             <a:r>
@@ -10636,7 +10564,7 @@
           <a:bodyPr wrap="square" lIns="0" tIns="0" rIns="0" bIns="0" rtlCol="0" anchor="t"/>
           <a:lstStyle/>
           <a:p>
-            <a:pPr indent="0" marL="0">
+            <a:pPr marL="0" indent="0">
               <a:buNone/>
             </a:pPr>
             <a:r>
@@ -10678,14 +10606,14 @@
       </p:sp>
       <p:pic>
         <p:nvPicPr>
-          <p:cNvPr id="13" name="Image 0" descr="preencoded.png">    </p:cNvPr>
+          <p:cNvPr id="13" name="Image 0" descr="preencoded.png"/>
           <p:cNvPicPr>
             <a:picLocks noChangeAspect="1"/>
           </p:cNvPicPr>
           <p:nvPr/>
         </p:nvPicPr>
         <p:blipFill>
-          <a:blip r:embed="rId1"/>
+          <a:blip r:embed="rId3"/>
           <a:stretch>
             <a:fillRect/>
           </a:stretch>
@@ -10721,7 +10649,7 @@
           <a:bodyPr wrap="square" lIns="0" tIns="0" rIns="0" bIns="0" rtlCol="0" anchor="t"/>
           <a:lstStyle/>
           <a:p>
-            <a:pPr indent="0" marL="0">
+            <a:pPr marL="0" indent="0">
               <a:buNone/>
             </a:pPr>
             <a:r>
@@ -10757,7 +10685,7 @@
           <a:bodyPr wrap="square" lIns="0" tIns="0" rIns="0" bIns="0" rtlCol="0" anchor="t"/>
           <a:lstStyle/>
           <a:p>
-            <a:pPr indent="0" marL="0">
+            <a:pPr marL="0" indent="0">
               <a:buNone/>
             </a:pPr>
             <a:r>
@@ -10799,14 +10727,14 @@
       </p:sp>
       <p:pic>
         <p:nvPicPr>
-          <p:cNvPr id="17" name="Image 1" descr="preencoded.png">    </p:cNvPr>
+          <p:cNvPr id="17" name="Image 1" descr="preencoded.png"/>
           <p:cNvPicPr>
             <a:picLocks noChangeAspect="1"/>
           </p:cNvPicPr>
           <p:nvPr/>
         </p:nvPicPr>
         <p:blipFill>
-          <a:blip r:embed="rId2"/>
+          <a:blip r:embed="rId4"/>
           <a:stretch>
             <a:fillRect/>
           </a:stretch>
@@ -10842,7 +10770,7 @@
           <a:bodyPr wrap="square" lIns="0" tIns="0" rIns="0" bIns="0" rtlCol="0" anchor="t"/>
           <a:lstStyle/>
           <a:p>
-            <a:pPr indent="0" marL="0">
+            <a:pPr marL="0" indent="0">
               <a:buNone/>
             </a:pPr>
             <a:r>
@@ -10878,7 +10806,7 @@
           <a:bodyPr wrap="square" lIns="0" tIns="0" rIns="0" bIns="0" rtlCol="0" anchor="t"/>
           <a:lstStyle/>
           <a:p>
-            <a:pPr indent="0" marL="0">
+            <a:pPr marL="0" indent="0">
               <a:buNone/>
             </a:pPr>
             <a:r>
@@ -10920,14 +10848,14 @@
       </p:sp>
       <p:pic>
         <p:nvPicPr>
-          <p:cNvPr id="21" name="Image 2" descr="preencoded.png">    </p:cNvPr>
+          <p:cNvPr id="21" name="Image 2" descr="preencoded.png"/>
           <p:cNvPicPr>
             <a:picLocks noChangeAspect="1"/>
           </p:cNvPicPr>
           <p:nvPr/>
         </p:nvPicPr>
         <p:blipFill>
-          <a:blip r:embed="rId3"/>
+          <a:blip r:embed="rId5"/>
           <a:stretch>
             <a:fillRect/>
           </a:stretch>
@@ -10963,7 +10891,7 @@
           <a:bodyPr wrap="square" lIns="0" tIns="0" rIns="0" bIns="0" rtlCol="0" anchor="t"/>
           <a:lstStyle/>
           <a:p>
-            <a:pPr indent="0" marL="0">
+            <a:pPr marL="0" indent="0">
               <a:buNone/>
             </a:pPr>
             <a:r>
@@ -10999,7 +10927,7 @@
           <a:bodyPr wrap="square" lIns="0" tIns="0" rIns="0" bIns="0" rtlCol="0" anchor="t"/>
           <a:lstStyle/>
           <a:p>
-            <a:pPr indent="0" marL="0">
+            <a:pPr marL="0" indent="0">
               <a:buNone/>
             </a:pPr>
             <a:r>
@@ -11041,14 +10969,14 @@
       </p:sp>
       <p:pic>
         <p:nvPicPr>
-          <p:cNvPr id="25" name="Image 3" descr="preencoded.png">    </p:cNvPr>
+          <p:cNvPr id="25" name="Image 3" descr="preencoded.png"/>
           <p:cNvPicPr>
             <a:picLocks noChangeAspect="1"/>
           </p:cNvPicPr>
           <p:nvPr/>
         </p:nvPicPr>
         <p:blipFill>
-          <a:blip r:embed="rId4"/>
+          <a:blip r:embed="rId6"/>
           <a:stretch>
             <a:fillRect/>
           </a:stretch>
@@ -11084,7 +11012,7 @@
           <a:bodyPr wrap="square" lIns="0" tIns="0" rIns="0" bIns="0" rtlCol="0" anchor="t"/>
           <a:lstStyle/>
           <a:p>
-            <a:pPr indent="0" marL="0">
+            <a:pPr marL="0" indent="0">
               <a:buNone/>
             </a:pPr>
             <a:r>
@@ -11120,7 +11048,7 @@
           <a:bodyPr wrap="square" lIns="0" tIns="0" rIns="0" bIns="0" rtlCol="0" anchor="t"/>
           <a:lstStyle/>
           <a:p>
-            <a:pPr indent="0" marL="0">
+            <a:pPr marL="0" indent="0">
               <a:buNone/>
             </a:pPr>
             <a:r>
@@ -11162,14 +11090,14 @@
       </p:sp>
       <p:pic>
         <p:nvPicPr>
-          <p:cNvPr id="29" name="Image 4" descr="preencoded.png">    </p:cNvPr>
+          <p:cNvPr id="29" name="Image 4" descr="preencoded.png"/>
           <p:cNvPicPr>
             <a:picLocks noChangeAspect="1"/>
           </p:cNvPicPr>
           <p:nvPr/>
         </p:nvPicPr>
         <p:blipFill>
-          <a:blip r:embed="rId5"/>
+          <a:blip r:embed="rId7"/>
           <a:stretch>
             <a:fillRect/>
           </a:stretch>
@@ -11205,7 +11133,7 @@
           <a:bodyPr wrap="square" lIns="0" tIns="0" rIns="0" bIns="0" rtlCol="0" anchor="t"/>
           <a:lstStyle/>
           <a:p>
-            <a:pPr indent="0" marL="0">
+            <a:pPr marL="0" indent="0">
               <a:buNone/>
             </a:pPr>
             <a:r>
@@ -11241,7 +11169,7 @@
           <a:bodyPr wrap="square" lIns="0" tIns="0" rIns="0" bIns="0" rtlCol="0" anchor="t"/>
           <a:lstStyle/>
           <a:p>
-            <a:pPr indent="0" marL="0">
+            <a:pPr marL="0" indent="0">
               <a:buNone/>
             </a:pPr>
             <a:r>
@@ -11283,14 +11211,14 @@
       </p:sp>
       <p:pic>
         <p:nvPicPr>
-          <p:cNvPr id="33" name="Image 5" descr="preencoded.png">    </p:cNvPr>
+          <p:cNvPr id="33" name="Image 5" descr="preencoded.png"/>
           <p:cNvPicPr>
             <a:picLocks noChangeAspect="1"/>
           </p:cNvPicPr>
           <p:nvPr/>
         </p:nvPicPr>
         <p:blipFill>
-          <a:blip r:embed="rId6"/>
+          <a:blip r:embed="rId8"/>
           <a:stretch>
             <a:fillRect/>
           </a:stretch>
@@ -11326,7 +11254,7 @@
           <a:bodyPr wrap="square" lIns="0" tIns="0" rIns="0" bIns="0" rtlCol="0" anchor="t"/>
           <a:lstStyle/>
           <a:p>
-            <a:pPr indent="0" marL="0">
+            <a:pPr marL="0" indent="0">
               <a:buNone/>
             </a:pPr>
             <a:r>
@@ -11362,7 +11290,7 @@
           <a:bodyPr wrap="square" lIns="0" tIns="0" rIns="0" bIns="0" rtlCol="0" anchor="t"/>
           <a:lstStyle/>
           <a:p>
-            <a:pPr indent="0" marL="0">
+            <a:pPr marL="0" indent="0">
               <a:buNone/>
             </a:pPr>
             <a:r>
@@ -11379,7 +11307,7 @@
       </p:sp>
       <p:sp>
         <p:nvSpPr>
-          <p:cNvPr id="25" name="Slide Number Placeholder 0"/>
+          <p:cNvPr id="36" name="Slide Number Placeholder 0"/>
           <p:cNvSpPr>
             <a:spLocks noGrp="1"/>
           </p:cNvSpPr>
@@ -11397,7 +11325,7 @@
           </a:prstGeom>
           <a:extLst>
             <a:ext uri="{C572A759-6A51-4108-AA02-DFA0A04FC94B}">
-              <ma14:wrappingTextBoxFlag xmlns:ma14="http://schemas.microsoft.com/office/mac/drawingml/2011/main" val="0"/>
+              <ma14:wrappingTextBoxFlag xmlns:ma14="http://schemas.microsoft.com/office/mac/drawingml/2011/main" xmlns="" val="0"/>
             </a:ext>
           </a:extLst>
         </p:spPr>
@@ -11415,7 +11343,7 @@
           <a:p>
             <a:pPr algn="r"/>
             <a:fld id="{F7021451-1387-4CA6-816F-3879F97B5CBC}" type="slidenum">
-              <a:rPr b="0" lang="en-US"/>
+              <a:rPr lang="en-US" b="0"/>
               <a:t>14</a:t>
             </a:fld>
             <a:endParaRPr lang="en-US"/>
@@ -11450,9 +11378,11 @@
       <p:sp>
         <p:nvSpPr>
           <p:cNvPr id="2" name="Text 0"/>
-          <p:cNvSpPr/>
+          <p:cNvSpPr>
+            <a:spLocks noGrp="1"/>
+          </p:cNvSpPr>
           <p:nvPr>
-            <p:ph idx="100" type="body" hasCustomPrompt="1"/>
+            <p:ph type="body" idx="100" hasCustomPrompt="1"/>
           </p:nvPr>
         </p:nvSpPr>
         <p:spPr>
@@ -11470,11 +11400,11 @@
           <a:bodyPr wrap="square" lIns="0" tIns="0" rIns="0" bIns="0" rtlCol="0" anchor="ctr"/>
           <a:lstStyle/>
           <a:p>
-            <a:pPr indent="0" marL="0">
+            <a:pPr marL="0" indent="0">
               <a:buNone/>
             </a:pPr>
             <a:r>
-              <a:rPr lang="en-US" sz="1200" b="1" spc="200" kern="0" dirty="0">
+              <a:rPr lang="en-US" sz="1200" b="1" kern="0" spc="200" dirty="0">
                 <a:solidFill>
                   <a:srgbClr val="8A5A0B"/>
                 </a:solidFill>
@@ -11488,9 +11418,11 @@
       <p:sp>
         <p:nvSpPr>
           <p:cNvPr id="3" name="Text 0"/>
-          <p:cNvSpPr/>
+          <p:cNvSpPr>
+            <a:spLocks noGrp="1"/>
+          </p:cNvSpPr>
           <p:nvPr>
-            <p:ph idx="101" type="title" hasCustomPrompt="1"/>
+            <p:ph type="title" idx="101" hasCustomPrompt="1"/>
           </p:nvPr>
         </p:nvSpPr>
         <p:spPr>
@@ -11508,7 +11440,7 @@
           <a:bodyPr wrap="square" lIns="0" tIns="0" rIns="0" bIns="0" rtlCol="0" anchor="t"/>
           <a:lstStyle/>
           <a:p>
-            <a:pPr algn="l" indent="0" marL="0">
+            <a:pPr marL="0" indent="0" algn="l">
               <a:buNone/>
             </a:pPr>
             <a:r>
@@ -11571,7 +11503,7 @@
           <a:bodyPr wrap="square" lIns="0" tIns="0" rIns="0" bIns="0" rtlCol="0" anchor="ctr"/>
           <a:lstStyle/>
           <a:p>
-            <a:pPr algn="ctr" indent="0" marL="0">
+            <a:pPr marL="0" indent="0" algn="ctr">
               <a:buNone/>
             </a:pPr>
             <a:r>
@@ -11607,7 +11539,7 @@
           <a:bodyPr wrap="square" lIns="0" tIns="0" rIns="0" bIns="0" rtlCol="0" anchor="ctr"/>
           <a:lstStyle/>
           <a:p>
-            <a:pPr indent="0" marL="0">
+            <a:pPr marL="0" indent="0">
               <a:buNone/>
             </a:pPr>
             <a:r>
@@ -11643,7 +11575,7 @@
           <a:bodyPr wrap="square" lIns="0" tIns="0" rIns="0" bIns="0" rtlCol="0" anchor="ctr"/>
           <a:lstStyle/>
           <a:p>
-            <a:pPr indent="0" marL="0">
+            <a:pPr marL="0" indent="0">
               <a:buNone/>
             </a:pPr>
             <a:r>
@@ -11706,7 +11638,7 @@
           <a:bodyPr wrap="square" lIns="0" tIns="0" rIns="0" bIns="0" rtlCol="0" anchor="ctr"/>
           <a:lstStyle/>
           <a:p>
-            <a:pPr algn="ctr" indent="0" marL="0">
+            <a:pPr marL="0" indent="0" algn="ctr">
               <a:buNone/>
             </a:pPr>
             <a:r>
@@ -11769,7 +11701,7 @@
           <a:bodyPr wrap="square" lIns="0" tIns="0" rIns="0" bIns="0" rtlCol="0" anchor="ctr"/>
           <a:lstStyle/>
           <a:p>
-            <a:pPr algn="ctr" indent="0" marL="0">
+            <a:pPr marL="0" indent="0" algn="ctr">
               <a:buNone/>
             </a:pPr>
             <a:r>
@@ -11805,7 +11737,7 @@
           <a:bodyPr wrap="square" lIns="0" tIns="0" rIns="0" bIns="0" rtlCol="0" anchor="ctr"/>
           <a:lstStyle/>
           <a:p>
-            <a:pPr indent="0" marL="0">
+            <a:pPr marL="0" indent="0">
               <a:buNone/>
             </a:pPr>
             <a:r>
@@ -11841,7 +11773,7 @@
           <a:bodyPr wrap="square" lIns="0" tIns="0" rIns="0" bIns="0" rtlCol="0" anchor="ctr"/>
           <a:lstStyle/>
           <a:p>
-            <a:pPr indent="0" marL="0">
+            <a:pPr marL="0" indent="0">
               <a:buNone/>
             </a:pPr>
             <a:r>
@@ -11904,7 +11836,7 @@
           <a:bodyPr wrap="square" lIns="0" tIns="0" rIns="0" bIns="0" rtlCol="0" anchor="ctr"/>
           <a:lstStyle/>
           <a:p>
-            <a:pPr algn="ctr" indent="0" marL="0">
+            <a:pPr marL="0" indent="0" algn="ctr">
               <a:buNone/>
             </a:pPr>
             <a:r>
@@ -11967,7 +11899,7 @@
           <a:bodyPr wrap="square" lIns="0" tIns="0" rIns="0" bIns="0" rtlCol="0" anchor="ctr"/>
           <a:lstStyle/>
           <a:p>
-            <a:pPr algn="ctr" indent="0" marL="0">
+            <a:pPr marL="0" indent="0" algn="ctr">
               <a:buNone/>
             </a:pPr>
             <a:r>
@@ -12003,7 +11935,7 @@
           <a:bodyPr wrap="square" lIns="0" tIns="0" rIns="0" bIns="0" rtlCol="0" anchor="ctr"/>
           <a:lstStyle/>
           <a:p>
-            <a:pPr indent="0" marL="0">
+            <a:pPr marL="0" indent="0">
               <a:buNone/>
             </a:pPr>
             <a:r>
@@ -12039,7 +11971,7 @@
           <a:bodyPr wrap="square" lIns="0" tIns="0" rIns="0" bIns="0" rtlCol="0" anchor="ctr"/>
           <a:lstStyle/>
           <a:p>
-            <a:pPr indent="0" marL="0">
+            <a:pPr marL="0" indent="0">
               <a:buNone/>
             </a:pPr>
             <a:r>
@@ -12102,7 +12034,7 @@
           <a:bodyPr wrap="square" lIns="0" tIns="0" rIns="0" bIns="0" rtlCol="0" anchor="ctr"/>
           <a:lstStyle/>
           <a:p>
-            <a:pPr algn="ctr" indent="0" marL="0">
+            <a:pPr marL="0" indent="0" algn="ctr">
               <a:buNone/>
             </a:pPr>
             <a:r>
@@ -12165,7 +12097,7 @@
           <a:bodyPr wrap="square" lIns="0" tIns="0" rIns="0" bIns="0" rtlCol="0" anchor="ctr"/>
           <a:lstStyle/>
           <a:p>
-            <a:pPr algn="ctr" indent="0" marL="0">
+            <a:pPr marL="0" indent="0" algn="ctr">
               <a:buNone/>
             </a:pPr>
             <a:r>
@@ -12201,7 +12133,7 @@
           <a:bodyPr wrap="square" lIns="0" tIns="0" rIns="0" bIns="0" rtlCol="0" anchor="ctr"/>
           <a:lstStyle/>
           <a:p>
-            <a:pPr indent="0" marL="0">
+            <a:pPr marL="0" indent="0">
               <a:buNone/>
             </a:pPr>
             <a:r>
@@ -12237,7 +12169,7 @@
           <a:bodyPr wrap="square" lIns="0" tIns="0" rIns="0" bIns="0" rtlCol="0" anchor="ctr"/>
           <a:lstStyle/>
           <a:p>
-            <a:pPr indent="0" marL="0">
+            <a:pPr marL="0" indent="0">
               <a:buNone/>
             </a:pPr>
             <a:r>
@@ -12300,7 +12232,7 @@
           <a:bodyPr wrap="square" lIns="0" tIns="0" rIns="0" bIns="0" rtlCol="0" anchor="ctr"/>
           <a:lstStyle/>
           <a:p>
-            <a:pPr algn="ctr" indent="0" marL="0">
+            <a:pPr marL="0" indent="0" algn="ctr">
               <a:buNone/>
             </a:pPr>
             <a:r>
@@ -12363,7 +12295,7 @@
           <a:bodyPr wrap="square" lIns="0" tIns="0" rIns="0" bIns="0" rtlCol="0" anchor="ctr"/>
           <a:lstStyle/>
           <a:p>
-            <a:pPr algn="ctr" indent="0" marL="0">
+            <a:pPr marL="0" indent="0" algn="ctr">
               <a:buNone/>
             </a:pPr>
             <a:r>
@@ -12399,7 +12331,7 @@
           <a:bodyPr wrap="square" lIns="0" tIns="0" rIns="0" bIns="0" rtlCol="0" anchor="ctr"/>
           <a:lstStyle/>
           <a:p>
-            <a:pPr indent="0" marL="0">
+            <a:pPr marL="0" indent="0">
               <a:buNone/>
             </a:pPr>
             <a:r>
@@ -12435,7 +12367,7 @@
           <a:bodyPr wrap="square" lIns="0" tIns="0" rIns="0" bIns="0" rtlCol="0" anchor="ctr"/>
           <a:lstStyle/>
           <a:p>
-            <a:pPr indent="0" marL="0">
+            <a:pPr marL="0" indent="0">
               <a:buNone/>
             </a:pPr>
             <a:r>
@@ -12498,7 +12430,7 @@
           <a:bodyPr wrap="square" lIns="0" tIns="0" rIns="0" bIns="0" rtlCol="0" anchor="ctr"/>
           <a:lstStyle/>
           <a:p>
-            <a:pPr algn="ctr" indent="0" marL="0">
+            <a:pPr marL="0" indent="0" algn="ctr">
               <a:buNone/>
             </a:pPr>
             <a:r>
@@ -12561,7 +12493,7 @@
           <a:bodyPr wrap="square" lIns="0" tIns="0" rIns="0" bIns="0" rtlCol="0" anchor="ctr"/>
           <a:lstStyle/>
           <a:p>
-            <a:pPr algn="ctr" indent="0" marL="0">
+            <a:pPr marL="0" indent="0" algn="ctr">
               <a:buNone/>
             </a:pPr>
             <a:r>
@@ -12597,7 +12529,7 @@
           <a:bodyPr wrap="square" lIns="0" tIns="0" rIns="0" bIns="0" rtlCol="0" anchor="ctr"/>
           <a:lstStyle/>
           <a:p>
-            <a:pPr indent="0" marL="0">
+            <a:pPr marL="0" indent="0">
               <a:buNone/>
             </a:pPr>
             <a:r>
@@ -12633,7 +12565,7 @@
           <a:bodyPr wrap="square" lIns="0" tIns="0" rIns="0" bIns="0" rtlCol="0" anchor="ctr"/>
           <a:lstStyle/>
           <a:p>
-            <a:pPr indent="0" marL="0">
+            <a:pPr marL="0" indent="0">
               <a:buNone/>
             </a:pPr>
             <a:r>
@@ -12696,7 +12628,7 @@
           <a:bodyPr wrap="square" lIns="0" tIns="0" rIns="0" bIns="0" rtlCol="0" anchor="ctr"/>
           <a:lstStyle/>
           <a:p>
-            <a:pPr algn="ctr" indent="0" marL="0">
+            <a:pPr marL="0" indent="0" algn="ctr">
               <a:buNone/>
             </a:pPr>
             <a:r>
@@ -12759,7 +12691,7 @@
           <a:bodyPr wrap="square" lIns="0" tIns="0" rIns="0" bIns="0" rtlCol="0" anchor="ctr"/>
           <a:lstStyle/>
           <a:p>
-            <a:pPr algn="ctr" indent="0" marL="0">
+            <a:pPr marL="0" indent="0" algn="ctr">
               <a:buNone/>
             </a:pPr>
             <a:r>
@@ -12795,7 +12727,7 @@
           <a:bodyPr wrap="square" lIns="0" tIns="0" rIns="0" bIns="0" rtlCol="0" anchor="ctr"/>
           <a:lstStyle/>
           <a:p>
-            <a:pPr indent="0" marL="0">
+            <a:pPr marL="0" indent="0">
               <a:buNone/>
             </a:pPr>
             <a:r>
@@ -12831,7 +12763,7 @@
           <a:bodyPr wrap="square" lIns="0" tIns="0" rIns="0" bIns="0" rtlCol="0" anchor="ctr"/>
           <a:lstStyle/>
           <a:p>
-            <a:pPr indent="0" marL="0">
+            <a:pPr marL="0" indent="0">
               <a:buNone/>
             </a:pPr>
             <a:r>
@@ -12894,7 +12826,7 @@
           <a:bodyPr wrap="square" lIns="0" tIns="0" rIns="0" bIns="0" rtlCol="0" anchor="ctr"/>
           <a:lstStyle/>
           <a:p>
-            <a:pPr algn="ctr" indent="0" marL="0">
+            <a:pPr marL="0" indent="0" algn="ctr">
               <a:buNone/>
             </a:pPr>
             <a:r>
@@ -12930,7 +12862,7 @@
           <a:bodyPr wrap="square" lIns="0" tIns="0" rIns="0" bIns="0" rtlCol="0" anchor="t"/>
           <a:lstStyle/>
           <a:p>
-            <a:pPr indent="0" marL="0">
+            <a:pPr marL="0" indent="0">
               <a:buNone/>
             </a:pPr>
             <a:r>
@@ -12947,7 +12879,7 @@
       </p:sp>
       <p:sp>
         <p:nvSpPr>
-          <p:cNvPr id="25" name="Slide Number Placeholder 0"/>
+          <p:cNvPr id="47" name="Slide Number Placeholder 0"/>
           <p:cNvSpPr>
             <a:spLocks noGrp="1"/>
           </p:cNvSpPr>
@@ -12965,7 +12897,7 @@
           </a:prstGeom>
           <a:extLst>
             <a:ext uri="{C572A759-6A51-4108-AA02-DFA0A04FC94B}">
-              <ma14:wrappingTextBoxFlag xmlns:ma14="http://schemas.microsoft.com/office/mac/drawingml/2011/main" val="0"/>
+              <ma14:wrappingTextBoxFlag xmlns:ma14="http://schemas.microsoft.com/office/mac/drawingml/2011/main" xmlns="" val="0"/>
             </a:ext>
           </a:extLst>
         </p:spPr>
@@ -12983,7 +12915,7 @@
           <a:p>
             <a:pPr algn="r"/>
             <a:fld id="{F7021451-1387-4CA6-816F-3879F97B5CBC}" type="slidenum">
-              <a:rPr b="0" lang="en-US"/>
+              <a:rPr lang="en-US" b="0"/>
               <a:t>15</a:t>
             </a:fld>
             <a:endParaRPr lang="en-US"/>
@@ -13018,9 +12950,11 @@
       <p:sp>
         <p:nvSpPr>
           <p:cNvPr id="2" name="Text 0"/>
-          <p:cNvSpPr/>
+          <p:cNvSpPr>
+            <a:spLocks noGrp="1"/>
+          </p:cNvSpPr>
           <p:nvPr>
-            <p:ph idx="100" type="body" hasCustomPrompt="1"/>
+            <p:ph type="body" idx="100" hasCustomPrompt="1"/>
           </p:nvPr>
         </p:nvSpPr>
         <p:spPr>
@@ -13038,11 +12972,11 @@
           <a:bodyPr wrap="square" lIns="0" tIns="0" rIns="0" bIns="0" rtlCol="0" anchor="ctr"/>
           <a:lstStyle/>
           <a:p>
-            <a:pPr indent="0" marL="0">
+            <a:pPr marL="0" indent="0">
               <a:buNone/>
             </a:pPr>
             <a:r>
-              <a:rPr lang="en-US" sz="1200" b="1" spc="200" kern="0" dirty="0">
+              <a:rPr lang="en-US" sz="1200" b="1" kern="0" spc="200" dirty="0">
                 <a:solidFill>
                   <a:srgbClr val="8A5A0B"/>
                 </a:solidFill>
@@ -13056,9 +12990,11 @@
       <p:sp>
         <p:nvSpPr>
           <p:cNvPr id="3" name="Text 0"/>
-          <p:cNvSpPr/>
+          <p:cNvSpPr>
+            <a:spLocks noGrp="1"/>
+          </p:cNvSpPr>
           <p:nvPr>
-            <p:ph idx="101" type="title" hasCustomPrompt="1"/>
+            <p:ph type="title" idx="101" hasCustomPrompt="1"/>
           </p:nvPr>
         </p:nvSpPr>
         <p:spPr>
@@ -13076,7 +13012,7 @@
           <a:bodyPr wrap="square" lIns="0" tIns="0" rIns="0" bIns="0" rtlCol="0" anchor="t"/>
           <a:lstStyle/>
           <a:p>
-            <a:pPr algn="l" indent="0" marL="0">
+            <a:pPr marL="0" indent="0" algn="l">
               <a:buNone/>
             </a:pPr>
             <a:r>
@@ -13145,14 +13081,14 @@
       </p:sp>
       <p:pic>
         <p:nvPicPr>
-          <p:cNvPr id="6" name="Image 0" descr="preencoded.png">    </p:cNvPr>
+          <p:cNvPr id="6" name="Image 0" descr="preencoded.png"/>
           <p:cNvPicPr>
             <a:picLocks noChangeAspect="1"/>
           </p:cNvPicPr>
           <p:nvPr/>
         </p:nvPicPr>
         <p:blipFill>
-          <a:blip r:embed="rId1"/>
+          <a:blip r:embed="rId3"/>
           <a:stretch>
             <a:fillRect/>
           </a:stretch>
@@ -13188,7 +13124,7 @@
           <a:bodyPr wrap="square" lIns="0" tIns="0" rIns="0" bIns="0" rtlCol="0" anchor="t"/>
           <a:lstStyle/>
           <a:p>
-            <a:pPr indent="0" marL="0">
+            <a:pPr marL="0" indent="0">
               <a:buNone/>
             </a:pPr>
             <a:r>
@@ -13333,14 +13269,14 @@
       </p:sp>
       <p:pic>
         <p:nvPicPr>
-          <p:cNvPr id="11" name="Image 1" descr="preencoded.png">    </p:cNvPr>
+          <p:cNvPr id="11" name="Image 1" descr="preencoded.png"/>
           <p:cNvPicPr>
             <a:picLocks noChangeAspect="1"/>
           </p:cNvPicPr>
           <p:nvPr/>
         </p:nvPicPr>
         <p:blipFill>
-          <a:blip r:embed="rId2"/>
+          <a:blip r:embed="rId4"/>
           <a:stretch>
             <a:fillRect/>
           </a:stretch>
@@ -13376,7 +13312,7 @@
           <a:bodyPr wrap="square" lIns="0" tIns="0" rIns="0" bIns="0" rtlCol="0" anchor="t"/>
           <a:lstStyle/>
           <a:p>
-            <a:pPr indent="0" marL="0">
+            <a:pPr marL="0" indent="0">
               <a:buNone/>
             </a:pPr>
             <a:r>
@@ -13521,14 +13457,14 @@
       </p:sp>
       <p:pic>
         <p:nvPicPr>
-          <p:cNvPr id="16" name="Image 2" descr="preencoded.png">    </p:cNvPr>
+          <p:cNvPr id="16" name="Image 2" descr="preencoded.png"/>
           <p:cNvPicPr>
             <a:picLocks noChangeAspect="1"/>
           </p:cNvPicPr>
           <p:nvPr/>
         </p:nvPicPr>
         <p:blipFill>
-          <a:blip r:embed="rId3"/>
+          <a:blip r:embed="rId5"/>
           <a:stretch>
             <a:fillRect/>
           </a:stretch>
@@ -13564,7 +13500,7 @@
           <a:bodyPr wrap="square" lIns="0" tIns="0" rIns="0" bIns="0" rtlCol="0" anchor="t"/>
           <a:lstStyle/>
           <a:p>
-            <a:pPr indent="0" marL="0">
+            <a:pPr marL="0" indent="0">
               <a:buNone/>
             </a:pPr>
             <a:r>
@@ -13676,7 +13612,7 @@
           <a:bodyPr wrap="square" lIns="0" tIns="0" rIns="0" bIns="0" rtlCol="0" anchor="t"/>
           <a:lstStyle/>
           <a:p>
-            <a:pPr indent="0" marL="0">
+            <a:pPr marL="0" indent="0">
               <a:buNone/>
             </a:pPr>
             <a:r>
@@ -13711,7 +13647,7 @@
           </a:prstGeom>
           <a:extLst>
             <a:ext uri="{C572A759-6A51-4108-AA02-DFA0A04FC94B}">
-              <ma14:wrappingTextBoxFlag xmlns:ma14="http://schemas.microsoft.com/office/mac/drawingml/2011/main" val="0"/>
+              <ma14:wrappingTextBoxFlag xmlns:ma14="http://schemas.microsoft.com/office/mac/drawingml/2011/main" xmlns="" val="0"/>
             </a:ext>
           </a:extLst>
         </p:spPr>
@@ -13729,7 +13665,7 @@
           <a:p>
             <a:pPr algn="r"/>
             <a:fld id="{F7021451-1387-4CA6-816F-3879F97B5CBC}" type="slidenum">
-              <a:rPr b="0" lang="en-US"/>
+              <a:rPr lang="en-US" b="0"/>
               <a:t>16</a:t>
             </a:fld>
             <a:endParaRPr lang="en-US"/>
@@ -13764,9 +13700,11 @@
       <p:sp>
         <p:nvSpPr>
           <p:cNvPr id="2" name="Text 0"/>
-          <p:cNvSpPr/>
+          <p:cNvSpPr>
+            <a:spLocks noGrp="1"/>
+          </p:cNvSpPr>
           <p:nvPr>
-            <p:ph idx="100" type="body" hasCustomPrompt="1"/>
+            <p:ph type="body" idx="100" hasCustomPrompt="1"/>
           </p:nvPr>
         </p:nvSpPr>
         <p:spPr>
@@ -13784,11 +13722,11 @@
           <a:bodyPr wrap="square" lIns="0" tIns="0" rIns="0" bIns="0" rtlCol="0" anchor="ctr"/>
           <a:lstStyle/>
           <a:p>
-            <a:pPr indent="0" marL="0">
+            <a:pPr marL="0" indent="0">
               <a:buNone/>
             </a:pPr>
             <a:r>
-              <a:rPr lang="en-US" sz="1200" b="1" spc="200" kern="0" dirty="0">
+              <a:rPr lang="en-US" sz="1200" b="1" kern="0" spc="200" dirty="0">
                 <a:solidFill>
                   <a:srgbClr val="8A5A0B"/>
                 </a:solidFill>
@@ -13802,9 +13740,11 @@
       <p:sp>
         <p:nvSpPr>
           <p:cNvPr id="3" name="Text 0"/>
-          <p:cNvSpPr/>
+          <p:cNvSpPr>
+            <a:spLocks noGrp="1"/>
+          </p:cNvSpPr>
           <p:nvPr>
-            <p:ph idx="101" type="title" hasCustomPrompt="1"/>
+            <p:ph type="title" idx="101" hasCustomPrompt="1"/>
           </p:nvPr>
         </p:nvSpPr>
         <p:spPr>
@@ -13822,7 +13762,7 @@
           <a:bodyPr wrap="square" lIns="0" tIns="0" rIns="0" bIns="0" rtlCol="0" anchor="t"/>
           <a:lstStyle/>
           <a:p>
-            <a:pPr algn="l" indent="0" marL="0">
+            <a:pPr marL="0" indent="0" algn="l">
               <a:buNone/>
             </a:pPr>
             <a:r>
@@ -13891,14 +13831,14 @@
       </p:sp>
       <p:pic>
         <p:nvPicPr>
-          <p:cNvPr id="6" name="Image 0" descr="preencoded.png">    </p:cNvPr>
+          <p:cNvPr id="6" name="Image 0" descr="preencoded.png"/>
           <p:cNvPicPr>
             <a:picLocks noChangeAspect="1"/>
           </p:cNvPicPr>
           <p:nvPr/>
         </p:nvPicPr>
         <p:blipFill>
-          <a:blip r:embed="rId1"/>
+          <a:blip r:embed="rId3"/>
           <a:stretch>
             <a:fillRect/>
           </a:stretch>
@@ -13934,7 +13874,7 @@
           <a:bodyPr wrap="square" lIns="0" tIns="0" rIns="0" bIns="0" rtlCol="0" anchor="ctr"/>
           <a:lstStyle/>
           <a:p>
-            <a:pPr indent="0" marL="0">
+            <a:pPr marL="0" indent="0">
               <a:buNone/>
             </a:pPr>
             <a:r>
@@ -14079,14 +14019,14 @@
       </p:sp>
       <p:pic>
         <p:nvPicPr>
-          <p:cNvPr id="11" name="Image 1" descr="preencoded.png">    </p:cNvPr>
+          <p:cNvPr id="11" name="Image 1" descr="preencoded.png"/>
           <p:cNvPicPr>
             <a:picLocks noChangeAspect="1"/>
           </p:cNvPicPr>
           <p:nvPr/>
         </p:nvPicPr>
         <p:blipFill>
-          <a:blip r:embed="rId2"/>
+          <a:blip r:embed="rId4"/>
           <a:stretch>
             <a:fillRect/>
           </a:stretch>
@@ -14122,7 +14062,7 @@
           <a:bodyPr wrap="square" lIns="0" tIns="0" rIns="0" bIns="0" rtlCol="0" anchor="ctr"/>
           <a:lstStyle/>
           <a:p>
-            <a:pPr indent="0" marL="0">
+            <a:pPr marL="0" indent="0">
               <a:buNone/>
             </a:pPr>
             <a:r>
@@ -14279,7 +14219,7 @@
           <a:bodyPr wrap="square" lIns="0" tIns="0" rIns="0" bIns="0" rtlCol="0" anchor="ctr"/>
           <a:lstStyle/>
           <a:p>
-            <a:pPr indent="0" marL="0">
+            <a:pPr marL="0" indent="0">
               <a:buNone/>
             </a:pPr>
             <a:r>
@@ -14314,7 +14254,7 @@
           </a:prstGeom>
           <a:extLst>
             <a:ext uri="{C572A759-6A51-4108-AA02-DFA0A04FC94B}">
-              <ma14:wrappingTextBoxFlag xmlns:ma14="http://schemas.microsoft.com/office/mac/drawingml/2011/main" val="0"/>
+              <ma14:wrappingTextBoxFlag xmlns:ma14="http://schemas.microsoft.com/office/mac/drawingml/2011/main" xmlns="" val="0"/>
             </a:ext>
           </a:extLst>
         </p:spPr>
@@ -14332,7 +14272,7 @@
           <a:p>
             <a:pPr algn="r"/>
             <a:fld id="{F7021451-1387-4CA6-816F-3879F97B5CBC}" type="slidenum">
-              <a:rPr b="0" lang="en-US"/>
+              <a:rPr lang="en-US" b="0"/>
               <a:t>17</a:t>
             </a:fld>
             <a:endParaRPr lang="en-US"/>
@@ -14367,9 +14307,11 @@
       <p:sp>
         <p:nvSpPr>
           <p:cNvPr id="2" name="Text 0"/>
-          <p:cNvSpPr/>
+          <p:cNvSpPr>
+            <a:spLocks noGrp="1"/>
+          </p:cNvSpPr>
           <p:nvPr>
-            <p:ph idx="100" type="body" hasCustomPrompt="1"/>
+            <p:ph type="body" idx="100" hasCustomPrompt="1"/>
           </p:nvPr>
         </p:nvSpPr>
         <p:spPr>
@@ -14387,11 +14329,11 @@
           <a:bodyPr wrap="square" lIns="0" tIns="0" rIns="0" bIns="0" rtlCol="0" anchor="ctr"/>
           <a:lstStyle/>
           <a:p>
-            <a:pPr indent="0" marL="0">
+            <a:pPr marL="0" indent="0">
               <a:buNone/>
             </a:pPr>
             <a:r>
-              <a:rPr lang="en-US" sz="1200" b="1" spc="200" kern="0" dirty="0">
+              <a:rPr lang="en-US" sz="1200" b="1" kern="0" spc="200" dirty="0">
                 <a:solidFill>
                   <a:srgbClr val="D9A441"/>
                 </a:solidFill>
@@ -14405,9 +14347,11 @@
       <p:sp>
         <p:nvSpPr>
           <p:cNvPr id="3" name="Text 0"/>
-          <p:cNvSpPr/>
+          <p:cNvSpPr>
+            <a:spLocks noGrp="1"/>
+          </p:cNvSpPr>
           <p:nvPr>
-            <p:ph idx="101" type="title" hasCustomPrompt="1"/>
+            <p:ph type="title" idx="101" hasCustomPrompt="1"/>
           </p:nvPr>
         </p:nvSpPr>
         <p:spPr>
@@ -14425,7 +14369,7 @@
           <a:bodyPr wrap="square" lIns="0" tIns="0" rIns="0" bIns="0" rtlCol="0" anchor="t"/>
           <a:lstStyle/>
           <a:p>
-            <a:pPr algn="l" indent="0" marL="0">
+            <a:pPr marL="0" indent="0" algn="l">
               <a:buNone/>
             </a:pPr>
             <a:r>
@@ -14436,18 +14380,56 @@
               </a:rPr>
               <a:t>AI </a:t>
             </a:r>
-            <a:pPr algn="l" indent="0" marL="0">
+            <a:r>
+              <a:rPr lang="en-US" sz="3200" b="1" dirty="0">
+                <a:solidFill>
+                  <a:srgbClr val="D9A441"/>
+                </a:solidFill>
+              </a:rPr>
+              <a:t>proposes. </a:t>
+            </a:r>
+            <a:r>
+              <a:rPr lang="en-US" sz="3200" b="1" dirty="0">
+                <a:solidFill>
+                  <a:srgbClr val="FFFFFF"/>
+                </a:solidFill>
+              </a:rPr>
+              <a:t>Code </a:t>
+            </a:r>
+            <a:r>
+              <a:rPr lang="en-US" sz="3200" b="1" dirty="0">
+                <a:solidFill>
+                  <a:srgbClr val="D9A441"/>
+                </a:solidFill>
+              </a:rPr>
+              <a:t>verifies.</a:t>
+            </a:r>
+            <a:endParaRPr lang="en-US" sz="4400" dirty="0"/>
+          </a:p>
+          <a:p>
+            <a:pPr marL="0" indent="0" algn="l">
               <a:buNone/>
             </a:pPr>
             <a:r>
               <a:rPr lang="en-US" sz="3200" b="1" dirty="0">
                 <a:solidFill>
+                  <a:srgbClr val="FFFFFF"/>
+                </a:solidFill>
+              </a:rPr>
+              <a:t>Humans </a:t>
+            </a:r>
+            <a:r>
+              <a:rPr lang="en-US" sz="3200" b="1" dirty="0">
+                <a:solidFill>
                   <a:srgbClr val="D9A441"/>
                 </a:solidFill>
               </a:rPr>
-              <a:t>proposes. </a:t>
-            </a:r>
-            <a:pPr algn="l" indent="0" marL="0">
+              <a:t>approve. </a:t>
+            </a:r>
+            <a:endParaRPr lang="en-US" sz="4400" dirty="0"/>
+          </a:p>
+          <a:p>
+            <a:pPr marL="0" indent="0" algn="l">
               <a:buNone/>
             </a:pPr>
             <a:r>
@@ -14456,61 +14438,8 @@
                   <a:srgbClr val="FFFFFF"/>
                 </a:solidFill>
               </a:rPr>
-              <a:t>Code </a:t>
-            </a:r>
-            <a:pPr algn="l" indent="0" marL="0">
-              <a:buNone/>
-            </a:pPr>
-            <a:r>
-              <a:rPr lang="en-US" sz="3200" b="1" dirty="0">
-                <a:solidFill>
-                  <a:srgbClr val="D9A441"/>
-                </a:solidFill>
-              </a:rPr>
-              <a:t>verifies.</a:t>
-            </a:r>
-            <a:endParaRPr lang="en-US" sz="4400" dirty="0"/>
-          </a:p>
-          <a:p>
-            <a:pPr algn="l" indent="0" marL="0">
-              <a:buNone/>
-            </a:pPr>
-            <a:r>
-              <a:rPr lang="en-US" sz="3200" b="1" dirty="0">
-                <a:solidFill>
-                  <a:srgbClr val="FFFFFF"/>
-                </a:solidFill>
-              </a:rPr>
-              <a:t>Humans </a:t>
-            </a:r>
-            <a:pPr algn="l" indent="0" marL="0">
-              <a:buNone/>
-            </a:pPr>
-            <a:r>
-              <a:rPr lang="en-US" sz="3200" b="1" dirty="0">
-                <a:solidFill>
-                  <a:srgbClr val="D9A441"/>
-                </a:solidFill>
-              </a:rPr>
-              <a:t>approve. </a:t>
-            </a:r>
-            <a:endParaRPr lang="en-US" sz="4400" dirty="0"/>
-          </a:p>
-          <a:p>
-            <a:pPr algn="l" indent="0" marL="0">
-              <a:buNone/>
-            </a:pPr>
-            <a:r>
-              <a:rPr lang="en-US" sz="3200" b="1" dirty="0">
-                <a:solidFill>
-                  <a:srgbClr val="FFFFFF"/>
-                </a:solidFill>
-              </a:rPr>
               <a:t>Everything is </a:t>
             </a:r>
-            <a:pPr algn="l" indent="0" marL="0">
-              <a:buNone/>
-            </a:pPr>
             <a:r>
               <a:rPr lang="en-US" sz="3200" b="1" dirty="0">
                 <a:solidFill>
@@ -14544,11 +14473,11 @@
           <a:bodyPr wrap="square" lIns="0" tIns="0" rIns="0" bIns="0" rtlCol="0" anchor="t"/>
           <a:lstStyle/>
           <a:p>
-            <a:pPr indent="0" marL="0">
+            <a:pPr marL="0" indent="0">
               <a:buNone/>
             </a:pPr>
             <a:r>
-              <a:rPr lang="en-US" sz="1100" b="1" spc="100" kern="0" dirty="0">
+              <a:rPr lang="en-US" sz="1100" b="1" kern="0" spc="100" dirty="0">
                 <a:solidFill>
                   <a:srgbClr val="D9A441"/>
                 </a:solidFill>
@@ -14580,7 +14509,7 @@
           <a:bodyPr wrap="square" lIns="0" tIns="0" rIns="0" bIns="0" rtlCol="0" anchor="t"/>
           <a:lstStyle/>
           <a:p>
-            <a:pPr indent="0" marL="0">
+            <a:pPr marL="0" indent="0">
               <a:buNone/>
             </a:pPr>
             <a:r>
@@ -14616,11 +14545,11 @@
           <a:bodyPr wrap="square" lIns="0" tIns="0" rIns="0" bIns="0" rtlCol="0" anchor="t"/>
           <a:lstStyle/>
           <a:p>
-            <a:pPr indent="0" marL="0">
+            <a:pPr marL="0" indent="0">
               <a:buNone/>
             </a:pPr>
             <a:r>
-              <a:rPr lang="en-US" sz="1100" b="1" spc="100" kern="0" dirty="0">
+              <a:rPr lang="en-US" sz="1100" b="1" kern="0" spc="100" dirty="0">
                 <a:solidFill>
                   <a:srgbClr val="D9A441"/>
                 </a:solidFill>
@@ -14652,7 +14581,7 @@
           <a:bodyPr wrap="square" lIns="0" tIns="0" rIns="0" bIns="0" rtlCol="0" anchor="t"/>
           <a:lstStyle/>
           <a:p>
-            <a:pPr indent="0" marL="0">
+            <a:pPr marL="0" indent="0">
               <a:buNone/>
             </a:pPr>
             <a:r>
@@ -14688,11 +14617,11 @@
           <a:bodyPr wrap="square" lIns="0" tIns="0" rIns="0" bIns="0" rtlCol="0" anchor="t"/>
           <a:lstStyle/>
           <a:p>
-            <a:pPr indent="0" marL="0">
+            <a:pPr marL="0" indent="0">
               <a:buNone/>
             </a:pPr>
             <a:r>
-              <a:rPr lang="en-US" sz="1100" b="1" spc="100" kern="0" dirty="0">
+              <a:rPr lang="en-US" sz="1100" b="1" kern="0" spc="100" dirty="0">
                 <a:solidFill>
                   <a:srgbClr val="D9A441"/>
                 </a:solidFill>
@@ -14724,7 +14653,7 @@
           <a:bodyPr wrap="square" lIns="0" tIns="0" rIns="0" bIns="0" rtlCol="0" anchor="t"/>
           <a:lstStyle/>
           <a:p>
-            <a:pPr indent="0" marL="0">
+            <a:pPr marL="0" indent="0">
               <a:buNone/>
             </a:pPr>
             <a:r>
@@ -14760,7 +14689,7 @@
           <a:bodyPr wrap="square" lIns="0" tIns="0" rIns="0" bIns="0" rtlCol="0" anchor="t"/>
           <a:lstStyle/>
           <a:p>
-            <a:pPr indent="0" marL="0">
+            <a:pPr marL="0" indent="0">
               <a:buNone/>
             </a:pPr>
             <a:r>
@@ -15775,9 +15704,11 @@
       <p:sp>
         <p:nvSpPr>
           <p:cNvPr id="2" name="Text 0"/>
-          <p:cNvSpPr/>
+          <p:cNvSpPr>
+            <a:spLocks noGrp="1"/>
+          </p:cNvSpPr>
           <p:nvPr>
-            <p:ph idx="100" type="body" hasCustomPrompt="1"/>
+            <p:ph type="body" idx="100" hasCustomPrompt="1"/>
           </p:nvPr>
         </p:nvSpPr>
         <p:spPr>
@@ -15795,11 +15726,11 @@
           <a:bodyPr wrap="square" lIns="0" tIns="0" rIns="0" bIns="0" rtlCol="0" anchor="ctr"/>
           <a:lstStyle/>
           <a:p>
-            <a:pPr indent="0" marL="0">
+            <a:pPr marL="0" indent="0">
               <a:buNone/>
             </a:pPr>
             <a:r>
-              <a:rPr lang="en-US" sz="1200" b="1" spc="200" kern="0" dirty="0">
+              <a:rPr lang="en-US" sz="1200" b="1" kern="0" spc="200" dirty="0">
                 <a:solidFill>
                   <a:srgbClr val="8A5A0B"/>
                 </a:solidFill>
@@ -15813,9 +15744,11 @@
       <p:sp>
         <p:nvSpPr>
           <p:cNvPr id="3" name="Text 0"/>
-          <p:cNvSpPr/>
+          <p:cNvSpPr>
+            <a:spLocks noGrp="1"/>
+          </p:cNvSpPr>
           <p:nvPr>
-            <p:ph idx="101" type="title" hasCustomPrompt="1"/>
+            <p:ph type="title" idx="101" hasCustomPrompt="1"/>
           </p:nvPr>
         </p:nvSpPr>
         <p:spPr>
@@ -15833,7 +15766,7 @@
           <a:bodyPr wrap="square" lIns="0" tIns="0" rIns="0" bIns="0" rtlCol="0" anchor="t"/>
           <a:lstStyle/>
           <a:p>
-            <a:pPr algn="l" indent="0" marL="0">
+            <a:pPr marL="0" indent="0" algn="l">
               <a:buNone/>
             </a:pPr>
             <a:r>
@@ -15896,7 +15829,7 @@
           <a:bodyPr wrap="square" lIns="0" tIns="0" rIns="0" bIns="0" rtlCol="0" anchor="t"/>
           <a:lstStyle/>
           <a:p>
-            <a:pPr indent="0" marL="0">
+            <a:pPr marL="0" indent="0">
               <a:buNone/>
             </a:pPr>
             <a:r>
@@ -15905,7 +15838,7 @@
                   <a:srgbClr val="1D6F6F"/>
                 </a:solidFill>
               </a:rPr>
-              <a:t>53%</a:t>
+              <a:t>83%</a:t>
             </a:r>
             <a:endParaRPr lang="en-US" sz="4000" dirty="0"/>
           </a:p>
@@ -15919,7 +15852,7 @@
         </p:nvSpPr>
         <p:spPr>
           <a:xfrm>
-            <a:off x="822960" y="2679192"/>
+            <a:off x="822960" y="2583180"/>
             <a:ext cx="2606040" cy="548640"/>
           </a:xfrm>
           <a:prstGeom prst="rect">
@@ -15932,16 +15865,13 @@
           <a:bodyPr wrap="square" lIns="0" tIns="0" rIns="0" bIns="0" rtlCol="0" anchor="t"/>
           <a:lstStyle/>
           <a:p>
-            <a:pPr indent="0" marL="0">
-              <a:buNone/>
-            </a:pPr>
             <a:r>
               <a:rPr lang="en-US" sz="1300" dirty="0">
                 <a:solidFill>
                   <a:srgbClr val="3D4757"/>
                 </a:solidFill>
               </a:rPr>
-              <a:t>header mapping accuracy of today's manual baseline</a:t>
+              <a:t>header mapping accuracy of today's manual baseline(SOV_K4T9.xlsx)</a:t>
             </a:r>
             <a:endParaRPr lang="en-US" sz="1300" dirty="0"/>
           </a:p>
@@ -15995,7 +15925,7 @@
           <a:bodyPr wrap="square" lIns="0" tIns="0" rIns="0" bIns="0" rtlCol="0" anchor="t"/>
           <a:lstStyle/>
           <a:p>
-            <a:pPr indent="0" marL="0">
+            <a:pPr marL="0" indent="0">
               <a:buNone/>
             </a:pPr>
             <a:r>
@@ -16031,7 +15961,7 @@
           <a:bodyPr wrap="square" lIns="0" tIns="0" rIns="0" bIns="0" rtlCol="0" anchor="t"/>
           <a:lstStyle/>
           <a:p>
-            <a:pPr indent="0" marL="0">
+            <a:pPr marL="0" indent="0">
               <a:buNone/>
             </a:pPr>
             <a:r>
@@ -16094,7 +16024,7 @@
           <a:bodyPr wrap="square" lIns="0" tIns="0" rIns="0" bIns="0" rtlCol="0" anchor="t"/>
           <a:lstStyle/>
           <a:p>
-            <a:pPr indent="0" marL="0">
+            <a:pPr marL="0" indent="0">
               <a:buNone/>
             </a:pPr>
             <a:r>
@@ -16130,7 +16060,7 @@
           <a:bodyPr wrap="square" lIns="0" tIns="0" rIns="0" bIns="0" rtlCol="0" anchor="t"/>
           <a:lstStyle/>
           <a:p>
-            <a:pPr indent="0" marL="0">
+            <a:pPr marL="0" indent="0">
               <a:buNone/>
             </a:pPr>
             <a:r>
@@ -16193,7 +16123,7 @@
           <a:bodyPr wrap="square" lIns="0" tIns="0" rIns="0" bIns="0" rtlCol="0" anchor="t"/>
           <a:lstStyle/>
           <a:p>
-            <a:pPr indent="0" marL="0">
+            <a:pPr marL="0" indent="0">
               <a:buNone/>
             </a:pPr>
             <a:r>
@@ -16229,7 +16159,7 @@
           <a:bodyPr wrap="square" lIns="0" tIns="0" rIns="0" bIns="0" rtlCol="0" anchor="t"/>
           <a:lstStyle/>
           <a:p>
-            <a:pPr indent="0" marL="0">
+            <a:pPr marL="0" indent="0">
               <a:buNone/>
             </a:pPr>
             <a:r>
@@ -16292,7 +16222,7 @@
           <a:bodyPr wrap="square" lIns="0" tIns="0" rIns="0" bIns="0" rtlCol="0" anchor="t"/>
           <a:lstStyle/>
           <a:p>
-            <a:pPr indent="0" marL="0">
+            <a:pPr marL="0" indent="0">
               <a:buNone/>
             </a:pPr>
             <a:r>
@@ -16485,7 +16415,7 @@
           <a:bodyPr wrap="square" lIns="0" tIns="0" rIns="0" bIns="0" rtlCol="0" anchor="ctr"/>
           <a:lstStyle/>
           <a:p>
-            <a:pPr algn="ctr" indent="0" marL="0">
+            <a:pPr marL="0" indent="0" algn="ctr">
               <a:buNone/>
             </a:pPr>
             <a:r>
@@ -16572,7 +16502,7 @@
           <a:bodyPr wrap="square" lIns="0" tIns="0" rIns="0" bIns="0" rtlCol="0" anchor="ctr"/>
           <a:lstStyle/>
           <a:p>
-            <a:pPr algn="ctr" indent="0" marL="0">
+            <a:pPr marL="0" indent="0" algn="ctr">
               <a:buNone/>
             </a:pPr>
             <a:r>
@@ -16659,7 +16589,7 @@
           <a:bodyPr wrap="square" lIns="0" tIns="0" rIns="0" bIns="0" rtlCol="0" anchor="ctr"/>
           <a:lstStyle/>
           <a:p>
-            <a:pPr algn="ctr" indent="0" marL="0">
+            <a:pPr marL="0" indent="0" algn="ctr">
               <a:buNone/>
             </a:pPr>
             <a:r>
@@ -16746,7 +16676,7 @@
           <a:bodyPr wrap="square" lIns="0" tIns="0" rIns="0" bIns="0" rtlCol="0" anchor="ctr"/>
           <a:lstStyle/>
           <a:p>
-            <a:pPr algn="ctr" indent="0" marL="0">
+            <a:pPr marL="0" indent="0" algn="ctr">
               <a:buNone/>
             </a:pPr>
             <a:r>
@@ -16763,7 +16693,7 @@
       </p:sp>
       <p:sp>
         <p:nvSpPr>
-          <p:cNvPr id="25" name="Slide Number Placeholder 0"/>
+          <p:cNvPr id="30" name="Slide Number Placeholder 0"/>
           <p:cNvSpPr>
             <a:spLocks noGrp="1"/>
           </p:cNvSpPr>
@@ -16781,7 +16711,7 @@
           </a:prstGeom>
           <a:extLst>
             <a:ext uri="{C572A759-6A51-4108-AA02-DFA0A04FC94B}">
-              <ma14:wrappingTextBoxFlag xmlns:ma14="http://schemas.microsoft.com/office/mac/drawingml/2011/main" val="0"/>
+              <ma14:wrappingTextBoxFlag xmlns:ma14="http://schemas.microsoft.com/office/mac/drawingml/2011/main" xmlns="" val="0"/>
             </a:ext>
           </a:extLst>
         </p:spPr>
@@ -16799,7 +16729,7 @@
           <a:p>
             <a:pPr algn="r"/>
             <a:fld id="{F7021451-1387-4CA6-816F-3879F97B5CBC}" type="slidenum">
-              <a:rPr b="0" lang="en-US"/>
+              <a:rPr lang="en-US" b="0"/>
               <a:t>2</a:t>
             </a:fld>
             <a:endParaRPr lang="en-US"/>
@@ -16834,9 +16764,11 @@
       <p:sp>
         <p:nvSpPr>
           <p:cNvPr id="2" name="Text 0"/>
-          <p:cNvSpPr/>
+          <p:cNvSpPr>
+            <a:spLocks noGrp="1"/>
+          </p:cNvSpPr>
           <p:nvPr>
-            <p:ph idx="100" type="body" hasCustomPrompt="1"/>
+            <p:ph type="body" idx="100" hasCustomPrompt="1"/>
           </p:nvPr>
         </p:nvSpPr>
         <p:spPr>
@@ -16854,11 +16786,11 @@
           <a:bodyPr wrap="square" lIns="0" tIns="0" rIns="0" bIns="0" rtlCol="0" anchor="ctr"/>
           <a:lstStyle/>
           <a:p>
-            <a:pPr indent="0" marL="0">
+            <a:pPr marL="0" indent="0">
               <a:buNone/>
             </a:pPr>
             <a:r>
-              <a:rPr lang="en-US" sz="1200" b="1" spc="200" kern="0" dirty="0">
+              <a:rPr lang="en-US" sz="1200" b="1" kern="0" spc="200" dirty="0">
                 <a:solidFill>
                   <a:srgbClr val="D9A441"/>
                 </a:solidFill>
@@ -16872,9 +16804,11 @@
       <p:sp>
         <p:nvSpPr>
           <p:cNvPr id="3" name="Text 0"/>
-          <p:cNvSpPr/>
+          <p:cNvSpPr>
+            <a:spLocks noGrp="1"/>
+          </p:cNvSpPr>
           <p:nvPr>
-            <p:ph idx="101" type="title" hasCustomPrompt="1"/>
+            <p:ph type="title" idx="101" hasCustomPrompt="1"/>
           </p:nvPr>
         </p:nvSpPr>
         <p:spPr>
@@ -16892,7 +16826,7 @@
           <a:bodyPr wrap="square" lIns="0" tIns="0" rIns="0" bIns="0" rtlCol="0" anchor="t"/>
           <a:lstStyle/>
           <a:p>
-            <a:pPr algn="l" indent="0" marL="0">
+            <a:pPr marL="0" indent="0" algn="l">
               <a:buNone/>
             </a:pPr>
             <a:r>
@@ -16903,21 +16837,40 @@
               </a:rPr>
               <a:t>AI </a:t>
             </a:r>
-            <a:pPr algn="l" indent="0" marL="0">
+            <a:r>
+              <a:rPr lang="en-US" sz="4400" b="1" dirty="0">
+                <a:solidFill>
+                  <a:srgbClr val="D9A441"/>
+                </a:solidFill>
+              </a:rPr>
+              <a:t>proposes.</a:t>
+            </a:r>
+            <a:endParaRPr lang="en-US" sz="4400" dirty="0"/>
+          </a:p>
+          <a:p>
+            <a:pPr marL="0" indent="0" algn="l">
               <a:buNone/>
             </a:pPr>
             <a:r>
               <a:rPr lang="en-US" sz="4400" b="1" dirty="0">
                 <a:solidFill>
+                  <a:srgbClr val="FFFFFF"/>
+                </a:solidFill>
+              </a:rPr>
+              <a:t>Code </a:t>
+            </a:r>
+            <a:r>
+              <a:rPr lang="en-US" sz="4400" b="1" dirty="0">
+                <a:solidFill>
                   <a:srgbClr val="D9A441"/>
                 </a:solidFill>
               </a:rPr>
-              <a:t>proposes.</a:t>
+              <a:t>verifies.</a:t>
             </a:r>
             <a:endParaRPr lang="en-US" sz="4400" dirty="0"/>
           </a:p>
           <a:p>
-            <a:pPr algn="l" indent="0" marL="0">
+            <a:pPr marL="0" indent="0" algn="l">
               <a:buNone/>
             </a:pPr>
             <a:r>
@@ -16926,61 +16879,30 @@
                   <a:srgbClr val="FFFFFF"/>
                 </a:solidFill>
               </a:rPr>
-              <a:t>Code </a:t>
-            </a:r>
-            <a:pPr algn="l" indent="0" marL="0">
+              <a:t>Humans </a:t>
+            </a:r>
+            <a:r>
+              <a:rPr lang="en-US" sz="4400" b="1" dirty="0">
+                <a:solidFill>
+                  <a:srgbClr val="D9A441"/>
+                </a:solidFill>
+              </a:rPr>
+              <a:t>approve.</a:t>
+            </a:r>
+            <a:endParaRPr lang="en-US" sz="4400" dirty="0"/>
+          </a:p>
+          <a:p>
+            <a:pPr marL="0" indent="0" algn="l">
               <a:buNone/>
             </a:pPr>
             <a:r>
               <a:rPr lang="en-US" sz="4400" b="1" dirty="0">
                 <a:solidFill>
-                  <a:srgbClr val="D9A441"/>
-                </a:solidFill>
-              </a:rPr>
-              <a:t>verifies.</a:t>
-            </a:r>
-            <a:endParaRPr lang="en-US" sz="4400" dirty="0"/>
-          </a:p>
-          <a:p>
-            <a:pPr algn="l" indent="0" marL="0">
-              <a:buNone/>
-            </a:pPr>
-            <a:r>
-              <a:rPr lang="en-US" sz="4400" b="1" dirty="0">
-                <a:solidFill>
                   <a:srgbClr val="FFFFFF"/>
                 </a:solidFill>
               </a:rPr>
-              <a:t>Humans </a:t>
-            </a:r>
-            <a:pPr algn="l" indent="0" marL="0">
-              <a:buNone/>
-            </a:pPr>
-            <a:r>
-              <a:rPr lang="en-US" sz="4400" b="1" dirty="0">
-                <a:solidFill>
-                  <a:srgbClr val="D9A441"/>
-                </a:solidFill>
-              </a:rPr>
-              <a:t>approve.</a:t>
-            </a:r>
-            <a:endParaRPr lang="en-US" sz="4400" dirty="0"/>
-          </a:p>
-          <a:p>
-            <a:pPr algn="l" indent="0" marL="0">
-              <a:buNone/>
-            </a:pPr>
-            <a:r>
-              <a:rPr lang="en-US" sz="4400" b="1" dirty="0">
-                <a:solidFill>
-                  <a:srgbClr val="FFFFFF"/>
-                </a:solidFill>
-              </a:rPr>
               <a:t>Everything is </a:t>
             </a:r>
-            <a:pPr algn="l" indent="0" marL="0">
-              <a:buNone/>
-            </a:pPr>
             <a:r>
               <a:rPr lang="en-US" sz="4400" b="1" dirty="0">
                 <a:solidFill>
@@ -17014,7 +16936,7 @@
           <a:bodyPr wrap="square" lIns="0" tIns="0" rIns="0" bIns="0" rtlCol="0" anchor="t"/>
           <a:lstStyle/>
           <a:p>
-            <a:pPr indent="0" marL="0">
+            <a:pPr marL="0" indent="0">
               <a:buNone/>
             </a:pPr>
             <a:r>
@@ -17077,7 +16999,7 @@
           <a:bodyPr wrap="square" lIns="0" tIns="0" rIns="0" bIns="0" rtlCol="0" anchor="t"/>
           <a:lstStyle/>
           <a:p>
-            <a:pPr indent="0" marL="0">
+            <a:pPr marL="0" indent="0">
               <a:buNone/>
             </a:pPr>
             <a:r>
@@ -17113,7 +17035,7 @@
           <a:bodyPr wrap="square" lIns="0" tIns="0" rIns="0" bIns="0" rtlCol="0" anchor="t"/>
           <a:lstStyle/>
           <a:p>
-            <a:pPr indent="0" marL="0">
+            <a:pPr marL="0" indent="0">
               <a:buNone/>
             </a:pPr>
             <a:r>
@@ -17176,7 +17098,7 @@
           <a:bodyPr wrap="square" lIns="0" tIns="0" rIns="0" bIns="0" rtlCol="0" anchor="t"/>
           <a:lstStyle/>
           <a:p>
-            <a:pPr indent="0" marL="0">
+            <a:pPr marL="0" indent="0">
               <a:buNone/>
             </a:pPr>
             <a:r>
@@ -17212,7 +17134,7 @@
           <a:bodyPr wrap="square" lIns="0" tIns="0" rIns="0" bIns="0" rtlCol="0" anchor="t"/>
           <a:lstStyle/>
           <a:p>
-            <a:pPr indent="0" marL="0">
+            <a:pPr marL="0" indent="0">
               <a:buNone/>
             </a:pPr>
             <a:r>
@@ -17275,7 +17197,7 @@
           <a:bodyPr wrap="square" lIns="0" tIns="0" rIns="0" bIns="0" rtlCol="0" anchor="t"/>
           <a:lstStyle/>
           <a:p>
-            <a:pPr indent="0" marL="0">
+            <a:pPr marL="0" indent="0">
               <a:buNone/>
             </a:pPr>
             <a:r>
@@ -17311,7 +17233,7 @@
           <a:bodyPr wrap="square" lIns="0" tIns="0" rIns="0" bIns="0" rtlCol="0" anchor="t"/>
           <a:lstStyle/>
           <a:p>
-            <a:pPr indent="0" marL="0">
+            <a:pPr marL="0" indent="0">
               <a:buNone/>
             </a:pPr>
             <a:r>
@@ -17354,9 +17276,11 @@
       <p:sp>
         <p:nvSpPr>
           <p:cNvPr id="2" name="Text 0"/>
-          <p:cNvSpPr/>
+          <p:cNvSpPr>
+            <a:spLocks noGrp="1"/>
+          </p:cNvSpPr>
           <p:nvPr>
-            <p:ph idx="100" type="body" hasCustomPrompt="1"/>
+            <p:ph type="body" idx="100" hasCustomPrompt="1"/>
           </p:nvPr>
         </p:nvSpPr>
         <p:spPr>
@@ -17374,11 +17298,11 @@
           <a:bodyPr wrap="square" lIns="0" tIns="0" rIns="0" bIns="0" rtlCol="0" anchor="ctr"/>
           <a:lstStyle/>
           <a:p>
-            <a:pPr indent="0" marL="0">
+            <a:pPr marL="0" indent="0">
               <a:buNone/>
             </a:pPr>
             <a:r>
-              <a:rPr lang="en-US" sz="1200" b="1" spc="200" kern="0" dirty="0">
+              <a:rPr lang="en-US" sz="1200" b="1" kern="0" spc="200" dirty="0">
                 <a:solidFill>
                   <a:srgbClr val="8A5A0B"/>
                 </a:solidFill>
@@ -17392,9 +17316,11 @@
       <p:sp>
         <p:nvSpPr>
           <p:cNvPr id="3" name="Text 0"/>
-          <p:cNvSpPr/>
+          <p:cNvSpPr>
+            <a:spLocks noGrp="1"/>
+          </p:cNvSpPr>
           <p:nvPr>
-            <p:ph idx="101" type="title" hasCustomPrompt="1"/>
+            <p:ph type="title" idx="101" hasCustomPrompt="1"/>
           </p:nvPr>
         </p:nvSpPr>
         <p:spPr>
@@ -17412,7 +17338,7 @@
           <a:bodyPr wrap="square" lIns="0" tIns="0" rIns="0" bIns="0" rtlCol="0" anchor="t"/>
           <a:lstStyle/>
           <a:p>
-            <a:pPr algn="l" indent="0" marL="0">
+            <a:pPr marL="0" indent="0" algn="l">
               <a:buNone/>
             </a:pPr>
             <a:r>
@@ -17475,11 +17401,11 @@
           <a:bodyPr wrap="square" lIns="0" tIns="0" rIns="0" bIns="0" rtlCol="0" anchor="t"/>
           <a:lstStyle/>
           <a:p>
-            <a:pPr indent="0" marL="0">
+            <a:pPr marL="0" indent="0">
               <a:buNone/>
             </a:pPr>
             <a:r>
-              <a:rPr lang="en-US" sz="1000" b="1" spc="100" kern="0" dirty="0">
+              <a:rPr lang="en-US" sz="1000" b="1" kern="0" spc="100" dirty="0">
                 <a:solidFill>
                   <a:srgbClr val="8A5A0B"/>
                 </a:solidFill>
@@ -17511,7 +17437,7 @@
           <a:bodyPr wrap="square" lIns="0" tIns="0" rIns="0" bIns="0" rtlCol="0" anchor="t"/>
           <a:lstStyle/>
           <a:p>
-            <a:pPr indent="0" marL="0">
+            <a:pPr marL="0" indent="0">
               <a:buNone/>
             </a:pPr>
             <a:r>
@@ -17547,7 +17473,7 @@
           <a:bodyPr wrap="square" lIns="0" tIns="0" rIns="0" bIns="0" rtlCol="0" anchor="t"/>
           <a:lstStyle/>
           <a:p>
-            <a:pPr indent="0" marL="0">
+            <a:pPr marL="0" indent="0">
               <a:buNone/>
             </a:pPr>
             <a:r>
@@ -17610,11 +17536,11 @@
           <a:bodyPr wrap="square" lIns="0" tIns="0" rIns="0" bIns="0" rtlCol="0" anchor="t"/>
           <a:lstStyle/>
           <a:p>
-            <a:pPr indent="0" marL="0">
+            <a:pPr marL="0" indent="0">
               <a:buNone/>
             </a:pPr>
             <a:r>
-              <a:rPr lang="en-US" sz="1000" b="1" spc="100" kern="0" dirty="0">
+              <a:rPr lang="en-US" sz="1000" b="1" kern="0" spc="100" dirty="0">
                 <a:solidFill>
                   <a:srgbClr val="8A5A0B"/>
                 </a:solidFill>
@@ -17646,7 +17572,7 @@
           <a:bodyPr wrap="square" lIns="0" tIns="0" rIns="0" bIns="0" rtlCol="0" anchor="t"/>
           <a:lstStyle/>
           <a:p>
-            <a:pPr indent="0" marL="0">
+            <a:pPr marL="0" indent="0">
               <a:buNone/>
             </a:pPr>
             <a:r>
@@ -17682,7 +17608,7 @@
           <a:bodyPr wrap="square" lIns="0" tIns="0" rIns="0" bIns="0" rtlCol="0" anchor="t"/>
           <a:lstStyle/>
           <a:p>
-            <a:pPr indent="0" marL="0">
+            <a:pPr marL="0" indent="0">
               <a:buNone/>
             </a:pPr>
             <a:r>
@@ -17745,11 +17671,11 @@
           <a:bodyPr wrap="square" lIns="0" tIns="0" rIns="0" bIns="0" rtlCol="0" anchor="t"/>
           <a:lstStyle/>
           <a:p>
-            <a:pPr indent="0" marL="0">
+            <a:pPr marL="0" indent="0">
               <a:buNone/>
             </a:pPr>
             <a:r>
-              <a:rPr lang="en-US" sz="1000" b="1" spc="100" kern="0" dirty="0">
+              <a:rPr lang="en-US" sz="1000" b="1" kern="0" spc="100" dirty="0">
                 <a:solidFill>
                   <a:srgbClr val="8A5A0B"/>
                 </a:solidFill>
@@ -17781,7 +17707,7 @@
           <a:bodyPr wrap="square" lIns="0" tIns="0" rIns="0" bIns="0" rtlCol="0" anchor="t"/>
           <a:lstStyle/>
           <a:p>
-            <a:pPr indent="0" marL="0">
+            <a:pPr marL="0" indent="0">
               <a:buNone/>
             </a:pPr>
             <a:r>
@@ -17817,7 +17743,7 @@
           <a:bodyPr wrap="square" lIns="0" tIns="0" rIns="0" bIns="0" rtlCol="0" anchor="t"/>
           <a:lstStyle/>
           <a:p>
-            <a:pPr indent="0" marL="0">
+            <a:pPr marL="0" indent="0">
               <a:buNone/>
             </a:pPr>
             <a:r>
@@ -17880,11 +17806,11 @@
           <a:bodyPr wrap="square" lIns="0" tIns="0" rIns="0" bIns="0" rtlCol="0" anchor="t"/>
           <a:lstStyle/>
           <a:p>
-            <a:pPr indent="0" marL="0">
+            <a:pPr marL="0" indent="0">
               <a:buNone/>
             </a:pPr>
             <a:r>
-              <a:rPr lang="en-US" sz="1000" b="1" spc="100" kern="0" dirty="0">
+              <a:rPr lang="en-US" sz="1000" b="1" kern="0" spc="100" dirty="0">
                 <a:solidFill>
                   <a:srgbClr val="8A5A0B"/>
                 </a:solidFill>
@@ -17916,7 +17842,7 @@
           <a:bodyPr wrap="square" lIns="0" tIns="0" rIns="0" bIns="0" rtlCol="0" anchor="t"/>
           <a:lstStyle/>
           <a:p>
-            <a:pPr indent="0" marL="0">
+            <a:pPr marL="0" indent="0">
               <a:buNone/>
             </a:pPr>
             <a:r>
@@ -17952,7 +17878,7 @@
           <a:bodyPr wrap="square" lIns="0" tIns="0" rIns="0" bIns="0" rtlCol="0" anchor="t"/>
           <a:lstStyle/>
           <a:p>
-            <a:pPr indent="0" marL="0">
+            <a:pPr marL="0" indent="0">
               <a:buNone/>
             </a:pPr>
             <a:r>
@@ -18015,11 +17941,11 @@
           <a:bodyPr wrap="square" lIns="0" tIns="0" rIns="0" bIns="0" rtlCol="0" anchor="t"/>
           <a:lstStyle/>
           <a:p>
-            <a:pPr indent="0" marL="0">
+            <a:pPr marL="0" indent="0">
               <a:buNone/>
             </a:pPr>
             <a:r>
-              <a:rPr lang="en-US" sz="1000" b="1" spc="100" kern="0" dirty="0">
+              <a:rPr lang="en-US" sz="1000" b="1" kern="0" spc="100" dirty="0">
                 <a:solidFill>
                   <a:srgbClr val="8A5A0B"/>
                 </a:solidFill>
@@ -18051,7 +17977,7 @@
           <a:bodyPr wrap="square" lIns="0" tIns="0" rIns="0" bIns="0" rtlCol="0" anchor="t"/>
           <a:lstStyle/>
           <a:p>
-            <a:pPr indent="0" marL="0">
+            <a:pPr marL="0" indent="0">
               <a:buNone/>
             </a:pPr>
             <a:r>
@@ -18087,7 +18013,7 @@
           <a:bodyPr wrap="square" lIns="0" tIns="0" rIns="0" bIns="0" rtlCol="0" anchor="t"/>
           <a:lstStyle/>
           <a:p>
-            <a:pPr indent="0" marL="0">
+            <a:pPr marL="0" indent="0">
               <a:buNone/>
             </a:pPr>
             <a:r>
@@ -18150,11 +18076,11 @@
           <a:bodyPr wrap="square" lIns="0" tIns="0" rIns="0" bIns="0" rtlCol="0" anchor="t"/>
           <a:lstStyle/>
           <a:p>
-            <a:pPr indent="0" marL="0">
+            <a:pPr marL="0" indent="0">
               <a:buNone/>
             </a:pPr>
             <a:r>
-              <a:rPr lang="en-US" sz="1000" b="1" spc="100" kern="0" dirty="0">
+              <a:rPr lang="en-US" sz="1000" b="1" kern="0" spc="100" dirty="0">
                 <a:solidFill>
                   <a:srgbClr val="8A5A0B"/>
                 </a:solidFill>
@@ -18186,7 +18112,7 @@
           <a:bodyPr wrap="square" lIns="0" tIns="0" rIns="0" bIns="0" rtlCol="0" anchor="t"/>
           <a:lstStyle/>
           <a:p>
-            <a:pPr indent="0" marL="0">
+            <a:pPr marL="0" indent="0">
               <a:buNone/>
             </a:pPr>
             <a:r>
@@ -18222,7 +18148,7 @@
           <a:bodyPr wrap="square" lIns="0" tIns="0" rIns="0" bIns="0" rtlCol="0" anchor="t"/>
           <a:lstStyle/>
           <a:p>
-            <a:pPr indent="0" marL="0">
+            <a:pPr marL="0" indent="0">
               <a:buNone/>
             </a:pPr>
             <a:r>
@@ -18285,11 +18211,11 @@
           <a:bodyPr wrap="square" lIns="0" tIns="0" rIns="0" bIns="0" rtlCol="0" anchor="t"/>
           <a:lstStyle/>
           <a:p>
-            <a:pPr indent="0" marL="0">
+            <a:pPr marL="0" indent="0">
               <a:buNone/>
             </a:pPr>
             <a:r>
-              <a:rPr lang="en-US" sz="1000" b="1" spc="100" kern="0" dirty="0">
+              <a:rPr lang="en-US" sz="1000" b="1" kern="0" spc="100" dirty="0">
                 <a:solidFill>
                   <a:srgbClr val="1D6F6F"/>
                 </a:solidFill>
@@ -18321,7 +18247,7 @@
           <a:bodyPr wrap="square" lIns="0" tIns="0" rIns="0" bIns="0" rtlCol="0" anchor="t"/>
           <a:lstStyle/>
           <a:p>
-            <a:pPr indent="0" marL="0">
+            <a:pPr marL="0" indent="0">
               <a:buNone/>
             </a:pPr>
             <a:r>
@@ -18357,7 +18283,7 @@
           <a:bodyPr wrap="square" lIns="0" tIns="0" rIns="0" bIns="0" rtlCol="0" anchor="t"/>
           <a:lstStyle/>
           <a:p>
-            <a:pPr indent="0" marL="0">
+            <a:pPr marL="0" indent="0">
               <a:buNone/>
             </a:pPr>
             <a:r>
@@ -18420,11 +18346,11 @@
           <a:bodyPr wrap="square" lIns="0" tIns="0" rIns="0" bIns="0" rtlCol="0" anchor="t"/>
           <a:lstStyle/>
           <a:p>
-            <a:pPr indent="0" marL="0">
+            <a:pPr marL="0" indent="0">
               <a:buNone/>
             </a:pPr>
             <a:r>
-              <a:rPr lang="en-US" sz="1000" b="1" spc="100" kern="0" dirty="0">
+              <a:rPr lang="en-US" sz="1000" b="1" kern="0" spc="100" dirty="0">
                 <a:solidFill>
                   <a:srgbClr val="1D6F6F"/>
                 </a:solidFill>
@@ -18456,7 +18382,7 @@
           <a:bodyPr wrap="square" lIns="0" tIns="0" rIns="0" bIns="0" rtlCol="0" anchor="t"/>
           <a:lstStyle/>
           <a:p>
-            <a:pPr indent="0" marL="0">
+            <a:pPr marL="0" indent="0">
               <a:buNone/>
             </a:pPr>
             <a:r>
@@ -18492,7 +18418,7 @@
           <a:bodyPr wrap="square" lIns="0" tIns="0" rIns="0" bIns="0" rtlCol="0" anchor="t"/>
           <a:lstStyle/>
           <a:p>
-            <a:pPr indent="0" marL="0">
+            <a:pPr marL="0" indent="0">
               <a:buNone/>
             </a:pPr>
             <a:r>
@@ -18696,7 +18622,7 @@
           <a:bodyPr wrap="square" lIns="0" tIns="0" rIns="0" bIns="0" rtlCol="0" anchor="ctr"/>
           <a:lstStyle/>
           <a:p>
-            <a:pPr algn="r" indent="0" marL="0">
+            <a:pPr marL="0" indent="0" algn="r">
               <a:buNone/>
             </a:pPr>
             <a:r>
@@ -18756,7 +18682,7 @@
           <a:bodyPr wrap="square" lIns="0" tIns="0" rIns="0" bIns="0" rtlCol="0" anchor="ctr"/>
           <a:lstStyle/>
           <a:p>
-            <a:pPr indent="0" marL="0">
+            <a:pPr marL="0" indent="0">
               <a:buNone/>
             </a:pPr>
             <a:r>
@@ -18792,7 +18718,7 @@
           <a:bodyPr wrap="square" lIns="0" tIns="0" rIns="0" bIns="0" rtlCol="0" anchor="t"/>
           <a:lstStyle/>
           <a:p>
-            <a:pPr indent="0" marL="0">
+            <a:pPr marL="0" indent="0">
               <a:buNone/>
             </a:pPr>
             <a:r>
@@ -18809,7 +18735,7 @@
       </p:sp>
       <p:sp>
         <p:nvSpPr>
-          <p:cNvPr id="25" name="Slide Number Placeholder 0"/>
+          <p:cNvPr id="47" name="Slide Number Placeholder 0"/>
           <p:cNvSpPr>
             <a:spLocks noGrp="1"/>
           </p:cNvSpPr>
@@ -18827,7 +18753,7 @@
           </a:prstGeom>
           <a:extLst>
             <a:ext uri="{C572A759-6A51-4108-AA02-DFA0A04FC94B}">
-              <ma14:wrappingTextBoxFlag xmlns:ma14="http://schemas.microsoft.com/office/mac/drawingml/2011/main" val="0"/>
+              <ma14:wrappingTextBoxFlag xmlns:ma14="http://schemas.microsoft.com/office/mac/drawingml/2011/main" xmlns="" val="0"/>
             </a:ext>
           </a:extLst>
         </p:spPr>
@@ -18845,7 +18771,7 @@
           <a:p>
             <a:pPr algn="r"/>
             <a:fld id="{F7021451-1387-4CA6-816F-3879F97B5CBC}" type="slidenum">
-              <a:rPr b="0" lang="en-US"/>
+              <a:rPr lang="en-US" b="0"/>
               <a:t>4</a:t>
             </a:fld>
             <a:endParaRPr lang="en-US"/>
@@ -18880,9 +18806,11 @@
       <p:sp>
         <p:nvSpPr>
           <p:cNvPr id="2" name="Text 0"/>
-          <p:cNvSpPr/>
+          <p:cNvSpPr>
+            <a:spLocks noGrp="1"/>
+          </p:cNvSpPr>
           <p:nvPr>
-            <p:ph idx="100" type="body" hasCustomPrompt="1"/>
+            <p:ph type="body" idx="100" hasCustomPrompt="1"/>
           </p:nvPr>
         </p:nvSpPr>
         <p:spPr>
@@ -18900,11 +18828,11 @@
           <a:bodyPr wrap="square" lIns="0" tIns="0" rIns="0" bIns="0" rtlCol="0" anchor="ctr"/>
           <a:lstStyle/>
           <a:p>
-            <a:pPr indent="0" marL="0">
+            <a:pPr marL="0" indent="0">
               <a:buNone/>
             </a:pPr>
             <a:r>
-              <a:rPr lang="en-US" sz="1200" b="1" spc="200" kern="0" dirty="0">
+              <a:rPr lang="en-US" sz="1200" b="1" kern="0" spc="200" dirty="0">
                 <a:solidFill>
                   <a:srgbClr val="8A5A0B"/>
                 </a:solidFill>
@@ -18918,9 +18846,11 @@
       <p:sp>
         <p:nvSpPr>
           <p:cNvPr id="3" name="Text 0"/>
-          <p:cNvSpPr/>
+          <p:cNvSpPr>
+            <a:spLocks noGrp="1"/>
+          </p:cNvSpPr>
           <p:nvPr>
-            <p:ph idx="101" type="title" hasCustomPrompt="1"/>
+            <p:ph type="title" idx="101" hasCustomPrompt="1"/>
           </p:nvPr>
         </p:nvSpPr>
         <p:spPr>
@@ -18938,7 +18868,7 @@
           <a:bodyPr wrap="square" lIns="0" tIns="0" rIns="0" bIns="0" rtlCol="0" anchor="t"/>
           <a:lstStyle/>
           <a:p>
-            <a:pPr algn="l" indent="0" marL="0">
+            <a:pPr marL="0" indent="0" algn="l">
               <a:buNone/>
             </a:pPr>
             <a:r>
@@ -19001,7 +18931,7 @@
           <a:bodyPr wrap="square" lIns="0" tIns="0" rIns="0" bIns="0" rtlCol="0" anchor="ctr"/>
           <a:lstStyle/>
           <a:p>
-            <a:pPr indent="0" marL="0">
+            <a:pPr marL="0" indent="0">
               <a:buNone/>
             </a:pPr>
             <a:r>
@@ -19064,7 +18994,7 @@
           <a:bodyPr wrap="square" lIns="0" tIns="0" rIns="0" bIns="0" rtlCol="0" anchor="ctr"/>
           <a:lstStyle/>
           <a:p>
-            <a:pPr indent="0" marL="0">
+            <a:pPr marL="0" indent="0">
               <a:buNone/>
             </a:pPr>
             <a:r>
@@ -19127,7 +19057,7 @@
           <a:bodyPr wrap="square" lIns="0" tIns="0" rIns="0" bIns="0" rtlCol="0" anchor="ctr"/>
           <a:lstStyle/>
           <a:p>
-            <a:pPr indent="0" marL="0">
+            <a:pPr marL="0" indent="0">
               <a:buNone/>
             </a:pPr>
             <a:r>
@@ -19190,7 +19120,7 @@
           <a:bodyPr wrap="square" lIns="0" tIns="0" rIns="0" bIns="0" rtlCol="0" anchor="ctr"/>
           <a:lstStyle/>
           <a:p>
-            <a:pPr indent="0" marL="0">
+            <a:pPr marL="0" indent="0">
               <a:buNone/>
             </a:pPr>
             <a:r>
@@ -19253,7 +19183,7 @@
           <a:bodyPr wrap="square" lIns="0" tIns="0" rIns="0" bIns="0" rtlCol="0" anchor="ctr"/>
           <a:lstStyle/>
           <a:p>
-            <a:pPr indent="0" marL="0">
+            <a:pPr marL="0" indent="0">
               <a:buNone/>
             </a:pPr>
             <a:r>
@@ -19316,7 +19246,7 @@
           <a:bodyPr wrap="square" lIns="0" tIns="0" rIns="0" bIns="0" rtlCol="0" anchor="ctr"/>
           <a:lstStyle/>
           <a:p>
-            <a:pPr indent="0" marL="0">
+            <a:pPr marL="0" indent="0">
               <a:buNone/>
             </a:pPr>
             <a:r>
@@ -19379,7 +19309,7 @@
           <a:bodyPr wrap="square" lIns="0" tIns="0" rIns="0" bIns="0" rtlCol="0" anchor="ctr"/>
           <a:lstStyle/>
           <a:p>
-            <a:pPr indent="0" marL="0">
+            <a:pPr marL="0" indent="0">
               <a:buNone/>
             </a:pPr>
             <a:r>
@@ -19442,7 +19372,7 @@
           <a:bodyPr wrap="square" lIns="0" tIns="0" rIns="0" bIns="0" rtlCol="0" anchor="ctr"/>
           <a:lstStyle/>
           <a:p>
-            <a:pPr indent="0" marL="0">
+            <a:pPr marL="0" indent="0">
               <a:buNone/>
             </a:pPr>
             <a:r>
@@ -19505,7 +19435,7 @@
           <a:bodyPr wrap="square" lIns="0" tIns="0" rIns="0" bIns="0" rtlCol="0" anchor="ctr"/>
           <a:lstStyle/>
           <a:p>
-            <a:pPr indent="0" marL="0">
+            <a:pPr marL="0" indent="0">
               <a:buNone/>
             </a:pPr>
             <a:r>
@@ -19568,7 +19498,7 @@
           <a:bodyPr wrap="square" lIns="0" tIns="0" rIns="0" bIns="0" rtlCol="0" anchor="ctr"/>
           <a:lstStyle/>
           <a:p>
-            <a:pPr indent="0" marL="0">
+            <a:pPr marL="0" indent="0">
               <a:buNone/>
             </a:pPr>
             <a:r>
@@ -19631,7 +19561,7 @@
           <a:bodyPr wrap="square" lIns="0" tIns="0" rIns="0" bIns="0" rtlCol="0" anchor="ctr"/>
           <a:lstStyle/>
           <a:p>
-            <a:pPr indent="0" marL="0">
+            <a:pPr marL="0" indent="0">
               <a:buNone/>
             </a:pPr>
             <a:r>
@@ -19694,7 +19624,7 @@
           <a:bodyPr wrap="square" lIns="0" tIns="0" rIns="0" bIns="0" rtlCol="0" anchor="ctr"/>
           <a:lstStyle/>
           <a:p>
-            <a:pPr indent="0" marL="0">
+            <a:pPr marL="0" indent="0">
               <a:buNone/>
             </a:pPr>
             <a:r>
@@ -19757,7 +19687,7 @@
           <a:bodyPr wrap="square" lIns="0" tIns="0" rIns="0" bIns="0" rtlCol="0" anchor="ctr"/>
           <a:lstStyle/>
           <a:p>
-            <a:pPr indent="0" marL="0">
+            <a:pPr marL="0" indent="0">
               <a:buNone/>
             </a:pPr>
             <a:r>
@@ -19820,7 +19750,7 @@
           <a:bodyPr wrap="square" lIns="0" tIns="0" rIns="0" bIns="0" rtlCol="0" anchor="ctr"/>
           <a:lstStyle/>
           <a:p>
-            <a:pPr indent="0" marL="0">
+            <a:pPr marL="0" indent="0">
               <a:buNone/>
             </a:pPr>
             <a:r>
@@ -19883,7 +19813,7 @@
           <a:bodyPr wrap="square" lIns="0" tIns="0" rIns="0" bIns="0" rtlCol="0" anchor="ctr"/>
           <a:lstStyle/>
           <a:p>
-            <a:pPr indent="0" marL="0">
+            <a:pPr marL="0" indent="0">
               <a:buNone/>
             </a:pPr>
             <a:r>
@@ -19946,7 +19876,7 @@
           <a:bodyPr wrap="square" lIns="0" tIns="0" rIns="0" bIns="0" rtlCol="0" anchor="ctr"/>
           <a:lstStyle/>
           <a:p>
-            <a:pPr indent="0" marL="0">
+            <a:pPr marL="0" indent="0">
               <a:buNone/>
             </a:pPr>
             <a:r>
@@ -20009,7 +19939,7 @@
           <a:bodyPr wrap="square" lIns="0" tIns="0" rIns="0" bIns="0" rtlCol="0" anchor="ctr"/>
           <a:lstStyle/>
           <a:p>
-            <a:pPr indent="0" marL="0">
+            <a:pPr marL="0" indent="0">
               <a:buNone/>
             </a:pPr>
             <a:r>
@@ -20072,7 +20002,7 @@
           <a:bodyPr wrap="square" lIns="0" tIns="0" rIns="0" bIns="0" rtlCol="0" anchor="ctr"/>
           <a:lstStyle/>
           <a:p>
-            <a:pPr indent="0" marL="0">
+            <a:pPr marL="0" indent="0">
               <a:buNone/>
             </a:pPr>
             <a:r>
@@ -20135,7 +20065,7 @@
           <a:bodyPr wrap="square" lIns="0" tIns="0" rIns="0" bIns="0" rtlCol="0" anchor="ctr"/>
           <a:lstStyle/>
           <a:p>
-            <a:pPr indent="0" marL="0">
+            <a:pPr marL="0" indent="0">
               <a:buNone/>
             </a:pPr>
             <a:r>
@@ -20198,7 +20128,7 @@
           <a:bodyPr wrap="square" lIns="0" tIns="0" rIns="0" bIns="0" rtlCol="0" anchor="ctr"/>
           <a:lstStyle/>
           <a:p>
-            <a:pPr indent="0" marL="0">
+            <a:pPr marL="0" indent="0">
               <a:buNone/>
             </a:pPr>
             <a:r>
@@ -20261,7 +20191,7 @@
           <a:bodyPr wrap="square" lIns="0" tIns="0" rIns="0" bIns="0" rtlCol="0" anchor="ctr"/>
           <a:lstStyle/>
           <a:p>
-            <a:pPr indent="0" marL="0">
+            <a:pPr marL="0" indent="0">
               <a:buNone/>
             </a:pPr>
             <a:r>
@@ -20324,7 +20254,7 @@
           <a:bodyPr wrap="square" lIns="0" tIns="0" rIns="0" bIns="0" rtlCol="0" anchor="ctr"/>
           <a:lstStyle/>
           <a:p>
-            <a:pPr indent="0" marL="0">
+            <a:pPr marL="0" indent="0">
               <a:buNone/>
             </a:pPr>
             <a:r>
@@ -20387,7 +20317,7 @@
           <a:bodyPr wrap="square" lIns="0" tIns="0" rIns="0" bIns="0" rtlCol="0" anchor="ctr"/>
           <a:lstStyle/>
           <a:p>
-            <a:pPr indent="0" marL="0">
+            <a:pPr marL="0" indent="0">
               <a:buNone/>
             </a:pPr>
             <a:r>
@@ -20450,7 +20380,7 @@
           <a:bodyPr wrap="square" lIns="0" tIns="0" rIns="0" bIns="0" rtlCol="0" anchor="ctr"/>
           <a:lstStyle/>
           <a:p>
-            <a:pPr indent="0" marL="0">
+            <a:pPr marL="0" indent="0">
               <a:buNone/>
             </a:pPr>
             <a:r>
@@ -20513,7 +20443,7 @@
           <a:bodyPr wrap="square" lIns="0" tIns="0" rIns="0" bIns="0" rtlCol="0" anchor="ctr"/>
           <a:lstStyle/>
           <a:p>
-            <a:pPr indent="0" marL="0">
+            <a:pPr marL="0" indent="0">
               <a:buNone/>
             </a:pPr>
             <a:r>
@@ -20549,7 +20479,7 @@
           <a:bodyPr wrap="square" lIns="0" tIns="0" rIns="0" bIns="0" rtlCol="0" anchor="t"/>
           <a:lstStyle/>
           <a:p>
-            <a:pPr indent="0" marL="0">
+            <a:pPr marL="0" indent="0">
               <a:buNone/>
             </a:pPr>
             <a:r>
@@ -20560,9 +20490,6 @@
               </a:rPr>
               <a:t>Cross-cutting: </a:t>
             </a:r>
-            <a:pPr indent="0" marL="0">
-              <a:buNone/>
-            </a:pPr>
             <a:r>
               <a:rPr lang="en-US" sz="1200" dirty="0">
                 <a:solidFill>
@@ -20577,7 +20504,7 @@
       </p:sp>
       <p:sp>
         <p:nvSpPr>
-          <p:cNvPr id="25" name="Slide Number Placeholder 0"/>
+          <p:cNvPr id="55" name="Slide Number Placeholder 0"/>
           <p:cNvSpPr>
             <a:spLocks noGrp="1"/>
           </p:cNvSpPr>
@@ -20595,7 +20522,7 @@
           </a:prstGeom>
           <a:extLst>
             <a:ext uri="{C572A759-6A51-4108-AA02-DFA0A04FC94B}">
-              <ma14:wrappingTextBoxFlag xmlns:ma14="http://schemas.microsoft.com/office/mac/drawingml/2011/main" val="0"/>
+              <ma14:wrappingTextBoxFlag xmlns:ma14="http://schemas.microsoft.com/office/mac/drawingml/2011/main" xmlns="" val="0"/>
             </a:ext>
           </a:extLst>
         </p:spPr>
@@ -20613,7 +20540,7 @@
           <a:p>
             <a:pPr algn="r"/>
             <a:fld id="{F7021451-1387-4CA6-816F-3879F97B5CBC}" type="slidenum">
-              <a:rPr b="0" lang="en-US"/>
+              <a:rPr lang="en-US" b="0"/>
               <a:t>5</a:t>
             </a:fld>
             <a:endParaRPr lang="en-US"/>
@@ -20648,9 +20575,11 @@
       <p:sp>
         <p:nvSpPr>
           <p:cNvPr id="2" name="Text 0"/>
-          <p:cNvSpPr/>
+          <p:cNvSpPr>
+            <a:spLocks noGrp="1"/>
+          </p:cNvSpPr>
           <p:nvPr>
-            <p:ph idx="100" type="body" hasCustomPrompt="1"/>
+            <p:ph type="body" idx="100" hasCustomPrompt="1"/>
           </p:nvPr>
         </p:nvSpPr>
         <p:spPr>
@@ -20668,11 +20597,11 @@
           <a:bodyPr wrap="square" lIns="0" tIns="0" rIns="0" bIns="0" rtlCol="0" anchor="ctr"/>
           <a:lstStyle/>
           <a:p>
-            <a:pPr indent="0" marL="0">
+            <a:pPr marL="0" indent="0">
               <a:buNone/>
             </a:pPr>
             <a:r>
-              <a:rPr lang="en-US" sz="1200" b="1" spc="200" kern="0" dirty="0">
+              <a:rPr lang="en-US" sz="1200" b="1" kern="0" spc="200" dirty="0">
                 <a:solidFill>
                   <a:srgbClr val="8A5A0B"/>
                 </a:solidFill>
@@ -20686,9 +20615,11 @@
       <p:sp>
         <p:nvSpPr>
           <p:cNvPr id="3" name="Text 0"/>
-          <p:cNvSpPr/>
+          <p:cNvSpPr>
+            <a:spLocks noGrp="1"/>
+          </p:cNvSpPr>
           <p:nvPr>
-            <p:ph idx="101" type="title" hasCustomPrompt="1"/>
+            <p:ph type="title" idx="101" hasCustomPrompt="1"/>
           </p:nvPr>
         </p:nvSpPr>
         <p:spPr>
@@ -20706,7 +20637,7 @@
           <a:bodyPr wrap="square" lIns="0" tIns="0" rIns="0" bIns="0" rtlCol="0" anchor="t"/>
           <a:lstStyle/>
           <a:p>
-            <a:pPr algn="l" indent="0" marL="0">
+            <a:pPr marL="0" indent="0" algn="l">
               <a:buNone/>
             </a:pPr>
             <a:r>
@@ -20769,7 +20700,7 @@
           <a:bodyPr wrap="square" lIns="0" tIns="0" rIns="0" bIns="0" rtlCol="0" anchor="ctr"/>
           <a:lstStyle/>
           <a:p>
-            <a:pPr algn="ctr" indent="0" marL="0">
+            <a:pPr marL="0" indent="0" algn="ctr">
               <a:buNone/>
             </a:pPr>
             <a:r>
@@ -20805,7 +20736,7 @@
           <a:bodyPr wrap="square" lIns="0" tIns="0" rIns="0" bIns="0" rtlCol="0" anchor="t"/>
           <a:lstStyle/>
           <a:p>
-            <a:pPr indent="0" marL="0">
+            <a:pPr marL="0" indent="0">
               <a:buNone/>
             </a:pPr>
             <a:r>
@@ -20841,7 +20772,7 @@
           <a:bodyPr wrap="square" lIns="0" tIns="0" rIns="0" bIns="0" rtlCol="0" anchor="t"/>
           <a:lstStyle/>
           <a:p>
-            <a:pPr indent="0" marL="0">
+            <a:pPr marL="0" indent="0">
               <a:buNone/>
             </a:pPr>
             <a:r>
@@ -20904,7 +20835,7 @@
           <a:bodyPr wrap="square" lIns="0" tIns="0" rIns="0" bIns="0" rtlCol="0" anchor="ctr"/>
           <a:lstStyle/>
           <a:p>
-            <a:pPr algn="ctr" indent="0" marL="0">
+            <a:pPr marL="0" indent="0" algn="ctr">
               <a:buNone/>
             </a:pPr>
             <a:r>
@@ -20940,7 +20871,7 @@
           <a:bodyPr wrap="square" lIns="0" tIns="0" rIns="0" bIns="0" rtlCol="0" anchor="t"/>
           <a:lstStyle/>
           <a:p>
-            <a:pPr indent="0" marL="0">
+            <a:pPr marL="0" indent="0">
               <a:buNone/>
             </a:pPr>
             <a:r>
@@ -20976,7 +20907,7 @@
           <a:bodyPr wrap="square" lIns="0" tIns="0" rIns="0" bIns="0" rtlCol="0" anchor="t"/>
           <a:lstStyle/>
           <a:p>
-            <a:pPr indent="0" marL="0">
+            <a:pPr marL="0" indent="0">
               <a:buNone/>
             </a:pPr>
             <a:r>
@@ -21039,7 +20970,7 @@
           <a:bodyPr wrap="square" lIns="0" tIns="0" rIns="0" bIns="0" rtlCol="0" anchor="ctr"/>
           <a:lstStyle/>
           <a:p>
-            <a:pPr algn="ctr" indent="0" marL="0">
+            <a:pPr marL="0" indent="0" algn="ctr">
               <a:buNone/>
             </a:pPr>
             <a:r>
@@ -21075,7 +21006,7 @@
           <a:bodyPr wrap="square" lIns="0" tIns="0" rIns="0" bIns="0" rtlCol="0" anchor="t"/>
           <a:lstStyle/>
           <a:p>
-            <a:pPr indent="0" marL="0">
+            <a:pPr marL="0" indent="0">
               <a:buNone/>
             </a:pPr>
             <a:r>
@@ -21111,7 +21042,7 @@
           <a:bodyPr wrap="square" lIns="0" tIns="0" rIns="0" bIns="0" rtlCol="0" anchor="t"/>
           <a:lstStyle/>
           <a:p>
-            <a:pPr indent="0" marL="0">
+            <a:pPr marL="0" indent="0">
               <a:buNone/>
             </a:pPr>
             <a:r>
@@ -21174,7 +21105,7 @@
           <a:bodyPr wrap="square" lIns="0" tIns="0" rIns="0" bIns="0" rtlCol="0" anchor="ctr"/>
           <a:lstStyle/>
           <a:p>
-            <a:pPr algn="ctr" indent="0" marL="0">
+            <a:pPr marL="0" indent="0" algn="ctr">
               <a:buNone/>
             </a:pPr>
             <a:r>
@@ -21210,7 +21141,7 @@
           <a:bodyPr wrap="square" lIns="0" tIns="0" rIns="0" bIns="0" rtlCol="0" anchor="t"/>
           <a:lstStyle/>
           <a:p>
-            <a:pPr indent="0" marL="0">
+            <a:pPr marL="0" indent="0">
               <a:buNone/>
             </a:pPr>
             <a:r>
@@ -21234,7 +21165,7 @@
         <p:spPr>
           <a:xfrm>
             <a:off x="1097280" y="5257800"/>
-            <a:ext cx="4663440" cy="685800"/>
+            <a:ext cx="4663440" cy="527083"/>
           </a:xfrm>
           <a:prstGeom prst="rect">
             <a:avLst/>
@@ -21246,18 +21177,19 @@
           <a:bodyPr wrap="square" lIns="0" tIns="0" rIns="0" bIns="0" rtlCol="0" anchor="t"/>
           <a:lstStyle/>
           <a:p>
-            <a:pPr indent="0" marL="0">
-              <a:buNone/>
-            </a:pPr>
-            <a:r>
-              <a:rPr lang="en-US" sz="1250" dirty="0">
-                <a:solidFill>
-                  <a:srgbClr val="3D4757"/>
-                </a:solidFill>
-              </a:rPr>
-              <a:t>Every Primary tab is stacked into one table; totals, footnotes and blank rows are dropped.</a:t>
-            </a:r>
-            <a:endParaRPr lang="en-US" sz="1250" dirty="0"/>
+            <a:r>
+              <a:rPr lang="en-IN" sz="1400" dirty="0">
+                <a:solidFill>
+                  <a:schemeClr val="tx2"/>
+                </a:solidFill>
+              </a:rPr>
+              <a:t>Every PRIMARY tab is isolated into its own processing context and passed independently through mapping, quality, review, transformation and validation.</a:t>
+            </a:r>
+            <a:endParaRPr lang="en-US" sz="1400" dirty="0">
+              <a:solidFill>
+                <a:schemeClr val="tx2"/>
+              </a:solidFill>
+            </a:endParaRPr>
           </a:p>
         </p:txBody>
       </p:sp>
@@ -21285,7 +21217,7 @@
             <a:prstDash val="solid"/>
           </a:ln>
           <a:effectLst>
-            <a:outerShdw sx="100000" sy="100000" kx="0" ky="0" algn="bl" rotWithShape="0" blurRad="76200" dist="25400" dir="5400000">
+            <a:outerShdw blurRad="76200" dist="25400" dir="5400000" algn="bl" rotWithShape="0">
               <a:srgbClr val="000000">
                 <a:alpha val="12000"/>
               </a:srgbClr>
@@ -21295,14 +21227,14 @@
       </p:sp>
       <p:pic>
         <p:nvPicPr>
-          <p:cNvPr id="21" name="Image 0" descr="Live app, SOV_K4T9: 7 tabs → Locations is Primary, header on row 5 (Excel row 6)">    </p:cNvPr>
+          <p:cNvPr id="21" name="Image 0" descr="Live app, SOV_K4T9: 7 tabs → Locations is Primary, header on row 5 (Excel row 6)"/>
           <p:cNvPicPr>
             <a:picLocks noChangeAspect="1"/>
           </p:cNvPicPr>
           <p:nvPr/>
         </p:nvPicPr>
         <p:blipFill>
-          <a:blip r:embed="rId1"/>
+          <a:blip r:embed="rId3"/>
           <a:stretch>
             <a:fillRect/>
           </a:stretch>
@@ -21338,7 +21270,7 @@
           <a:bodyPr wrap="square" lIns="0" tIns="0" rIns="0" bIns="0" rtlCol="0" anchor="t"/>
           <a:lstStyle/>
           <a:p>
-            <a:pPr indent="0" marL="0">
+            <a:pPr marL="0" indent="0">
               <a:buNone/>
             </a:pPr>
             <a:r>
@@ -21373,7 +21305,7 @@
           </a:prstGeom>
           <a:extLst>
             <a:ext uri="{C572A759-6A51-4108-AA02-DFA0A04FC94B}">
-              <ma14:wrappingTextBoxFlag xmlns:ma14="http://schemas.microsoft.com/office/mac/drawingml/2011/main" val="0"/>
+              <ma14:wrappingTextBoxFlag xmlns:ma14="http://schemas.microsoft.com/office/mac/drawingml/2011/main" xmlns="" val="0"/>
             </a:ext>
           </a:extLst>
         </p:spPr>
@@ -21391,7 +21323,7 @@
           <a:p>
             <a:pPr algn="r"/>
             <a:fld id="{F7021451-1387-4CA6-816F-3879F97B5CBC}" type="slidenum">
-              <a:rPr b="0" lang="en-US"/>
+              <a:rPr lang="en-US" b="0"/>
               <a:t>6</a:t>
             </a:fld>
             <a:endParaRPr lang="en-US"/>
@@ -21426,9 +21358,11 @@
       <p:sp>
         <p:nvSpPr>
           <p:cNvPr id="2" name="Text 0"/>
-          <p:cNvSpPr/>
+          <p:cNvSpPr>
+            <a:spLocks noGrp="1"/>
+          </p:cNvSpPr>
           <p:nvPr>
-            <p:ph idx="100" type="body" hasCustomPrompt="1"/>
+            <p:ph type="body" idx="100" hasCustomPrompt="1"/>
           </p:nvPr>
         </p:nvSpPr>
         <p:spPr>
@@ -21446,11 +21380,11 @@
           <a:bodyPr wrap="square" lIns="0" tIns="0" rIns="0" bIns="0" rtlCol="0" anchor="ctr"/>
           <a:lstStyle/>
           <a:p>
-            <a:pPr indent="0" marL="0">
+            <a:pPr marL="0" indent="0">
               <a:buNone/>
             </a:pPr>
             <a:r>
-              <a:rPr lang="en-US" sz="1200" b="1" spc="200" kern="0" dirty="0">
+              <a:rPr lang="en-US" sz="1200" b="1" kern="0" spc="200" dirty="0">
                 <a:solidFill>
                   <a:srgbClr val="8A5A0B"/>
                 </a:solidFill>
@@ -21464,9 +21398,11 @@
       <p:sp>
         <p:nvSpPr>
           <p:cNvPr id="3" name="Text 0"/>
-          <p:cNvSpPr/>
+          <p:cNvSpPr>
+            <a:spLocks noGrp="1"/>
+          </p:cNvSpPr>
           <p:nvPr>
-            <p:ph idx="101" type="title" hasCustomPrompt="1"/>
+            <p:ph type="title" idx="101" hasCustomPrompt="1"/>
           </p:nvPr>
         </p:nvSpPr>
         <p:spPr>
@@ -21484,7 +21420,7 @@
           <a:bodyPr wrap="square" lIns="0" tIns="0" rIns="0" bIns="0" rtlCol="0" anchor="t"/>
           <a:lstStyle/>
           <a:p>
-            <a:pPr algn="l" indent="0" marL="0">
+            <a:pPr marL="0" indent="0" algn="l">
               <a:buNone/>
             </a:pPr>
             <a:r>
@@ -21522,9 +21458,27 @@
             <a:tbl>
               <a:tblPr/>
               <a:tblGrid>
-                <a:gridCol w="1325880"/>
-                <a:gridCol w="4160520"/>
-                <a:gridCol w="1234440"/>
+                <a:gridCol w="1325880">
+                  <a:extLst>
+                    <a:ext uri="{9D8B030D-6E8A-4147-A177-3AD203B41FA5}">
+                      <a16:colId xmlns:a16="http://schemas.microsoft.com/office/drawing/2014/main" val="20000"/>
+                    </a:ext>
+                  </a:extLst>
+                </a:gridCol>
+                <a:gridCol w="4160520">
+                  <a:extLst>
+                    <a:ext uri="{9D8B030D-6E8A-4147-A177-3AD203B41FA5}">
+                      <a16:colId xmlns:a16="http://schemas.microsoft.com/office/drawing/2014/main" val="20001"/>
+                    </a:ext>
+                  </a:extLst>
+                </a:gridCol>
+                <a:gridCol w="1234440">
+                  <a:extLst>
+                    <a:ext uri="{9D8B030D-6E8A-4147-A177-3AD203B41FA5}">
+                      <a16:colId xmlns:a16="http://schemas.microsoft.com/office/drawing/2014/main" val="20002"/>
+                    </a:ext>
+                  </a:extLst>
+                </a:gridCol>
               </a:tblGrid>
               <a:tr h="475488">
                 <a:tc>
@@ -21532,7 +21486,7 @@
                     <a:bodyPr/>
                     <a:lstStyle/>
                     <a:p>
-                      <a:pPr indent="0" marL="0">
+                      <a:pPr marL="0" indent="0">
                         <a:buNone/>
                       </a:pPr>
                       <a:r>
@@ -21593,7 +21547,7 @@
                     <a:bodyPr/>
                     <a:lstStyle/>
                     <a:p>
-                      <a:pPr indent="0" marL="0">
+                      <a:pPr marL="0" indent="0">
                         <a:buNone/>
                       </a:pPr>
                       <a:r>
@@ -21654,7 +21608,7 @@
                     <a:bodyPr/>
                     <a:lstStyle/>
                     <a:p>
-                      <a:pPr indent="0" marL="0">
+                      <a:pPr marL="0" indent="0">
                         <a:buNone/>
                       </a:pPr>
                       <a:r>
@@ -21710,6 +21664,11 @@
                     </a:solidFill>
                   </a:tcPr>
                 </a:tc>
+                <a:extLst>
+                  <a:ext uri="{0D108BD9-81ED-4DB2-BD59-A6C34878D82A}">
+                    <a16:rowId xmlns:a16="http://schemas.microsoft.com/office/drawing/2014/main" val="10000"/>
+                  </a:ext>
+                </a:extLst>
               </a:tr>
               <a:tr h="475488">
                 <a:tc>
@@ -21717,7 +21676,7 @@
                     <a:bodyPr/>
                     <a:lstStyle/>
                     <a:p>
-                      <a:pPr indent="0" marL="0">
+                      <a:pPr marL="0" indent="0">
                         <a:buNone/>
                       </a:pPr>
                       <a:r>
@@ -21778,7 +21737,7 @@
                     <a:bodyPr/>
                     <a:lstStyle/>
                     <a:p>
-                      <a:pPr indent="0" marL="0">
+                      <a:pPr marL="0" indent="0">
                         <a:buNone/>
                       </a:pPr>
                       <a:r>
@@ -21839,7 +21798,7 @@
                     <a:bodyPr/>
                     <a:lstStyle/>
                     <a:p>
-                      <a:pPr indent="0" marL="0">
+                      <a:pPr marL="0" indent="0">
                         <a:buNone/>
                       </a:pPr>
                       <a:r>
@@ -21895,6 +21854,11 @@
                     </a:solidFill>
                   </a:tcPr>
                 </a:tc>
+                <a:extLst>
+                  <a:ext uri="{0D108BD9-81ED-4DB2-BD59-A6C34878D82A}">
+                    <a16:rowId xmlns:a16="http://schemas.microsoft.com/office/drawing/2014/main" val="10001"/>
+                  </a:ext>
+                </a:extLst>
               </a:tr>
               <a:tr h="475488">
                 <a:tc>
@@ -21902,7 +21866,7 @@
                     <a:bodyPr/>
                     <a:lstStyle/>
                     <a:p>
-                      <a:pPr indent="0" marL="0">
+                      <a:pPr marL="0" indent="0">
                         <a:buNone/>
                       </a:pPr>
                       <a:r>
@@ -21963,7 +21927,7 @@
                     <a:bodyPr/>
                     <a:lstStyle/>
                     <a:p>
-                      <a:pPr indent="0" marL="0">
+                      <a:pPr marL="0" indent="0">
                         <a:buNone/>
                       </a:pPr>
                       <a:r>
@@ -22024,7 +21988,7 @@
                     <a:bodyPr/>
                     <a:lstStyle/>
                     <a:p>
-                      <a:pPr indent="0" marL="0">
+                      <a:pPr marL="0" indent="0">
                         <a:buNone/>
                       </a:pPr>
                       <a:r>
@@ -22080,6 +22044,11 @@
                     </a:solidFill>
                   </a:tcPr>
                 </a:tc>
+                <a:extLst>
+                  <a:ext uri="{0D108BD9-81ED-4DB2-BD59-A6C34878D82A}">
+                    <a16:rowId xmlns:a16="http://schemas.microsoft.com/office/drawing/2014/main" val="10002"/>
+                  </a:ext>
+                </a:extLst>
               </a:tr>
               <a:tr h="475488">
                 <a:tc>
@@ -22087,7 +22056,7 @@
                     <a:bodyPr/>
                     <a:lstStyle/>
                     <a:p>
-                      <a:pPr indent="0" marL="0">
+                      <a:pPr marL="0" indent="0">
                         <a:buNone/>
                       </a:pPr>
                       <a:r>
@@ -22148,7 +22117,7 @@
                     <a:bodyPr/>
                     <a:lstStyle/>
                     <a:p>
-                      <a:pPr indent="0" marL="0">
+                      <a:pPr marL="0" indent="0">
                         <a:buNone/>
                       </a:pPr>
                       <a:r>
@@ -22209,7 +22178,7 @@
                     <a:bodyPr/>
                     <a:lstStyle/>
                     <a:p>
-                      <a:pPr indent="0" marL="0">
+                      <a:pPr marL="0" indent="0">
                         <a:buNone/>
                       </a:pPr>
                       <a:r>
@@ -22265,6 +22234,11 @@
                     </a:solidFill>
                   </a:tcPr>
                 </a:tc>
+                <a:extLst>
+                  <a:ext uri="{0D108BD9-81ED-4DB2-BD59-A6C34878D82A}">
+                    <a16:rowId xmlns:a16="http://schemas.microsoft.com/office/drawing/2014/main" val="10003"/>
+                  </a:ext>
+                </a:extLst>
               </a:tr>
               <a:tr h="475488">
                 <a:tc>
@@ -22272,7 +22246,7 @@
                     <a:bodyPr/>
                     <a:lstStyle/>
                     <a:p>
-                      <a:pPr indent="0" marL="0">
+                      <a:pPr marL="0" indent="0">
                         <a:buNone/>
                       </a:pPr>
                       <a:r>
@@ -22333,7 +22307,7 @@
                     <a:bodyPr/>
                     <a:lstStyle/>
                     <a:p>
-                      <a:pPr indent="0" marL="0">
+                      <a:pPr marL="0" indent="0">
                         <a:buNone/>
                       </a:pPr>
                       <a:r>
@@ -22394,7 +22368,7 @@
                     <a:bodyPr/>
                     <a:lstStyle/>
                     <a:p>
-                      <a:pPr indent="0" marL="0">
+                      <a:pPr marL="0" indent="0">
                         <a:buNone/>
                       </a:pPr>
                       <a:r>
@@ -22450,6 +22424,11 @@
                     </a:solidFill>
                   </a:tcPr>
                 </a:tc>
+                <a:extLst>
+                  <a:ext uri="{0D108BD9-81ED-4DB2-BD59-A6C34878D82A}">
+                    <a16:rowId xmlns:a16="http://schemas.microsoft.com/office/drawing/2014/main" val="10004"/>
+                  </a:ext>
+                </a:extLst>
               </a:tr>
               <a:tr h="475488">
                 <a:tc>
@@ -22457,7 +22436,7 @@
                     <a:bodyPr/>
                     <a:lstStyle/>
                     <a:p>
-                      <a:pPr indent="0" marL="0">
+                      <a:pPr marL="0" indent="0">
                         <a:buNone/>
                       </a:pPr>
                       <a:r>
@@ -22518,7 +22497,7 @@
                     <a:bodyPr/>
                     <a:lstStyle/>
                     <a:p>
-                      <a:pPr indent="0" marL="0">
+                      <a:pPr marL="0" indent="0">
                         <a:buNone/>
                       </a:pPr>
                       <a:r>
@@ -22579,7 +22558,7 @@
                     <a:bodyPr/>
                     <a:lstStyle/>
                     <a:p>
-                      <a:pPr indent="0" marL="0">
+                      <a:pPr marL="0" indent="0">
                         <a:buNone/>
                       </a:pPr>
                       <a:r>
@@ -22635,6 +22614,11 @@
                     </a:solidFill>
                   </a:tcPr>
                 </a:tc>
+                <a:extLst>
+                  <a:ext uri="{0D108BD9-81ED-4DB2-BD59-A6C34878D82A}">
+                    <a16:rowId xmlns:a16="http://schemas.microsoft.com/office/drawing/2014/main" val="10005"/>
+                  </a:ext>
+                </a:extLst>
               </a:tr>
             </a:tbl>
           </a:graphicData>
@@ -22688,11 +22672,11 @@
           <a:bodyPr wrap="square" lIns="0" tIns="0" rIns="0" bIns="0" rtlCol="0" anchor="t"/>
           <a:lstStyle/>
           <a:p>
-            <a:pPr indent="0" marL="0">
+            <a:pPr marL="0" indent="0">
               <a:buNone/>
             </a:pPr>
             <a:r>
-              <a:rPr lang="en-US" sz="1000" b="1" spc="100" kern="0" dirty="0">
+              <a:rPr lang="en-US" sz="1000" b="1" kern="0" spc="100" dirty="0">
                 <a:solidFill>
                   <a:srgbClr val="D9A441"/>
                 </a:solidFill>
@@ -22724,7 +22708,7 @@
           <a:bodyPr wrap="square" lIns="0" tIns="0" rIns="0" bIns="0" rtlCol="0" anchor="t"/>
           <a:lstStyle/>
           <a:p>
-            <a:pPr indent="0" marL="0">
+            <a:pPr marL="0" indent="0">
               <a:buNone/>
             </a:pPr>
             <a:r>
@@ -22741,7 +22725,7 @@
             <a:endParaRPr lang="en-US" sz="1400" dirty="0"/>
           </a:p>
           <a:p>
-            <a:pPr indent="0" marL="0">
+            <a:pPr marL="0" indent="0">
               <a:buNone/>
             </a:pPr>
             <a:r>
@@ -22758,7 +22742,7 @@
             <a:endParaRPr lang="en-US" sz="1400" dirty="0"/>
           </a:p>
           <a:p>
-            <a:pPr indent="0" marL="0">
+            <a:pPr marL="0" indent="0">
               <a:buNone/>
             </a:pPr>
             <a:r>
@@ -22778,7 +22762,7 @@
       </p:sp>
       <p:sp>
         <p:nvSpPr>
-          <p:cNvPr id="8" name="Text 5"/>
+          <p:cNvPr id="4" name="Text 5"/>
           <p:cNvSpPr txBox="1"/>
           <p:nvPr/>
         </p:nvSpPr>
@@ -22797,7 +22781,7 @@
           <a:bodyPr wrap="square" lIns="0" tIns="0" rIns="0" bIns="0" rtlCol="0" anchor="t"/>
           <a:lstStyle/>
           <a:p>
-            <a:pPr indent="0" marL="0">
+            <a:pPr marL="0" indent="0">
               <a:buNone/>
             </a:pPr>
             <a:r>
@@ -22833,7 +22817,7 @@
           <a:bodyPr wrap="square" lIns="0" tIns="0" rIns="0" bIns="0" rtlCol="0" anchor="t"/>
           <a:lstStyle/>
           <a:p>
-            <a:pPr indent="0" marL="0">
+            <a:pPr marL="0" indent="0">
               <a:buNone/>
             </a:pPr>
             <a:r>
@@ -22869,7 +22853,7 @@
           <a:bodyPr wrap="square" lIns="0" tIns="0" rIns="0" bIns="0" rtlCol="0" anchor="t"/>
           <a:lstStyle/>
           <a:p>
-            <a:pPr indent="0" marL="0">
+            <a:pPr marL="0" indent="0">
               <a:buNone/>
             </a:pPr>
             <a:r>
@@ -22905,7 +22889,7 @@
           <a:bodyPr wrap="square" lIns="0" tIns="0" rIns="0" bIns="0" rtlCol="0" anchor="t"/>
           <a:lstStyle/>
           <a:p>
-            <a:pPr indent="0" marL="0">
+            <a:pPr marL="0" indent="0">
               <a:buNone/>
             </a:pPr>
             <a:r>
@@ -22941,7 +22925,7 @@
           <a:bodyPr wrap="square" lIns="0" tIns="0" rIns="0" bIns="0" rtlCol="0" anchor="t"/>
           <a:lstStyle/>
           <a:p>
-            <a:pPr indent="0" marL="0">
+            <a:pPr marL="0" indent="0">
               <a:buNone/>
             </a:pPr>
             <a:r>
@@ -22977,7 +22961,7 @@
           <a:bodyPr wrap="square" lIns="0" tIns="0" rIns="0" bIns="0" rtlCol="0" anchor="t"/>
           <a:lstStyle/>
           <a:p>
-            <a:pPr indent="0" marL="0">
+            <a:pPr marL="0" indent="0">
               <a:buNone/>
             </a:pPr>
             <a:r>
@@ -23013,7 +22997,7 @@
           <a:bodyPr wrap="square" lIns="0" tIns="0" rIns="0" bIns="0" rtlCol="0" anchor="t"/>
           <a:lstStyle/>
           <a:p>
-            <a:pPr indent="0" marL="0">
+            <a:pPr marL="0" indent="0">
               <a:buNone/>
             </a:pPr>
             <a:r>
@@ -23048,7 +23032,7 @@
           </a:prstGeom>
           <a:extLst>
             <a:ext uri="{C572A759-6A51-4108-AA02-DFA0A04FC94B}">
-              <ma14:wrappingTextBoxFlag xmlns:ma14="http://schemas.microsoft.com/office/mac/drawingml/2011/main" val="0"/>
+              <ma14:wrappingTextBoxFlag xmlns:ma14="http://schemas.microsoft.com/office/mac/drawingml/2011/main" xmlns="" val="0"/>
             </a:ext>
           </a:extLst>
         </p:spPr>
@@ -23066,7 +23050,7 @@
           <a:p>
             <a:pPr algn="r"/>
             <a:fld id="{F7021451-1387-4CA6-816F-3879F97B5CBC}" type="slidenum">
-              <a:rPr b="0" lang="en-US"/>
+              <a:rPr lang="en-US" b="0"/>
               <a:t>7</a:t>
             </a:fld>
             <a:endParaRPr lang="en-US"/>
@@ -23101,9 +23085,11 @@
       <p:sp>
         <p:nvSpPr>
           <p:cNvPr id="2" name="Text 0"/>
-          <p:cNvSpPr/>
+          <p:cNvSpPr>
+            <a:spLocks noGrp="1"/>
+          </p:cNvSpPr>
           <p:nvPr>
-            <p:ph idx="100" type="body" hasCustomPrompt="1"/>
+            <p:ph type="body" idx="100" hasCustomPrompt="1"/>
           </p:nvPr>
         </p:nvSpPr>
         <p:spPr>
@@ -23121,11 +23107,11 @@
           <a:bodyPr wrap="square" lIns="0" tIns="0" rIns="0" bIns="0" rtlCol="0" anchor="ctr"/>
           <a:lstStyle/>
           <a:p>
-            <a:pPr indent="0" marL="0">
+            <a:pPr marL="0" indent="0">
               <a:buNone/>
             </a:pPr>
             <a:r>
-              <a:rPr lang="en-US" sz="1200" b="1" spc="200" kern="0" dirty="0">
+              <a:rPr lang="en-US" sz="1200" b="1" kern="0" spc="200" dirty="0">
                 <a:solidFill>
                   <a:srgbClr val="8A5A0B"/>
                 </a:solidFill>
@@ -23139,9 +23125,11 @@
       <p:sp>
         <p:nvSpPr>
           <p:cNvPr id="3" name="Text 0"/>
-          <p:cNvSpPr/>
+          <p:cNvSpPr>
+            <a:spLocks noGrp="1"/>
+          </p:cNvSpPr>
           <p:nvPr>
-            <p:ph idx="101" type="title" hasCustomPrompt="1"/>
+            <p:ph type="title" idx="101" hasCustomPrompt="1"/>
           </p:nvPr>
         </p:nvSpPr>
         <p:spPr>
@@ -23159,7 +23147,7 @@
           <a:bodyPr wrap="square" lIns="0" tIns="0" rIns="0" bIns="0" rtlCol="0" anchor="t"/>
           <a:lstStyle/>
           <a:p>
-            <a:pPr algn="l" indent="0" marL="0">
+            <a:pPr marL="0" indent="0" algn="l">
               <a:buNone/>
             </a:pPr>
             <a:r>
@@ -23197,9 +23185,27 @@
             <a:tbl>
               <a:tblPr/>
               <a:tblGrid>
-                <a:gridCol w="1920240"/>
-                <a:gridCol w="2606040"/>
-                <a:gridCol w="1965960"/>
+                <a:gridCol w="1920240">
+                  <a:extLst>
+                    <a:ext uri="{9D8B030D-6E8A-4147-A177-3AD203B41FA5}">
+                      <a16:colId xmlns:a16="http://schemas.microsoft.com/office/drawing/2014/main" val="20000"/>
+                    </a:ext>
+                  </a:extLst>
+                </a:gridCol>
+                <a:gridCol w="2606040">
+                  <a:extLst>
+                    <a:ext uri="{9D8B030D-6E8A-4147-A177-3AD203B41FA5}">
+                      <a16:colId xmlns:a16="http://schemas.microsoft.com/office/drawing/2014/main" val="20001"/>
+                    </a:ext>
+                  </a:extLst>
+                </a:gridCol>
+                <a:gridCol w="1965960">
+                  <a:extLst>
+                    <a:ext uri="{9D8B030D-6E8A-4147-A177-3AD203B41FA5}">
+                      <a16:colId xmlns:a16="http://schemas.microsoft.com/office/drawing/2014/main" val="20002"/>
+                    </a:ext>
+                  </a:extLst>
+                </a:gridCol>
               </a:tblGrid>
               <a:tr h="457200">
                 <a:tc>
@@ -23207,7 +23213,7 @@
                     <a:bodyPr/>
                     <a:lstStyle/>
                     <a:p>
-                      <a:pPr indent="0" marL="0">
+                      <a:pPr marL="0" indent="0">
                         <a:buNone/>
                       </a:pPr>
                       <a:r>
@@ -23268,7 +23274,7 @@
                     <a:bodyPr/>
                     <a:lstStyle/>
                     <a:p>
-                      <a:pPr indent="0" marL="0">
+                      <a:pPr marL="0" indent="0">
                         <a:buNone/>
                       </a:pPr>
                       <a:r>
@@ -23329,7 +23335,7 @@
                     <a:bodyPr/>
                     <a:lstStyle/>
                     <a:p>
-                      <a:pPr indent="0" marL="0">
+                      <a:pPr marL="0" indent="0">
                         <a:buNone/>
                       </a:pPr>
                       <a:r>
@@ -23385,6 +23391,11 @@
                     </a:solidFill>
                   </a:tcPr>
                 </a:tc>
+                <a:extLst>
+                  <a:ext uri="{0D108BD9-81ED-4DB2-BD59-A6C34878D82A}">
+                    <a16:rowId xmlns:a16="http://schemas.microsoft.com/office/drawing/2014/main" val="10000"/>
+                  </a:ext>
+                </a:extLst>
               </a:tr>
               <a:tr h="457200">
                 <a:tc>
@@ -23392,7 +23403,7 @@
                     <a:bodyPr/>
                     <a:lstStyle/>
                     <a:p>
-                      <a:pPr indent="0" marL="0">
+                      <a:pPr marL="0" indent="0">
                         <a:buNone/>
                       </a:pPr>
                       <a:r>
@@ -23453,7 +23464,7 @@
                     <a:bodyPr/>
                     <a:lstStyle/>
                     <a:p>
-                      <a:pPr indent="0" marL="0">
+                      <a:pPr marL="0" indent="0">
                         <a:buNone/>
                       </a:pPr>
                       <a:r>
@@ -23514,7 +23525,7 @@
                     <a:bodyPr/>
                     <a:lstStyle/>
                     <a:p>
-                      <a:pPr indent="0" marL="0">
+                      <a:pPr marL="0" indent="0">
                         <a:buNone/>
                       </a:pPr>
                       <a:r>
@@ -23570,6 +23581,11 @@
                     </a:solidFill>
                   </a:tcPr>
                 </a:tc>
+                <a:extLst>
+                  <a:ext uri="{0D108BD9-81ED-4DB2-BD59-A6C34878D82A}">
+                    <a16:rowId xmlns:a16="http://schemas.microsoft.com/office/drawing/2014/main" val="10001"/>
+                  </a:ext>
+                </a:extLst>
               </a:tr>
               <a:tr h="457200">
                 <a:tc>
@@ -23577,7 +23593,7 @@
                     <a:bodyPr/>
                     <a:lstStyle/>
                     <a:p>
-                      <a:pPr indent="0" marL="0">
+                      <a:pPr marL="0" indent="0">
                         <a:buNone/>
                       </a:pPr>
                       <a:r>
@@ -23638,7 +23654,7 @@
                     <a:bodyPr/>
                     <a:lstStyle/>
                     <a:p>
-                      <a:pPr indent="0" marL="0">
+                      <a:pPr marL="0" indent="0">
                         <a:buNone/>
                       </a:pPr>
                       <a:r>
@@ -23699,7 +23715,7 @@
                     <a:bodyPr/>
                     <a:lstStyle/>
                     <a:p>
-                      <a:pPr indent="0" marL="0">
+                      <a:pPr marL="0" indent="0">
                         <a:buNone/>
                       </a:pPr>
                       <a:r>
@@ -23755,6 +23771,11 @@
                     </a:solidFill>
                   </a:tcPr>
                 </a:tc>
+                <a:extLst>
+                  <a:ext uri="{0D108BD9-81ED-4DB2-BD59-A6C34878D82A}">
+                    <a16:rowId xmlns:a16="http://schemas.microsoft.com/office/drawing/2014/main" val="10002"/>
+                  </a:ext>
+                </a:extLst>
               </a:tr>
               <a:tr h="457200">
                 <a:tc>
@@ -23762,7 +23783,7 @@
                     <a:bodyPr/>
                     <a:lstStyle/>
                     <a:p>
-                      <a:pPr indent="0" marL="0">
+                      <a:pPr marL="0" indent="0">
                         <a:buNone/>
                       </a:pPr>
                       <a:r>
@@ -23823,7 +23844,7 @@
                     <a:bodyPr/>
                     <a:lstStyle/>
                     <a:p>
-                      <a:pPr indent="0" marL="0">
+                      <a:pPr marL="0" indent="0">
                         <a:buNone/>
                       </a:pPr>
                       <a:r>
@@ -23884,7 +23905,7 @@
                     <a:bodyPr/>
                     <a:lstStyle/>
                     <a:p>
-                      <a:pPr indent="0" marL="0">
+                      <a:pPr marL="0" indent="0">
                         <a:buNone/>
                       </a:pPr>
                       <a:r>
@@ -23940,6 +23961,11 @@
                     </a:solidFill>
                   </a:tcPr>
                 </a:tc>
+                <a:extLst>
+                  <a:ext uri="{0D108BD9-81ED-4DB2-BD59-A6C34878D82A}">
+                    <a16:rowId xmlns:a16="http://schemas.microsoft.com/office/drawing/2014/main" val="10003"/>
+                  </a:ext>
+                </a:extLst>
               </a:tr>
               <a:tr h="457200">
                 <a:tc>
@@ -23947,7 +23973,7 @@
                     <a:bodyPr/>
                     <a:lstStyle/>
                     <a:p>
-                      <a:pPr indent="0" marL="0">
+                      <a:pPr marL="0" indent="0">
                         <a:buNone/>
                       </a:pPr>
                       <a:r>
@@ -24008,7 +24034,7 @@
                     <a:bodyPr/>
                     <a:lstStyle/>
                     <a:p>
-                      <a:pPr indent="0" marL="0">
+                      <a:pPr marL="0" indent="0">
                         <a:buNone/>
                       </a:pPr>
                       <a:r>
@@ -24069,7 +24095,7 @@
                     <a:bodyPr/>
                     <a:lstStyle/>
                     <a:p>
-                      <a:pPr indent="0" marL="0">
+                      <a:pPr marL="0" indent="0">
                         <a:buNone/>
                       </a:pPr>
                       <a:r>
@@ -24125,6 +24151,11 @@
                     </a:solidFill>
                   </a:tcPr>
                 </a:tc>
+                <a:extLst>
+                  <a:ext uri="{0D108BD9-81ED-4DB2-BD59-A6C34878D82A}">
+                    <a16:rowId xmlns:a16="http://schemas.microsoft.com/office/drawing/2014/main" val="10004"/>
+                  </a:ext>
+                </a:extLst>
               </a:tr>
               <a:tr h="457200">
                 <a:tc>
@@ -24132,7 +24163,7 @@
                     <a:bodyPr/>
                     <a:lstStyle/>
                     <a:p>
-                      <a:pPr indent="0" marL="0">
+                      <a:pPr marL="0" indent="0">
                         <a:buNone/>
                       </a:pPr>
                       <a:r>
@@ -24193,7 +24224,7 @@
                     <a:bodyPr/>
                     <a:lstStyle/>
                     <a:p>
-                      <a:pPr indent="0" marL="0">
+                      <a:pPr marL="0" indent="0">
                         <a:buNone/>
                       </a:pPr>
                       <a:r>
@@ -24254,7 +24285,7 @@
                     <a:bodyPr/>
                     <a:lstStyle/>
                     <a:p>
-                      <a:pPr indent="0" marL="0">
+                      <a:pPr marL="0" indent="0">
                         <a:buNone/>
                       </a:pPr>
                       <a:r>
@@ -24310,6 +24341,11 @@
                     </a:solidFill>
                   </a:tcPr>
                 </a:tc>
+                <a:extLst>
+                  <a:ext uri="{0D108BD9-81ED-4DB2-BD59-A6C34878D82A}">
+                    <a16:rowId xmlns:a16="http://schemas.microsoft.com/office/drawing/2014/main" val="10005"/>
+                  </a:ext>
+                </a:extLst>
               </a:tr>
               <a:tr h="457200">
                 <a:tc>
@@ -24317,7 +24353,7 @@
                     <a:bodyPr/>
                     <a:lstStyle/>
                     <a:p>
-                      <a:pPr indent="0" marL="0">
+                      <a:pPr marL="0" indent="0">
                         <a:buNone/>
                       </a:pPr>
                       <a:r>
@@ -24378,7 +24414,7 @@
                     <a:bodyPr/>
                     <a:lstStyle/>
                     <a:p>
-                      <a:pPr indent="0" marL="0">
+                      <a:pPr marL="0" indent="0">
                         <a:buNone/>
                       </a:pPr>
                       <a:r>
@@ -24439,7 +24475,7 @@
                     <a:bodyPr/>
                     <a:lstStyle/>
                     <a:p>
-                      <a:pPr indent="0" marL="0">
+                      <a:pPr marL="0" indent="0">
                         <a:buNone/>
                       </a:pPr>
                       <a:r>
@@ -24495,6 +24531,11 @@
                     </a:solidFill>
                   </a:tcPr>
                 </a:tc>
+                <a:extLst>
+                  <a:ext uri="{0D108BD9-81ED-4DB2-BD59-A6C34878D82A}">
+                    <a16:rowId xmlns:a16="http://schemas.microsoft.com/office/drawing/2014/main" val="10006"/>
+                  </a:ext>
+                </a:extLst>
               </a:tr>
             </a:tbl>
           </a:graphicData>
@@ -24521,7 +24562,7 @@
           <a:bodyPr wrap="square" lIns="0" tIns="0" rIns="0" bIns="0" rtlCol="0" anchor="t"/>
           <a:lstStyle/>
           <a:p>
-            <a:pPr indent="0" marL="0">
+            <a:pPr marL="0" indent="0">
               <a:buNone/>
             </a:pPr>
             <a:r>
@@ -24584,7 +24625,7 @@
           <a:bodyPr wrap="square" lIns="0" tIns="0" rIns="0" bIns="0" rtlCol="0" anchor="t"/>
           <a:lstStyle/>
           <a:p>
-            <a:pPr indent="0" marL="0">
+            <a:pPr marL="0" indent="0">
               <a:buNone/>
             </a:pPr>
             <a:r>
@@ -24628,7 +24669,7 @@
       </p:sp>
       <p:sp>
         <p:nvSpPr>
-          <p:cNvPr id="9" name="Text 6"/>
+          <p:cNvPr id="4" name="Text 6"/>
           <p:cNvSpPr txBox="1"/>
           <p:nvPr/>
         </p:nvSpPr>
@@ -24647,7 +24688,7 @@
           <a:bodyPr wrap="square" lIns="0" tIns="0" rIns="0" bIns="0" rtlCol="0" anchor="ctr"/>
           <a:lstStyle/>
           <a:p>
-            <a:pPr indent="0" marL="0">
+            <a:pPr marL="0" indent="0">
               <a:buNone/>
             </a:pPr>
             <a:r>
@@ -24734,7 +24775,7 @@
           <a:bodyPr wrap="square" lIns="0" tIns="0" rIns="0" bIns="0" rtlCol="0" anchor="ctr"/>
           <a:lstStyle/>
           <a:p>
-            <a:pPr indent="0" marL="0">
+            <a:pPr marL="0" indent="0">
               <a:buNone/>
             </a:pPr>
             <a:r>
@@ -24797,7 +24838,7 @@
           <a:bodyPr wrap="square" lIns="0" tIns="0" rIns="0" bIns="0" rtlCol="0" anchor="ctr"/>
           <a:lstStyle/>
           <a:p>
-            <a:pPr indent="0" marL="0">
+            <a:pPr marL="0" indent="0">
               <a:buNone/>
             </a:pPr>
             <a:r>
@@ -24860,7 +24901,7 @@
           <a:bodyPr wrap="square" lIns="0" tIns="0" rIns="0" bIns="0" rtlCol="0" anchor="ctr"/>
           <a:lstStyle/>
           <a:p>
-            <a:pPr indent="0" marL="0">
+            <a:pPr marL="0" indent="0">
               <a:buNone/>
             </a:pPr>
             <a:r>
@@ -24896,7 +24937,7 @@
           <a:bodyPr wrap="square" lIns="0" tIns="0" rIns="0" bIns="0" rtlCol="0" anchor="t"/>
           <a:lstStyle/>
           <a:p>
-            <a:pPr indent="0" marL="0">
+            <a:pPr marL="0" indent="0">
               <a:buNone/>
             </a:pPr>
             <a:r>
@@ -24931,7 +24972,7 @@
           </a:prstGeom>
           <a:extLst>
             <a:ext uri="{C572A759-6A51-4108-AA02-DFA0A04FC94B}">
-              <ma14:wrappingTextBoxFlag xmlns:ma14="http://schemas.microsoft.com/office/mac/drawingml/2011/main" val="0"/>
+              <ma14:wrappingTextBoxFlag xmlns:ma14="http://schemas.microsoft.com/office/mac/drawingml/2011/main" xmlns="" val="0"/>
             </a:ext>
           </a:extLst>
         </p:spPr>
@@ -24949,7 +24990,7 @@
           <a:p>
             <a:pPr algn="r"/>
             <a:fld id="{F7021451-1387-4CA6-816F-3879F97B5CBC}" type="slidenum">
-              <a:rPr b="0" lang="en-US"/>
+              <a:rPr lang="en-US" b="0"/>
               <a:t>8</a:t>
             </a:fld>
             <a:endParaRPr lang="en-US"/>
@@ -24984,9 +25025,11 @@
       <p:sp>
         <p:nvSpPr>
           <p:cNvPr id="2" name="Text 0"/>
-          <p:cNvSpPr/>
+          <p:cNvSpPr>
+            <a:spLocks noGrp="1"/>
+          </p:cNvSpPr>
           <p:nvPr>
-            <p:ph idx="100" type="body" hasCustomPrompt="1"/>
+            <p:ph type="body" idx="100" hasCustomPrompt="1"/>
           </p:nvPr>
         </p:nvSpPr>
         <p:spPr>
@@ -25004,11 +25047,11 @@
           <a:bodyPr wrap="square" lIns="0" tIns="0" rIns="0" bIns="0" rtlCol="0" anchor="ctr"/>
           <a:lstStyle/>
           <a:p>
-            <a:pPr indent="0" marL="0">
+            <a:pPr marL="0" indent="0">
               <a:buNone/>
             </a:pPr>
             <a:r>
-              <a:rPr lang="en-US" sz="1200" b="1" spc="200" kern="0" dirty="0">
+              <a:rPr lang="en-US" sz="1200" b="1" kern="0" spc="200" dirty="0">
                 <a:solidFill>
                   <a:srgbClr val="8A5A0B"/>
                 </a:solidFill>
@@ -25022,9 +25065,11 @@
       <p:sp>
         <p:nvSpPr>
           <p:cNvPr id="3" name="Text 0"/>
-          <p:cNvSpPr/>
+          <p:cNvSpPr>
+            <a:spLocks noGrp="1"/>
+          </p:cNvSpPr>
           <p:nvPr>
-            <p:ph idx="101" type="title" hasCustomPrompt="1"/>
+            <p:ph type="title" idx="101" hasCustomPrompt="1"/>
           </p:nvPr>
         </p:nvSpPr>
         <p:spPr>
@@ -25042,7 +25087,7 @@
           <a:bodyPr wrap="square" lIns="0" tIns="0" rIns="0" bIns="0" rtlCol="0" anchor="t"/>
           <a:lstStyle/>
           <a:p>
-            <a:pPr algn="l" indent="0" marL="0">
+            <a:pPr marL="0" indent="0" algn="l">
               <a:buNone/>
             </a:pPr>
             <a:r>
@@ -25105,7 +25150,7 @@
           <a:bodyPr wrap="square" lIns="0" tIns="0" rIns="0" bIns="0" rtlCol="0" anchor="ctr"/>
           <a:lstStyle/>
           <a:p>
-            <a:pPr algn="ctr" indent="0" marL="0">
+            <a:pPr marL="0" indent="0" algn="ctr">
               <a:buNone/>
             </a:pPr>
             <a:r>
@@ -25195,7 +25240,7 @@
           <a:bodyPr wrap="square" lIns="0" tIns="0" rIns="0" bIns="0" rtlCol="0" anchor="ctr"/>
           <a:lstStyle/>
           <a:p>
-            <a:pPr algn="ctr" indent="0" marL="0">
+            <a:pPr marL="0" indent="0" algn="ctr">
               <a:buNone/>
             </a:pPr>
             <a:r>
@@ -25285,7 +25330,7 @@
           <a:bodyPr wrap="square" lIns="0" tIns="0" rIns="0" bIns="0" rtlCol="0" anchor="ctr"/>
           <a:lstStyle/>
           <a:p>
-            <a:pPr algn="ctr" indent="0" marL="0">
+            <a:pPr marL="0" indent="0" algn="ctr">
               <a:buNone/>
             </a:pPr>
             <a:r>
@@ -25375,7 +25420,7 @@
           <a:bodyPr wrap="square" lIns="0" tIns="0" rIns="0" bIns="0" rtlCol="0" anchor="ctr"/>
           <a:lstStyle/>
           <a:p>
-            <a:pPr algn="ctr" indent="0" marL="0">
+            <a:pPr marL="0" indent="0" algn="ctr">
               <a:buNone/>
             </a:pPr>
             <a:r>
@@ -25465,7 +25510,7 @@
           <a:bodyPr wrap="square" lIns="0" tIns="0" rIns="0" bIns="0" rtlCol="0" anchor="ctr"/>
           <a:lstStyle/>
           <a:p>
-            <a:pPr algn="ctr" indent="0" marL="0">
+            <a:pPr marL="0" indent="0" algn="ctr">
               <a:buNone/>
             </a:pPr>
             <a:r>
@@ -25531,7 +25576,7 @@
           <a:bodyPr wrap="square" lIns="0" tIns="0" rIns="0" bIns="0" rtlCol="0" anchor="ctr"/>
           <a:lstStyle/>
           <a:p>
-            <a:pPr algn="ctr" indent="0" marL="0">
+            <a:pPr marL="0" indent="0" algn="ctr">
               <a:buNone/>
             </a:pPr>
             <a:r>
@@ -25618,7 +25663,7 @@
           <a:bodyPr wrap="square" lIns="0" tIns="0" rIns="0" bIns="0" rtlCol="0" anchor="t"/>
           <a:lstStyle/>
           <a:p>
-            <a:pPr algn="ctr" indent="0" marL="0">
+            <a:pPr marL="0" indent="0" algn="ctr">
               <a:buNone/>
             </a:pPr>
             <a:r>
@@ -25654,7 +25699,7 @@
           <a:bodyPr wrap="square" lIns="0" tIns="0" rIns="0" bIns="0" rtlCol="0" anchor="t"/>
           <a:lstStyle/>
           <a:p>
-            <a:pPr indent="0" marL="0">
+            <a:pPr marL="0" indent="0">
               <a:buNone/>
             </a:pPr>
             <a:r>
@@ -25690,7 +25735,7 @@
           <a:bodyPr wrap="square" lIns="0" tIns="0" rIns="0" bIns="0" rtlCol="0" anchor="t"/>
           <a:lstStyle/>
           <a:p>
-            <a:pPr indent="0" marL="0">
+            <a:pPr marL="0" indent="0">
               <a:buNone/>
             </a:pPr>
             <a:r>
@@ -25753,7 +25798,7 @@
           <a:bodyPr wrap="square" lIns="0" tIns="0" rIns="0" bIns="0" rtlCol="0" anchor="ctr"/>
           <a:lstStyle/>
           <a:p>
-            <a:pPr algn="ctr" indent="0" marL="0">
+            <a:pPr marL="0" indent="0" algn="ctr">
               <a:buNone/>
             </a:pPr>
             <a:r>
@@ -25789,7 +25834,7 @@
           <a:bodyPr wrap="square" lIns="0" tIns="0" rIns="0" bIns="0" rtlCol="0" anchor="t"/>
           <a:lstStyle/>
           <a:p>
-            <a:pPr indent="0" marL="0">
+            <a:pPr marL="0" indent="0">
               <a:buNone/>
             </a:pPr>
             <a:r>
@@ -25825,7 +25870,7 @@
           <a:bodyPr wrap="square" lIns="0" tIns="0" rIns="0" bIns="0" rtlCol="0" anchor="t"/>
           <a:lstStyle/>
           <a:p>
-            <a:pPr indent="0" marL="0">
+            <a:pPr marL="0" indent="0">
               <a:buNone/>
             </a:pPr>
             <a:r>
@@ -25888,7 +25933,7 @@
           <a:bodyPr wrap="square" lIns="0" tIns="0" rIns="0" bIns="0" rtlCol="0" anchor="ctr"/>
           <a:lstStyle/>
           <a:p>
-            <a:pPr algn="ctr" indent="0" marL="0">
+            <a:pPr marL="0" indent="0" algn="ctr">
               <a:buNone/>
             </a:pPr>
             <a:r>
@@ -25924,7 +25969,7 @@
           <a:bodyPr wrap="square" lIns="0" tIns="0" rIns="0" bIns="0" rtlCol="0" anchor="t"/>
           <a:lstStyle/>
           <a:p>
-            <a:pPr indent="0" marL="0">
+            <a:pPr marL="0" indent="0">
               <a:buNone/>
             </a:pPr>
             <a:r>
@@ -25960,7 +26005,7 @@
           <a:bodyPr wrap="square" lIns="0" tIns="0" rIns="0" bIns="0" rtlCol="0" anchor="t"/>
           <a:lstStyle/>
           <a:p>
-            <a:pPr indent="0" marL="0">
+            <a:pPr marL="0" indent="0">
               <a:buNone/>
             </a:pPr>
             <a:r>
@@ -26023,7 +26068,7 @@
           <a:bodyPr wrap="square" lIns="0" tIns="0" rIns="0" bIns="0" rtlCol="0" anchor="ctr"/>
           <a:lstStyle/>
           <a:p>
-            <a:pPr algn="ctr" indent="0" marL="0">
+            <a:pPr marL="0" indent="0" algn="ctr">
               <a:buNone/>
             </a:pPr>
             <a:r>
@@ -26059,7 +26104,7 @@
           <a:bodyPr wrap="square" lIns="0" tIns="0" rIns="0" bIns="0" rtlCol="0" anchor="t"/>
           <a:lstStyle/>
           <a:p>
-            <a:pPr indent="0" marL="0">
+            <a:pPr marL="0" indent="0">
               <a:buNone/>
             </a:pPr>
             <a:r>
@@ -26095,7 +26140,7 @@
           <a:bodyPr wrap="square" lIns="0" tIns="0" rIns="0" bIns="0" rtlCol="0" anchor="t"/>
           <a:lstStyle/>
           <a:p>
-            <a:pPr indent="0" marL="0">
+            <a:pPr marL="0" indent="0">
               <a:buNone/>
             </a:pPr>
             <a:r>
@@ -26158,7 +26203,7 @@
           <a:bodyPr wrap="square" lIns="0" tIns="0" rIns="0" bIns="0" rtlCol="0" anchor="ctr"/>
           <a:lstStyle/>
           <a:p>
-            <a:pPr algn="ctr" indent="0" marL="0">
+            <a:pPr marL="0" indent="0" algn="ctr">
               <a:buNone/>
             </a:pPr>
             <a:r>
@@ -26194,7 +26239,7 @@
           <a:bodyPr wrap="square" lIns="0" tIns="0" rIns="0" bIns="0" rtlCol="0" anchor="t"/>
           <a:lstStyle/>
           <a:p>
-            <a:pPr indent="0" marL="0">
+            <a:pPr marL="0" indent="0">
               <a:buNone/>
             </a:pPr>
             <a:r>
@@ -26230,7 +26275,7 @@
           <a:bodyPr wrap="square" lIns="0" tIns="0" rIns="0" bIns="0" rtlCol="0" anchor="t"/>
           <a:lstStyle/>
           <a:p>
-            <a:pPr indent="0" marL="0">
+            <a:pPr marL="0" indent="0">
               <a:buNone/>
             </a:pPr>
             <a:r>
@@ -26247,7 +26292,7 @@
       </p:sp>
       <p:sp>
         <p:nvSpPr>
-          <p:cNvPr id="25" name="Slide Number Placeholder 0"/>
+          <p:cNvPr id="41" name="Slide Number Placeholder 0"/>
           <p:cNvSpPr>
             <a:spLocks noGrp="1"/>
           </p:cNvSpPr>
@@ -26265,7 +26310,7 @@
           </a:prstGeom>
           <a:extLst>
             <a:ext uri="{C572A759-6A51-4108-AA02-DFA0A04FC94B}">
-              <ma14:wrappingTextBoxFlag xmlns:ma14="http://schemas.microsoft.com/office/mac/drawingml/2011/main" val="0"/>
+              <ma14:wrappingTextBoxFlag xmlns:ma14="http://schemas.microsoft.com/office/mac/drawingml/2011/main" xmlns="" val="0"/>
             </a:ext>
           </a:extLst>
         </p:spPr>
@@ -26283,7 +26328,7 @@
           <a:p>
             <a:pPr algn="r"/>
             <a:fld id="{F7021451-1387-4CA6-816F-3879F97B5CBC}" type="slidenum">
-              <a:rPr b="0" lang="en-US"/>
+              <a:rPr lang="en-US" b="0"/>
               <a:t>9</a:t>
             </a:fld>
             <a:endParaRPr lang="en-US"/>
@@ -26591,4 +26636,299 @@
     </a:ext>
   </a:extLst>
 </a:theme>
+</file>
+
+<file path=ppt/theme/theme2.xml><?xml version="1.0" encoding="utf-8"?>
+<a:theme xmlns:a="http://schemas.openxmlformats.org/drawingml/2006/main" name="Office Theme">
+  <a:themeElements>
+    <a:clrScheme name="Office">
+      <a:dk1>
+        <a:sysClr val="windowText" lastClr="000000"/>
+      </a:dk1>
+      <a:lt1>
+        <a:sysClr val="window" lastClr="FFFFFF"/>
+      </a:lt1>
+      <a:dk2>
+        <a:srgbClr val="44546A"/>
+      </a:dk2>
+      <a:lt2>
+        <a:srgbClr val="E7E6E6"/>
+      </a:lt2>
+      <a:accent1>
+        <a:srgbClr val="4472C4"/>
+      </a:accent1>
+      <a:accent2>
+        <a:srgbClr val="ED7D31"/>
+      </a:accent2>
+      <a:accent3>
+        <a:srgbClr val="A5A5A5"/>
+      </a:accent3>
+      <a:accent4>
+        <a:srgbClr val="FFC000"/>
+      </a:accent4>
+      <a:accent5>
+        <a:srgbClr val="5B9BD5"/>
+      </a:accent5>
+      <a:accent6>
+        <a:srgbClr val="70AD47"/>
+      </a:accent6>
+      <a:hlink>
+        <a:srgbClr val="0563C1"/>
+      </a:hlink>
+      <a:folHlink>
+        <a:srgbClr val="954F72"/>
+      </a:folHlink>
+    </a:clrScheme>
+    <a:fontScheme name="Office">
+      <a:majorFont>
+        <a:latin typeface="Calibri Light" panose="020F0302020204030204"/>
+        <a:ea typeface=""/>
+        <a:cs typeface=""/>
+        <a:font script="Jpan" typeface="游ゴシック Light"/>
+        <a:font script="Hang" typeface="맑은 고딕"/>
+        <a:font script="Hans" typeface="等线 Light"/>
+        <a:font script="Hant" typeface="新細明體"/>
+        <a:font script="Arab" typeface="Times New Roman"/>
+        <a:font script="Hebr" typeface="Times New Roman"/>
+        <a:font script="Thai" typeface="Angsana New"/>
+        <a:font script="Ethi" typeface="Nyala"/>
+        <a:font script="Beng" typeface="Vrinda"/>
+        <a:font script="Gujr" typeface="Shruti"/>
+        <a:font script="Khmr" typeface="MoolBoran"/>
+        <a:font script="Knda" typeface="Tunga"/>
+        <a:font script="Guru" typeface="Raavi"/>
+        <a:font script="Cans" typeface="Euphemia"/>
+        <a:font script="Cher" typeface="Plantagenet Cherokee"/>
+        <a:font script="Yiii" typeface="Microsoft Yi Baiti"/>
+        <a:font script="Tibt" typeface="Microsoft Himalaya"/>
+        <a:font script="Thaa" typeface="MV Boli"/>
+        <a:font script="Deva" typeface="Mangal"/>
+        <a:font script="Telu" typeface="Gautami"/>
+        <a:font script="Taml" typeface="Latha"/>
+        <a:font script="Syrc" typeface="Estrangelo Edessa"/>
+        <a:font script="Orya" typeface="Kalinga"/>
+        <a:font script="Mlym" typeface="Kartika"/>
+        <a:font script="Laoo" typeface="DokChampa"/>
+        <a:font script="Sinh" typeface="Iskoola Pota"/>
+        <a:font script="Mong" typeface="Mongolian Baiti"/>
+        <a:font script="Viet" typeface="Times New Roman"/>
+        <a:font script="Uigh" typeface="Microsoft Uighur"/>
+        <a:font script="Geor" typeface="Sylfaen"/>
+        <a:font script="Armn" typeface="Arial"/>
+        <a:font script="Bugi" typeface="Leelawadee UI"/>
+        <a:font script="Bopo" typeface="Microsoft JhengHei"/>
+        <a:font script="Java" typeface="Javanese Text"/>
+        <a:font script="Lisu" typeface="Segoe UI"/>
+        <a:font script="Mymr" typeface="Myanmar Text"/>
+        <a:font script="Nkoo" typeface="Ebrima"/>
+        <a:font script="Olck" typeface="Nirmala UI"/>
+        <a:font script="Osma" typeface="Ebrima"/>
+        <a:font script="Phag" typeface="Phagspa"/>
+        <a:font script="Syrn" typeface="Estrangelo Edessa"/>
+        <a:font script="Syrj" typeface="Estrangelo Edessa"/>
+        <a:font script="Syre" typeface="Estrangelo Edessa"/>
+        <a:font script="Sora" typeface="Nirmala UI"/>
+        <a:font script="Tale" typeface="Microsoft Tai Le"/>
+        <a:font script="Talu" typeface="Microsoft New Tai Lue"/>
+        <a:font script="Tfng" typeface="Ebrima"/>
+      </a:majorFont>
+      <a:minorFont>
+        <a:latin typeface="Calibri" panose="020F0502020204030204"/>
+        <a:ea typeface=""/>
+        <a:cs typeface=""/>
+        <a:font script="Jpan" typeface="游ゴシック"/>
+        <a:font script="Hang" typeface="맑은 고딕"/>
+        <a:font script="Hans" typeface="等线"/>
+        <a:font script="Hant" typeface="新細明體"/>
+        <a:font script="Arab" typeface="Arial"/>
+        <a:font script="Hebr" typeface="Arial"/>
+        <a:font script="Thai" typeface="Cordia New"/>
+        <a:font script="Ethi" typeface="Nyala"/>
+        <a:font script="Beng" typeface="Vrinda"/>
+        <a:font script="Gujr" typeface="Shruti"/>
+        <a:font script="Khmr" typeface="DaunPenh"/>
+        <a:font script="Knda" typeface="Tunga"/>
+        <a:font script="Guru" typeface="Raavi"/>
+        <a:font script="Cans" typeface="Euphemia"/>
+        <a:font script="Cher" typeface="Plantagenet Cherokee"/>
+        <a:font script="Yiii" typeface="Microsoft Yi Baiti"/>
+        <a:font script="Tibt" typeface="Microsoft Himalaya"/>
+        <a:font script="Thaa" typeface="MV Boli"/>
+        <a:font script="Deva" typeface="Mangal"/>
+        <a:font script="Telu" typeface="Gautami"/>
+        <a:font script="Taml" typeface="Latha"/>
+        <a:font script="Syrc" typeface="Estrangelo Edessa"/>
+        <a:font script="Orya" typeface="Kalinga"/>
+        <a:font script="Mlym" typeface="Kartika"/>
+        <a:font script="Laoo" typeface="DokChampa"/>
+        <a:font script="Sinh" typeface="Iskoola Pota"/>
+        <a:font script="Mong" typeface="Mongolian Baiti"/>
+        <a:font script="Viet" typeface="Arial"/>
+        <a:font script="Uigh" typeface="Microsoft Uighur"/>
+        <a:font script="Geor" typeface="Sylfaen"/>
+        <a:font script="Armn" typeface="Arial"/>
+        <a:font script="Bugi" typeface="Leelawadee UI"/>
+        <a:font script="Bopo" typeface="Microsoft JhengHei"/>
+        <a:font script="Java" typeface="Javanese Text"/>
+        <a:font script="Lisu" typeface="Segoe UI"/>
+        <a:font script="Mymr" typeface="Myanmar Text"/>
+        <a:font script="Nkoo" typeface="Ebrima"/>
+        <a:font script="Olck" typeface="Nirmala UI"/>
+        <a:font script="Osma" typeface="Ebrima"/>
+        <a:font script="Phag" typeface="Phagspa"/>
+        <a:font script="Syrn" typeface="Estrangelo Edessa"/>
+        <a:font script="Syrj" typeface="Estrangelo Edessa"/>
+        <a:font script="Syre" typeface="Estrangelo Edessa"/>
+        <a:font script="Sora" typeface="Nirmala UI"/>
+        <a:font script="Tale" typeface="Microsoft Tai Le"/>
+        <a:font script="Talu" typeface="Microsoft New Tai Lue"/>
+        <a:font script="Tfng" typeface="Ebrima"/>
+      </a:minorFont>
+    </a:fontScheme>
+    <a:fmtScheme name="Office">
+      <a:fillStyleLst>
+        <a:solidFill>
+          <a:schemeClr val="phClr"/>
+        </a:solidFill>
+        <a:gradFill rotWithShape="1">
+          <a:gsLst>
+            <a:gs pos="0">
+              <a:schemeClr val="phClr">
+                <a:lumMod val="110000"/>
+                <a:satMod val="105000"/>
+                <a:tint val="67000"/>
+              </a:schemeClr>
+            </a:gs>
+            <a:gs pos="50000">
+              <a:schemeClr val="phClr">
+                <a:lumMod val="105000"/>
+                <a:satMod val="103000"/>
+                <a:tint val="73000"/>
+              </a:schemeClr>
+            </a:gs>
+            <a:gs pos="100000">
+              <a:schemeClr val="phClr">
+                <a:lumMod val="105000"/>
+                <a:satMod val="109000"/>
+                <a:tint val="81000"/>
+              </a:schemeClr>
+            </a:gs>
+          </a:gsLst>
+          <a:lin ang="5400000" scaled="0"/>
+        </a:gradFill>
+        <a:gradFill rotWithShape="1">
+          <a:gsLst>
+            <a:gs pos="0">
+              <a:schemeClr val="phClr">
+                <a:satMod val="103000"/>
+                <a:lumMod val="102000"/>
+                <a:tint val="94000"/>
+              </a:schemeClr>
+            </a:gs>
+            <a:gs pos="50000">
+              <a:schemeClr val="phClr">
+                <a:satMod val="110000"/>
+                <a:lumMod val="100000"/>
+                <a:shade val="100000"/>
+              </a:schemeClr>
+            </a:gs>
+            <a:gs pos="100000">
+              <a:schemeClr val="phClr">
+                <a:lumMod val="99000"/>
+                <a:satMod val="120000"/>
+                <a:shade val="78000"/>
+              </a:schemeClr>
+            </a:gs>
+          </a:gsLst>
+          <a:lin ang="5400000" scaled="0"/>
+        </a:gradFill>
+      </a:fillStyleLst>
+      <a:lnStyleLst>
+        <a:ln w="6350" cap="flat" cmpd="sng" algn="ctr">
+          <a:solidFill>
+            <a:schemeClr val="phClr"/>
+          </a:solidFill>
+          <a:prstDash val="solid"/>
+          <a:miter lim="800000"/>
+        </a:ln>
+        <a:ln w="12700" cap="flat" cmpd="sng" algn="ctr">
+          <a:solidFill>
+            <a:schemeClr val="phClr"/>
+          </a:solidFill>
+          <a:prstDash val="solid"/>
+          <a:miter lim="800000"/>
+        </a:ln>
+        <a:ln w="19050" cap="flat" cmpd="sng" algn="ctr">
+          <a:solidFill>
+            <a:schemeClr val="phClr"/>
+          </a:solidFill>
+          <a:prstDash val="solid"/>
+          <a:miter lim="800000"/>
+        </a:ln>
+      </a:lnStyleLst>
+      <a:effectStyleLst>
+        <a:effectStyle>
+          <a:effectLst/>
+        </a:effectStyle>
+        <a:effectStyle>
+          <a:effectLst/>
+        </a:effectStyle>
+        <a:effectStyle>
+          <a:effectLst>
+            <a:outerShdw blurRad="57150" dist="19050" dir="5400000" algn="ctr" rotWithShape="0">
+              <a:srgbClr val="000000">
+                <a:alpha val="63000"/>
+              </a:srgbClr>
+            </a:outerShdw>
+          </a:effectLst>
+        </a:effectStyle>
+      </a:effectStyleLst>
+      <a:bgFillStyleLst>
+        <a:solidFill>
+          <a:schemeClr val="phClr"/>
+        </a:solidFill>
+        <a:solidFill>
+          <a:schemeClr val="phClr">
+            <a:tint val="95000"/>
+            <a:satMod val="170000"/>
+          </a:schemeClr>
+        </a:solidFill>
+        <a:gradFill rotWithShape="1">
+          <a:gsLst>
+            <a:gs pos="0">
+              <a:schemeClr val="phClr">
+                <a:tint val="93000"/>
+                <a:satMod val="150000"/>
+                <a:shade val="98000"/>
+                <a:lumMod val="102000"/>
+              </a:schemeClr>
+            </a:gs>
+            <a:gs pos="50000">
+              <a:schemeClr val="phClr">
+                <a:tint val="98000"/>
+                <a:satMod val="130000"/>
+                <a:shade val="90000"/>
+                <a:lumMod val="103000"/>
+              </a:schemeClr>
+            </a:gs>
+            <a:gs pos="100000">
+              <a:schemeClr val="phClr">
+                <a:shade val="63000"/>
+                <a:satMod val="120000"/>
+              </a:schemeClr>
+            </a:gs>
+          </a:gsLst>
+          <a:lin ang="5400000" scaled="0"/>
+        </a:gradFill>
+      </a:bgFillStyleLst>
+    </a:fmtScheme>
+  </a:themeElements>
+  <a:objectDefaults/>
+  <a:extraClrSchemeLst/>
+  <a:extLst>
+    <a:ext uri="{05A4C25C-085E-4340-85A3-A5531E510DB2}">
+      <thm15:themeFamily xmlns:thm15="http://schemas.microsoft.com/office/thememl/2012/main" name="Office Theme" id="{62F939B6-93AF-4DB8-9C6B-D6C7DFDC589F}" vid="{4A3C46E8-61CC-4603-A589-7422A47A8E4A}"/>
+    </a:ext>
+  </a:extLst>
+</a:theme>
 </file>